--- a/preview_v7/cn/l-cn-bs-u1-8.pptx
+++ b/preview_v7/cn/l-cn-bs-u1-8.pptx
@@ -3142,14 +3142,102 @@
       </p:sp>
       <p:sp>
         <p:nvSpPr>
-          <p:cNvPr id="3" name="TextBox 2"/>
+          <p:cNvPr id="3" name="Rectangle 2"/>
+          <p:cNvSpPr/>
+          <p:nvPr/>
+        </p:nvSpPr>
+        <p:spPr>
+          <a:xfrm>
+            <a:off x="0" y="0"/>
+            <a:ext cx="12191695" cy="1371600"/>
+          </a:xfrm>
+          <a:prstGeom prst="rect">
+            <a:avLst/>
+          </a:prstGeom>
+          <a:solidFill>
+            <a:srgbClr val="1C2A33"/>
+          </a:solidFill>
+          <a:ln>
+            <a:noFill/>
+          </a:ln>
+          <a:effectLst/>
+        </p:spPr>
+        <p:style>
+          <a:lnRef idx="1">
+            <a:schemeClr val="accent1"/>
+          </a:lnRef>
+          <a:fillRef idx="3">
+            <a:schemeClr val="accent1"/>
+          </a:fillRef>
+          <a:effectRef idx="2">
+            <a:schemeClr val="accent1"/>
+          </a:effectRef>
+          <a:fontRef idx="minor">
+            <a:schemeClr val="lt1"/>
+          </a:fontRef>
+        </p:style>
+        <p:txBody>
+          <a:bodyPr rtlCol="0" anchor="ctr"/>
+          <a:lstStyle/>
+          <a:p>
+            <a:pPr algn="ctr"/>
+          </a:p>
+        </p:txBody>
+      </p:sp>
+      <p:sp>
+        <p:nvSpPr>
+          <p:cNvPr id="4" name="Rectangle 3"/>
+          <p:cNvSpPr/>
+          <p:nvPr/>
+        </p:nvSpPr>
+        <p:spPr>
+          <a:xfrm>
+            <a:off x="640080" y="365760"/>
+            <a:ext cx="822960" cy="38100"/>
+          </a:xfrm>
+          <a:prstGeom prst="rect">
+            <a:avLst/>
+          </a:prstGeom>
+          <a:solidFill>
+            <a:srgbClr val="C8A86B"/>
+          </a:solidFill>
+          <a:ln>
+            <a:noFill/>
+          </a:ln>
+          <a:effectLst/>
+        </p:spPr>
+        <p:style>
+          <a:lnRef idx="1">
+            <a:schemeClr val="accent1"/>
+          </a:lnRef>
+          <a:fillRef idx="3">
+            <a:schemeClr val="accent1"/>
+          </a:fillRef>
+          <a:effectRef idx="2">
+            <a:schemeClr val="accent1"/>
+          </a:effectRef>
+          <a:fontRef idx="minor">
+            <a:schemeClr val="lt1"/>
+          </a:fontRef>
+        </p:style>
+        <p:txBody>
+          <a:bodyPr rtlCol="0" anchor="ctr"/>
+          <a:lstStyle/>
+          <a:p>
+            <a:pPr algn="ctr"/>
+          </a:p>
+        </p:txBody>
+      </p:sp>
+      <p:sp>
+        <p:nvSpPr>
+          <p:cNvPr id="5" name="TextBox 4"/>
           <p:cNvSpPr txBox="1"/>
           <p:nvPr/>
         </p:nvSpPr>
         <p:spPr>
           <a:xfrm>
-            <a:off x="640080" y="640080"/>
-            <a:ext cx="10911535" cy="502920"/>
+            <a:off x="640080" y="475488"/>
+            <a:ext cx="10911535" cy="457200"/>
           </a:xfrm>
           <a:prstGeom prst="rect">
             <a:avLst/>
@@ -3163,34 +3251,169 @@
           <a:lstStyle/>
           <a:p>
             <a:pPr algn="l">
+              <a:lnSpc>
+                <a:spcPct val="145000"/>
+              </a:lnSpc>
               <a:spcAft>
-                <a:spcPts val="0"/>
+                <a:spcPts val="400"/>
               </a:spcAft>
             </a:pPr>
             <a:r>
-              <a:rPr sz="1200" b="1">
-                <a:solidFill>
-                  <a:srgbClr val="B23A2A"/>
+              <a:rPr sz="1400" b="1">
+                <a:solidFill>
+                  <a:srgbClr val="C8A86B"/>
                 </a:solidFill>
                 <a:latin typeface="微软雅黑"/>
                 <a:ea typeface="微软雅黑"/>
                 <a:cs typeface="微软雅黑"/>
               </a:rPr>
-              <a:t>语文 · 必修上册 · 第1单元 青春的价值</a:t>
-            </a:r>
-          </a:p>
-        </p:txBody>
-      </p:sp>
-      <p:sp>
-        <p:nvSpPr>
-          <p:cNvPr id="4" name="Rectangle 3"/>
+              <a:t>语文 · 必修上册 · 第1单元（青春的价值）</a:t>
+            </a:r>
+          </a:p>
+        </p:txBody>
+      </p:sp>
+      <p:sp>
+        <p:nvSpPr>
+          <p:cNvPr id="6" name="TextBox 5"/>
+          <p:cNvSpPr txBox="1"/>
+          <p:nvPr/>
+        </p:nvSpPr>
+        <p:spPr>
+          <a:xfrm>
+            <a:off x="640080" y="914400"/>
+            <a:ext cx="10911535" cy="411480"/>
+          </a:xfrm>
+          <a:prstGeom prst="rect">
+            <a:avLst/>
+          </a:prstGeom>
+          <a:noFill/>
+        </p:spPr>
+        <p:txBody>
+          <a:bodyPr wrap="square" anchor="t" lIns="0" rIns="0" tIns="0" bIns="0">
+            <a:spAutoFit/>
+          </a:bodyPr>
+          <a:lstStyle/>
+          <a:p>
+            <a:pPr algn="l">
+              <a:lnSpc>
+                <a:spcPct val="145000"/>
+              </a:lnSpc>
+              <a:spcAft>
+                <a:spcPts val="400"/>
+              </a:spcAft>
+            </a:pPr>
+            <a:r>
+              <a:rPr sz="1300" b="0">
+                <a:solidFill>
+                  <a:srgbClr val="FFFFFF"/>
+                </a:solidFill>
+                <a:latin typeface="微软雅黑"/>
+                <a:ea typeface="微软雅黑"/>
+                <a:cs typeface="微软雅黑"/>
+              </a:rPr>
+              <a:t>第8课时 · 单元活动</a:t>
+            </a:r>
+          </a:p>
+        </p:txBody>
+      </p:sp>
+      <p:sp>
+        <p:nvSpPr>
+          <p:cNvPr id="7" name="Rectangle 6"/>
           <p:cNvSpPr/>
           <p:nvPr/>
         </p:nvSpPr>
         <p:spPr>
           <a:xfrm>
-            <a:off x="640080" y="1207008"/>
-            <a:ext cx="822960" cy="30480"/>
+            <a:off x="11185855" y="320040"/>
+            <a:ext cx="640080" cy="640080"/>
+          </a:xfrm>
+          <a:prstGeom prst="rect">
+            <a:avLst/>
+          </a:prstGeom>
+          <a:solidFill>
+            <a:srgbClr val="2E7D6B"/>
+          </a:solidFill>
+          <a:ln>
+            <a:noFill/>
+          </a:ln>
+          <a:effectLst/>
+        </p:spPr>
+        <p:style>
+          <a:lnRef idx="1">
+            <a:schemeClr val="accent1"/>
+          </a:lnRef>
+          <a:fillRef idx="3">
+            <a:schemeClr val="accent1"/>
+          </a:fillRef>
+          <a:effectRef idx="2">
+            <a:schemeClr val="accent1"/>
+          </a:effectRef>
+          <a:fontRef idx="minor">
+            <a:schemeClr val="lt1"/>
+          </a:fontRef>
+        </p:style>
+        <p:txBody>
+          <a:bodyPr rtlCol="0" anchor="ctr"/>
+          <a:lstStyle/>
+          <a:p>
+            <a:pPr algn="ctr"/>
+          </a:p>
+        </p:txBody>
+      </p:sp>
+      <p:sp>
+        <p:nvSpPr>
+          <p:cNvPr id="8" name="TextBox 7"/>
+          <p:cNvSpPr txBox="1"/>
+          <p:nvPr/>
+        </p:nvSpPr>
+        <p:spPr>
+          <a:xfrm>
+            <a:off x="640080" y="1965960"/>
+            <a:ext cx="10911535" cy="2377440"/>
+          </a:xfrm>
+          <a:prstGeom prst="rect">
+            <a:avLst/>
+          </a:prstGeom>
+          <a:noFill/>
+        </p:spPr>
+        <p:txBody>
+          <a:bodyPr wrap="square" anchor="t" lIns="0" rIns="0" tIns="0" bIns="0">
+            <a:spAutoFit/>
+          </a:bodyPr>
+          <a:lstStyle/>
+          <a:p>
+            <a:pPr algn="l">
+              <a:lnSpc>
+                <a:spcPct val="125000"/>
+              </a:lnSpc>
+              <a:spcAft>
+                <a:spcPts val="400"/>
+              </a:spcAft>
+            </a:pPr>
+            <a:r>
+              <a:rPr sz="3400" b="1">
+                <a:solidFill>
+                  <a:srgbClr val="1C2A33"/>
+                </a:solidFill>
+                <a:latin typeface="楷体"/>
+                <a:ea typeface="楷体"/>
+                <a:cs typeface="楷体"/>
+              </a:rPr>
+              <a:t>单元学习任务——「青春的价值」综合活动与成果展示</a:t>
+            </a:r>
+          </a:p>
+        </p:txBody>
+      </p:sp>
+      <p:sp>
+        <p:nvSpPr>
+          <p:cNvPr id="9" name="Rectangle 8"/>
+          <p:cNvSpPr/>
+          <p:nvPr/>
+        </p:nvSpPr>
+        <p:spPr>
+          <a:xfrm>
+            <a:off x="640080" y="4343400"/>
+            <a:ext cx="822960" cy="38100"/>
           </a:xfrm>
           <a:prstGeom prst="rect">
             <a:avLst/>
@@ -3227,14 +3450,14 @@
       </p:sp>
       <p:sp>
         <p:nvSpPr>
-          <p:cNvPr id="5" name="TextBox 4"/>
+          <p:cNvPr id="10" name="TextBox 9"/>
           <p:cNvSpPr txBox="1"/>
           <p:nvPr/>
         </p:nvSpPr>
         <p:spPr>
           <a:xfrm>
-            <a:off x="640080" y="1737360"/>
-            <a:ext cx="10911535" cy="2011680"/>
+            <a:off x="640080" y="4572000"/>
+            <a:ext cx="10911535" cy="1005840"/>
           </a:xfrm>
           <a:prstGeom prst="rect">
             <a:avLst/>
@@ -3249,76 +3472,42 @@
           <a:p>
             <a:pPr algn="l">
               <a:lnSpc>
-                <a:spcPct val="115000"/>
+                <a:spcPct val="145000"/>
               </a:lnSpc>
+              <a:spcAft>
+                <a:spcPts val="400"/>
+              </a:spcAft>
             </a:pPr>
             <a:r>
-              <a:rPr sz="4000" b="1">
-                <a:solidFill>
-                  <a:srgbClr val="1C2A33"/>
+              <a:rPr sz="1700" b="0">
+                <a:solidFill>
+                  <a:srgbClr val="6B6258"/>
                 </a:solidFill>
                 <a:latin typeface="楷体"/>
                 <a:ea typeface="楷体"/>
                 <a:cs typeface="楷体"/>
               </a:rPr>
-              <a:t>单元学习任务——「青春的价值」综合活动与成果展示</a:t>
-            </a:r>
-          </a:p>
-        </p:txBody>
-      </p:sp>
-      <p:sp>
-        <p:nvSpPr>
-          <p:cNvPr id="6" name="TextBox 5"/>
-          <p:cNvSpPr txBox="1"/>
-          <p:nvPr/>
-        </p:nvSpPr>
-        <p:spPr>
-          <a:xfrm>
-            <a:off x="640080" y="3840480"/>
-            <a:ext cx="10911535" cy="457200"/>
-          </a:xfrm>
-          <a:prstGeom prst="rect">
-            <a:avLst/>
-          </a:prstGeom>
-          <a:noFill/>
-        </p:spPr>
-        <p:txBody>
-          <a:bodyPr wrap="square" anchor="t" lIns="0" rIns="0" tIns="0" bIns="0">
-            <a:spAutoFit/>
-          </a:bodyPr>
-          <a:lstStyle/>
-          <a:p>
-            <a:pPr algn="l"/>
-            <a:r>
-              <a:rPr sz="1700" b="1">
-                <a:solidFill>
-                  <a:srgbClr val="B23A2A"/>
-                </a:solidFill>
-                <a:latin typeface="微软雅黑"/>
-                <a:ea typeface="微软雅黑"/>
-                <a:cs typeface="微软雅黑"/>
-              </a:rPr>
-              <a:t>单元活动  ·  第8课时  ·  45分钟</a:t>
-            </a:r>
-          </a:p>
-        </p:txBody>
-      </p:sp>
-      <p:sp>
-        <p:nvSpPr>
-          <p:cNvPr id="7" name="Rectangle 6"/>
+              <a:t>读诗，也写诗；看他人的青春，想自己的成长。</a:t>
+            </a:r>
+          </a:p>
+        </p:txBody>
+      </p:sp>
+      <p:sp>
+        <p:nvSpPr>
+          <p:cNvPr id="11" name="Rectangle 10"/>
           <p:cNvSpPr/>
           <p:nvPr/>
         </p:nvSpPr>
         <p:spPr>
           <a:xfrm>
-            <a:off x="640080" y="5394960"/>
-            <a:ext cx="2011680" cy="33020"/>
+            <a:off x="0" y="6656832"/>
+            <a:ext cx="12191695" cy="201168"/>
           </a:xfrm>
           <a:prstGeom prst="rect">
             <a:avLst/>
           </a:prstGeom>
           <a:solidFill>
-            <a:srgbClr val="C8A86B"/>
+            <a:srgbClr val="B23A2A"/>
           </a:solidFill>
           <a:ln>
             <a:noFill/>
@@ -3349,14 +3538,14 @@
       </p:sp>
       <p:sp>
         <p:nvSpPr>
-          <p:cNvPr id="8" name="TextBox 7"/>
+          <p:cNvPr id="12" name="TextBox 11"/>
           <p:cNvSpPr txBox="1"/>
           <p:nvPr/>
         </p:nvSpPr>
         <p:spPr>
           <a:xfrm>
-            <a:off x="640080" y="5623560"/>
-            <a:ext cx="10911535" cy="548640"/>
+            <a:off x="640080" y="6400800"/>
+            <a:ext cx="10911535" cy="274320"/>
           </a:xfrm>
           <a:prstGeom prst="rect">
             <a:avLst/>
@@ -3369,9 +3558,16 @@
           </a:bodyPr>
           <a:lstStyle/>
           <a:p>
-            <a:pPr algn="l"/>
-            <a:r>
-              <a:rPr sz="1400" b="0">
+            <a:pPr algn="l">
+              <a:lnSpc>
+                <a:spcPct val="145000"/>
+              </a:lnSpc>
+              <a:spcAft>
+                <a:spcPts val="400"/>
+              </a:spcAft>
+            </a:pPr>
+            <a:r>
+              <a:rPr sz="1100" b="0">
                 <a:solidFill>
                   <a:srgbClr val="6B6258"/>
                 </a:solidFill>
@@ -3379,14 +3575,14 @@
                 <a:ea typeface="微软雅黑"/>
                 <a:cs typeface="微软雅黑"/>
               </a:rPr>
-              <a:t>学习任务群：文学阅读与写作    |    年级：高一</a:t>
-            </a:r>
-          </a:p>
-        </p:txBody>
-      </p:sp>
-      <p:sp>
-        <p:nvSpPr>
-          <p:cNvPr id="9" name="TextBox 8"/>
+              <a:t>本课件未使用无关配图 · 学科色块兜底</a:t>
+            </a:r>
+          </a:p>
+        </p:txBody>
+      </p:sp>
+      <p:sp>
+        <p:nvSpPr>
+          <p:cNvPr id="13" name="TextBox 12"/>
           <p:cNvSpPr txBox="1"/>
           <p:nvPr/>
         </p:nvSpPr>
@@ -3570,14 +3766,58 @@
       </p:sp>
       <p:sp>
         <p:nvSpPr>
-          <p:cNvPr id="5" name="Rounded Rectangle 4"/>
+          <p:cNvPr id="5" name="TextBox 4"/>
+          <p:cNvSpPr txBox="1"/>
+          <p:nvPr/>
+        </p:nvSpPr>
+        <p:spPr>
+          <a:xfrm>
+            <a:off x="640080" y="1325880"/>
+            <a:ext cx="10911535" cy="640080"/>
+          </a:xfrm>
+          <a:prstGeom prst="rect">
+            <a:avLst/>
+          </a:prstGeom>
+          <a:noFill/>
+        </p:spPr>
+        <p:txBody>
+          <a:bodyPr wrap="square" anchor="t" lIns="0" rIns="0" tIns="0" bIns="0">
+            <a:spAutoFit/>
+          </a:bodyPr>
+          <a:lstStyle/>
+          <a:p>
+            <a:pPr algn="l">
+              <a:lnSpc>
+                <a:spcPct val="145000"/>
+              </a:lnSpc>
+              <a:spcAft>
+                <a:spcPts val="400"/>
+              </a:spcAft>
+            </a:pPr>
+            <a:r>
+              <a:rPr sz="3000" b="1">
+                <a:solidFill>
+                  <a:srgbClr val="1C2A33"/>
+                </a:solidFill>
+                <a:latin typeface="楷体"/>
+                <a:ea typeface="楷体"/>
+                <a:cs typeface="楷体"/>
+              </a:rPr>
+              <a:t>四向学习目标</a:t>
+            </a:r>
+          </a:p>
+        </p:txBody>
+      </p:sp>
+      <p:sp>
+        <p:nvSpPr>
+          <p:cNvPr id="6" name="Rounded Rectangle 5"/>
           <p:cNvSpPr/>
           <p:nvPr/>
         </p:nvSpPr>
         <p:spPr>
           <a:xfrm>
-            <a:off x="640080" y="1417320"/>
-            <a:ext cx="5349240" cy="2057400"/>
+            <a:off x="640080" y="2377440"/>
+            <a:ext cx="2453563" cy="3566160"/>
           </a:xfrm>
           <a:prstGeom prst="roundRect">
             <a:avLst/>
@@ -3585,7 +3825,7 @@
           <a:solidFill>
             <a:srgbClr val="FFFFFF"/>
           </a:solidFill>
-          <a:ln w="22860">
+          <a:ln w="20320">
             <a:solidFill>
               <a:srgbClr val="B23A2A"/>
             </a:solidFill>
@@ -3616,23 +3856,113 @@
       </p:sp>
       <p:sp>
         <p:nvSpPr>
-          <p:cNvPr id="6" name="Oval 5"/>
+          <p:cNvPr id="7" name="TextBox 6"/>
+          <p:cNvSpPr txBox="1"/>
+          <p:nvPr/>
+        </p:nvSpPr>
+        <p:spPr>
+          <a:xfrm>
+            <a:off x="914400" y="2578608"/>
+            <a:ext cx="1950643" cy="822960"/>
+          </a:xfrm>
+          <a:prstGeom prst="rect">
+            <a:avLst/>
+          </a:prstGeom>
+          <a:noFill/>
+        </p:spPr>
+        <p:txBody>
+          <a:bodyPr wrap="square" anchor="t" lIns="0" rIns="0" tIns="0" bIns="0">
+            <a:spAutoFit/>
+          </a:bodyPr>
+          <a:lstStyle/>
+          <a:p>
+            <a:pPr algn="l">
+              <a:lnSpc>
+                <a:spcPct val="130000"/>
+              </a:lnSpc>
+              <a:spcAft>
+                <a:spcPts val="400"/>
+              </a:spcAft>
+            </a:pPr>
+            <a:r>
+              <a:rPr sz="1600" b="1">
+                <a:solidFill>
+                  <a:srgbClr val="B23A2A"/>
+                </a:solidFill>
+                <a:latin typeface="微软雅黑"/>
+                <a:ea typeface="微软雅黑"/>
+                <a:cs typeface="微软雅黑"/>
+              </a:rPr>
+              <a:t>语言能力</a:t>
+            </a:r>
+          </a:p>
+        </p:txBody>
+      </p:sp>
+      <p:sp>
+        <p:nvSpPr>
+          <p:cNvPr id="8" name="TextBox 7"/>
+          <p:cNvSpPr txBox="1"/>
+          <p:nvPr/>
+        </p:nvSpPr>
+        <p:spPr>
+          <a:xfrm>
+            <a:off x="868680" y="3337560"/>
+            <a:ext cx="1996363" cy="2423160"/>
+          </a:xfrm>
+          <a:prstGeom prst="rect">
+            <a:avLst/>
+          </a:prstGeom>
+          <a:noFill/>
+        </p:spPr>
+        <p:txBody>
+          <a:bodyPr wrap="square" anchor="t" lIns="0" rIns="0" tIns="0" bIns="0">
+            <a:spAutoFit/>
+          </a:bodyPr>
+          <a:lstStyle/>
+          <a:p>
+            <a:pPr algn="l">
+              <a:lnSpc>
+                <a:spcPct val="145000"/>
+              </a:lnSpc>
+              <a:spcAft>
+                <a:spcPts val="400"/>
+              </a:spcAft>
+            </a:pPr>
+            <a:r>
+              <a:rPr sz="1250" b="0">
+                <a:solidFill>
+                  <a:srgbClr val="1C2A33"/>
+                </a:solidFill>
+                <a:latin typeface="楷体"/>
+                <a:ea typeface="楷体"/>
+                <a:cs typeface="楷体"/>
+              </a:rPr>
+              <a:t>有感情地朗诵一首新诗（自创或课文），做到节奏清晰、情感到位。</a:t>
+            </a:r>
+          </a:p>
+        </p:txBody>
+      </p:sp>
+      <p:sp>
+        <p:nvSpPr>
+          <p:cNvPr id="9" name="Rounded Rectangle 8"/>
           <p:cNvSpPr/>
           <p:nvPr/>
         </p:nvSpPr>
         <p:spPr>
           <a:xfrm>
-            <a:off x="804672" y="1581912"/>
-            <a:ext cx="457200" cy="457200"/>
-          </a:xfrm>
-          <a:prstGeom prst="ellipse">
+            <a:off x="3459403" y="2377440"/>
+            <a:ext cx="2453563" cy="3566160"/>
+          </a:xfrm>
+          <a:prstGeom prst="roundRect">
             <a:avLst/>
           </a:prstGeom>
           <a:solidFill>
-            <a:srgbClr val="B23A2A"/>
+            <a:srgbClr val="FFFFFF"/>
           </a:solidFill>
-          <a:ln>
-            <a:noFill/>
+          <a:ln w="20320">
+            <a:solidFill>
+              <a:srgbClr val="2E7D6B"/>
+            </a:solidFill>
           </a:ln>
           <a:effectLst/>
         </p:spPr>
@@ -3660,14 +3990,14 @@
       </p:sp>
       <p:sp>
         <p:nvSpPr>
-          <p:cNvPr id="7" name="TextBox 6"/>
+          <p:cNvPr id="10" name="TextBox 9"/>
           <p:cNvSpPr txBox="1"/>
           <p:nvPr/>
         </p:nvSpPr>
         <p:spPr>
           <a:xfrm>
-            <a:off x="804672" y="1636776"/>
-            <a:ext cx="457200" cy="384048"/>
+            <a:off x="3733723" y="2578608"/>
+            <a:ext cx="1950643" cy="822960"/>
           </a:xfrm>
           <a:prstGeom prst="rect">
             <a:avLst/>
@@ -3680,31 +4010,38 @@
           </a:bodyPr>
           <a:lstStyle/>
           <a:p>
-            <a:pPr algn="ctr"/>
+            <a:pPr algn="l">
+              <a:lnSpc>
+                <a:spcPct val="130000"/>
+              </a:lnSpc>
+              <a:spcAft>
+                <a:spcPts val="400"/>
+              </a:spcAft>
+            </a:pPr>
             <a:r>
               <a:rPr sz="1600" b="1">
                 <a:solidFill>
-                  <a:srgbClr val="FFFFFF"/>
+                  <a:srgbClr val="2E7D6B"/>
                 </a:solidFill>
                 <a:latin typeface="微软雅黑"/>
                 <a:ea typeface="微软雅黑"/>
                 <a:cs typeface="微软雅黑"/>
               </a:rPr>
-              <a:t>1</a:t>
-            </a:r>
-          </a:p>
-        </p:txBody>
-      </p:sp>
-      <p:sp>
-        <p:nvSpPr>
-          <p:cNvPr id="8" name="TextBox 7"/>
+              <a:t>文化意识</a:t>
+            </a:r>
+          </a:p>
+        </p:txBody>
+      </p:sp>
+      <p:sp>
+        <p:nvSpPr>
+          <p:cNvPr id="11" name="TextBox 10"/>
           <p:cNvSpPr txBox="1"/>
           <p:nvPr/>
         </p:nvSpPr>
         <p:spPr>
           <a:xfrm>
-            <a:off x="1371600" y="1527048"/>
-            <a:ext cx="4434840" cy="457200"/>
+            <a:off x="3688003" y="3337560"/>
+            <a:ext cx="1996363" cy="2423160"/>
           </a:xfrm>
           <a:prstGeom prst="rect">
             <a:avLst/>
@@ -3719,52 +4056,14 @@
           <a:p>
             <a:pPr algn="l">
               <a:lnSpc>
-                <a:spcPct val="110000"/>
+                <a:spcPct val="145000"/>
               </a:lnSpc>
+              <a:spcAft>
+                <a:spcPts val="400"/>
+              </a:spcAft>
             </a:pPr>
             <a:r>
-              <a:rPr sz="1600" b="1">
-                <a:solidFill>
-                  <a:srgbClr val="1C2A33"/>
-                </a:solidFill>
-                <a:latin typeface="微软雅黑"/>
-                <a:ea typeface="微软雅黑"/>
-                <a:cs typeface="微软雅黑"/>
-              </a:rPr>
-              <a:t>目标</a:t>
-            </a:r>
-          </a:p>
-        </p:txBody>
-      </p:sp>
-      <p:sp>
-        <p:nvSpPr>
-          <p:cNvPr id="9" name="TextBox 8"/>
-          <p:cNvSpPr txBox="1"/>
-          <p:nvPr/>
-        </p:nvSpPr>
-        <p:spPr>
-          <a:xfrm>
-            <a:off x="1371600" y="1965960"/>
-            <a:ext cx="4434840" cy="1417320"/>
-          </a:xfrm>
-          <a:prstGeom prst="rect">
-            <a:avLst/>
-          </a:prstGeom>
-          <a:noFill/>
-        </p:spPr>
-        <p:txBody>
-          <a:bodyPr wrap="square" anchor="t" lIns="0" rIns="0" tIns="0" bIns="0">
-            <a:spAutoFit/>
-          </a:bodyPr>
-          <a:lstStyle/>
-          <a:p>
-            <a:pPr algn="l">
-              <a:lnSpc>
-                <a:spcPct val="128000"/>
-              </a:lnSpc>
-            </a:pPr>
-            <a:r>
-              <a:rPr sz="1400" b="0">
+              <a:rPr sz="1250" b="0">
                 <a:solidFill>
                   <a:srgbClr val="1C2A33"/>
                 </a:solidFill>
@@ -3772,21 +4071,21 @@
                 <a:ea typeface="楷体"/>
                 <a:cs typeface="楷体"/>
               </a:rPr>
-              <a:t>语言能力：有感情地朗诵一首新诗（自创或课文），做到节奏清晰、情感到位。</a:t>
-            </a:r>
-          </a:p>
-        </p:txBody>
-      </p:sp>
-      <p:sp>
-        <p:nvSpPr>
-          <p:cNvPr id="10" name="Rounded Rectangle 9"/>
+              <a:t>在「青春诗会」中感受诗歌的社群力量，体会文学交流的文化意义。</a:t>
+            </a:r>
+          </a:p>
+        </p:txBody>
+      </p:sp>
+      <p:sp>
+        <p:nvSpPr>
+          <p:cNvPr id="12" name="Rounded Rectangle 11"/>
           <p:cNvSpPr/>
           <p:nvPr/>
         </p:nvSpPr>
         <p:spPr>
           <a:xfrm>
-            <a:off x="6263640" y="1417320"/>
-            <a:ext cx="5349240" cy="2057400"/>
+            <a:off x="6278727" y="2377440"/>
+            <a:ext cx="2453563" cy="3566160"/>
           </a:xfrm>
           <a:prstGeom prst="roundRect">
             <a:avLst/>
@@ -3794,9 +4093,9 @@
           <a:solidFill>
             <a:srgbClr val="FFFFFF"/>
           </a:solidFill>
-          <a:ln w="22860">
+          <a:ln w="20320">
             <a:solidFill>
-              <a:srgbClr val="B23A2A"/>
+              <a:srgbClr val="C8A86B"/>
             </a:solidFill>
           </a:ln>
           <a:effectLst/>
@@ -3825,23 +4124,113 @@
       </p:sp>
       <p:sp>
         <p:nvSpPr>
-          <p:cNvPr id="11" name="Oval 10"/>
+          <p:cNvPr id="13" name="TextBox 12"/>
+          <p:cNvSpPr txBox="1"/>
+          <p:nvPr/>
+        </p:nvSpPr>
+        <p:spPr>
+          <a:xfrm>
+            <a:off x="6553047" y="2578608"/>
+            <a:ext cx="1950643" cy="822960"/>
+          </a:xfrm>
+          <a:prstGeom prst="rect">
+            <a:avLst/>
+          </a:prstGeom>
+          <a:noFill/>
+        </p:spPr>
+        <p:txBody>
+          <a:bodyPr wrap="square" anchor="t" lIns="0" rIns="0" tIns="0" bIns="0">
+            <a:spAutoFit/>
+          </a:bodyPr>
+          <a:lstStyle/>
+          <a:p>
+            <a:pPr algn="l">
+              <a:lnSpc>
+                <a:spcPct val="130000"/>
+              </a:lnSpc>
+              <a:spcAft>
+                <a:spcPts val="400"/>
+              </a:spcAft>
+            </a:pPr>
+            <a:r>
+              <a:rPr sz="1600" b="1">
+                <a:solidFill>
+                  <a:srgbClr val="C8A86B"/>
+                </a:solidFill>
+                <a:latin typeface="微软雅黑"/>
+                <a:ea typeface="微软雅黑"/>
+                <a:cs typeface="微软雅黑"/>
+              </a:rPr>
+              <a:t>思维品质</a:t>
+            </a:r>
+          </a:p>
+        </p:txBody>
+      </p:sp>
+      <p:sp>
+        <p:nvSpPr>
+          <p:cNvPr id="14" name="TextBox 13"/>
+          <p:cNvSpPr txBox="1"/>
+          <p:nvPr/>
+        </p:nvSpPr>
+        <p:spPr>
+          <a:xfrm>
+            <a:off x="6507327" y="3337560"/>
+            <a:ext cx="1996363" cy="2423160"/>
+          </a:xfrm>
+          <a:prstGeom prst="rect">
+            <a:avLst/>
+          </a:prstGeom>
+          <a:noFill/>
+        </p:spPr>
+        <p:txBody>
+          <a:bodyPr wrap="square" anchor="t" lIns="0" rIns="0" tIns="0" bIns="0">
+            <a:spAutoFit/>
+          </a:bodyPr>
+          <a:lstStyle/>
+          <a:p>
+            <a:pPr algn="l">
+              <a:lnSpc>
+                <a:spcPct val="145000"/>
+              </a:lnSpc>
+              <a:spcAft>
+                <a:spcPts val="400"/>
+              </a:spcAft>
+            </a:pPr>
+            <a:r>
+              <a:rPr sz="1250" b="0">
+                <a:solidFill>
+                  <a:srgbClr val="1C2A33"/>
+                </a:solidFill>
+                <a:latin typeface="楷体"/>
+                <a:ea typeface="楷体"/>
+                <a:cs typeface="楷体"/>
+              </a:rPr>
+              <a:t>通过填写单元学习反思单，梳理8课时的学习路径，培养元认知能力。</a:t>
+            </a:r>
+          </a:p>
+        </p:txBody>
+      </p:sp>
+      <p:sp>
+        <p:nvSpPr>
+          <p:cNvPr id="15" name="Rounded Rectangle 14"/>
           <p:cNvSpPr/>
           <p:nvPr/>
         </p:nvSpPr>
         <p:spPr>
           <a:xfrm>
-            <a:off x="6428232" y="1581912"/>
-            <a:ext cx="457200" cy="457200"/>
-          </a:xfrm>
-          <a:prstGeom prst="ellipse">
+            <a:off x="9098051" y="2377440"/>
+            <a:ext cx="2453563" cy="3566160"/>
+          </a:xfrm>
+          <a:prstGeom prst="roundRect">
             <a:avLst/>
           </a:prstGeom>
           <a:solidFill>
-            <a:srgbClr val="B23A2A"/>
+            <a:srgbClr val="FFFFFF"/>
           </a:solidFill>
-          <a:ln>
-            <a:noFill/>
+          <a:ln w="20320">
+            <a:solidFill>
+              <a:srgbClr val="6B6258"/>
+            </a:solidFill>
           </a:ln>
           <a:effectLst/>
         </p:spPr>
@@ -3869,14 +4258,14 @@
       </p:sp>
       <p:sp>
         <p:nvSpPr>
-          <p:cNvPr id="12" name="TextBox 11"/>
+          <p:cNvPr id="16" name="TextBox 15"/>
           <p:cNvSpPr txBox="1"/>
           <p:nvPr/>
         </p:nvSpPr>
         <p:spPr>
           <a:xfrm>
-            <a:off x="6428232" y="1636776"/>
-            <a:ext cx="457200" cy="384048"/>
+            <a:off x="9372371" y="2578608"/>
+            <a:ext cx="1950643" cy="822960"/>
           </a:xfrm>
           <a:prstGeom prst="rect">
             <a:avLst/>
@@ -3889,31 +4278,38 @@
           </a:bodyPr>
           <a:lstStyle/>
           <a:p>
-            <a:pPr algn="ctr"/>
+            <a:pPr algn="l">
+              <a:lnSpc>
+                <a:spcPct val="130000"/>
+              </a:lnSpc>
+              <a:spcAft>
+                <a:spcPts val="400"/>
+              </a:spcAft>
+            </a:pPr>
             <a:r>
               <a:rPr sz="1600" b="1">
                 <a:solidFill>
-                  <a:srgbClr val="FFFFFF"/>
+                  <a:srgbClr val="6B6258"/>
                 </a:solidFill>
                 <a:latin typeface="微软雅黑"/>
                 <a:ea typeface="微软雅黑"/>
                 <a:cs typeface="微软雅黑"/>
               </a:rPr>
-              <a:t>2</a:t>
-            </a:r>
-          </a:p>
-        </p:txBody>
-      </p:sp>
-      <p:sp>
-        <p:nvSpPr>
-          <p:cNvPr id="13" name="TextBox 12"/>
+              <a:t>学习能力</a:t>
+            </a:r>
+          </a:p>
+        </p:txBody>
+      </p:sp>
+      <p:sp>
+        <p:nvSpPr>
+          <p:cNvPr id="17" name="TextBox 16"/>
           <p:cNvSpPr txBox="1"/>
           <p:nvPr/>
         </p:nvSpPr>
         <p:spPr>
           <a:xfrm>
-            <a:off x="6995160" y="1527048"/>
-            <a:ext cx="4434840" cy="457200"/>
+            <a:off x="9326651" y="3337560"/>
+            <a:ext cx="1996363" cy="2423160"/>
           </a:xfrm>
           <a:prstGeom prst="rect">
             <a:avLst/>
@@ -3928,52 +4324,14 @@
           <a:p>
             <a:pPr algn="l">
               <a:lnSpc>
-                <a:spcPct val="110000"/>
+                <a:spcPct val="145000"/>
               </a:lnSpc>
+              <a:spcAft>
+                <a:spcPts val="400"/>
+              </a:spcAft>
             </a:pPr>
             <a:r>
-              <a:rPr sz="1600" b="1">
-                <a:solidFill>
-                  <a:srgbClr val="1C2A33"/>
-                </a:solidFill>
-                <a:latin typeface="微软雅黑"/>
-                <a:ea typeface="微软雅黑"/>
-                <a:cs typeface="微软雅黑"/>
-              </a:rPr>
-              <a:t>目标</a:t>
-            </a:r>
-          </a:p>
-        </p:txBody>
-      </p:sp>
-      <p:sp>
-        <p:nvSpPr>
-          <p:cNvPr id="14" name="TextBox 13"/>
-          <p:cNvSpPr txBox="1"/>
-          <p:nvPr/>
-        </p:nvSpPr>
-        <p:spPr>
-          <a:xfrm>
-            <a:off x="6995160" y="1965960"/>
-            <a:ext cx="4434840" cy="1417320"/>
-          </a:xfrm>
-          <a:prstGeom prst="rect">
-            <a:avLst/>
-          </a:prstGeom>
-          <a:noFill/>
-        </p:spPr>
-        <p:txBody>
-          <a:bodyPr wrap="square" anchor="t" lIns="0" rIns="0" tIns="0" bIns="0">
-            <a:spAutoFit/>
-          </a:bodyPr>
-          <a:lstStyle/>
-          <a:p>
-            <a:pPr algn="l">
-              <a:lnSpc>
-                <a:spcPct val="128000"/>
-              </a:lnSpc>
-            </a:pPr>
-            <a:r>
-              <a:rPr sz="1400" b="0">
+              <a:rPr sz="1250" b="0">
                 <a:solidFill>
                   <a:srgbClr val="1C2A33"/>
                 </a:solidFill>
@@ -3981,134 +4339,7 @@
                 <a:ea typeface="楷体"/>
                 <a:cs typeface="楷体"/>
               </a:rPr>
-              <a:t>文化意识：在「青春诗会」中感受诗歌的社群力量，体会文学交流的文化意义。</a:t>
-            </a:r>
-          </a:p>
-        </p:txBody>
-      </p:sp>
-      <p:sp>
-        <p:nvSpPr>
-          <p:cNvPr id="15" name="Rounded Rectangle 14"/>
-          <p:cNvSpPr/>
-          <p:nvPr/>
-        </p:nvSpPr>
-        <p:spPr>
-          <a:xfrm>
-            <a:off x="640080" y="3703320"/>
-            <a:ext cx="5349240" cy="2057400"/>
-          </a:xfrm>
-          <a:prstGeom prst="roundRect">
-            <a:avLst/>
-          </a:prstGeom>
-          <a:solidFill>
-            <a:srgbClr val="FFFFFF"/>
-          </a:solidFill>
-          <a:ln w="22860">
-            <a:solidFill>
-              <a:srgbClr val="B23A2A"/>
-            </a:solidFill>
-          </a:ln>
-          <a:effectLst/>
-        </p:spPr>
-        <p:style>
-          <a:lnRef idx="1">
-            <a:schemeClr val="accent1"/>
-          </a:lnRef>
-          <a:fillRef idx="3">
-            <a:schemeClr val="accent1"/>
-          </a:fillRef>
-          <a:effectRef idx="2">
-            <a:schemeClr val="accent1"/>
-          </a:effectRef>
-          <a:fontRef idx="minor">
-            <a:schemeClr val="lt1"/>
-          </a:fontRef>
-        </p:style>
-        <p:txBody>
-          <a:bodyPr rtlCol="0" anchor="ctr"/>
-          <a:lstStyle/>
-          <a:p>
-            <a:pPr algn="ctr"/>
-          </a:p>
-        </p:txBody>
-      </p:sp>
-      <p:sp>
-        <p:nvSpPr>
-          <p:cNvPr id="16" name="Oval 15"/>
-          <p:cNvSpPr/>
-          <p:nvPr/>
-        </p:nvSpPr>
-        <p:spPr>
-          <a:xfrm>
-            <a:off x="804672" y="3867912"/>
-            <a:ext cx="457200" cy="457200"/>
-          </a:xfrm>
-          <a:prstGeom prst="ellipse">
-            <a:avLst/>
-          </a:prstGeom>
-          <a:solidFill>
-            <a:srgbClr val="B23A2A"/>
-          </a:solidFill>
-          <a:ln>
-            <a:noFill/>
-          </a:ln>
-          <a:effectLst/>
-        </p:spPr>
-        <p:style>
-          <a:lnRef idx="1">
-            <a:schemeClr val="accent1"/>
-          </a:lnRef>
-          <a:fillRef idx="3">
-            <a:schemeClr val="accent1"/>
-          </a:fillRef>
-          <a:effectRef idx="2">
-            <a:schemeClr val="accent1"/>
-          </a:effectRef>
-          <a:fontRef idx="minor">
-            <a:schemeClr val="lt1"/>
-          </a:fontRef>
-        </p:style>
-        <p:txBody>
-          <a:bodyPr rtlCol="0" anchor="ctr"/>
-          <a:lstStyle/>
-          <a:p>
-            <a:pPr algn="ctr"/>
-          </a:p>
-        </p:txBody>
-      </p:sp>
-      <p:sp>
-        <p:nvSpPr>
-          <p:cNvPr id="17" name="TextBox 16"/>
-          <p:cNvSpPr txBox="1"/>
-          <p:nvPr/>
-        </p:nvSpPr>
-        <p:spPr>
-          <a:xfrm>
-            <a:off x="804672" y="3922776"/>
-            <a:ext cx="457200" cy="384048"/>
-          </a:xfrm>
-          <a:prstGeom prst="rect">
-            <a:avLst/>
-          </a:prstGeom>
-          <a:noFill/>
-        </p:spPr>
-        <p:txBody>
-          <a:bodyPr wrap="square" anchor="t" lIns="0" rIns="0" tIns="0" bIns="0">
-            <a:spAutoFit/>
-          </a:bodyPr>
-          <a:lstStyle/>
-          <a:p>
-            <a:pPr algn="ctr"/>
-            <a:r>
-              <a:rPr sz="1600" b="1">
-                <a:solidFill>
-                  <a:srgbClr val="FFFFFF"/>
-                </a:solidFill>
-                <a:latin typeface="微软雅黑"/>
-                <a:ea typeface="微软雅黑"/>
-                <a:cs typeface="微软雅黑"/>
-              </a:rPr>
-              <a:t>3</a:t>
+              <a:t>能将阅读所得（意象品析）与写作所得（新诗创作）整合为单元学习成果。</a:t>
             </a:r>
           </a:p>
         </p:txBody>
@@ -4116,297 +4347,6 @@
       <p:sp>
         <p:nvSpPr>
           <p:cNvPr id="18" name="TextBox 17"/>
-          <p:cNvSpPr txBox="1"/>
-          <p:nvPr/>
-        </p:nvSpPr>
-        <p:spPr>
-          <a:xfrm>
-            <a:off x="1371600" y="3813048"/>
-            <a:ext cx="4434840" cy="457200"/>
-          </a:xfrm>
-          <a:prstGeom prst="rect">
-            <a:avLst/>
-          </a:prstGeom>
-          <a:noFill/>
-        </p:spPr>
-        <p:txBody>
-          <a:bodyPr wrap="square" anchor="t" lIns="0" rIns="0" tIns="0" bIns="0">
-            <a:spAutoFit/>
-          </a:bodyPr>
-          <a:lstStyle/>
-          <a:p>
-            <a:pPr algn="l">
-              <a:lnSpc>
-                <a:spcPct val="110000"/>
-              </a:lnSpc>
-            </a:pPr>
-            <a:r>
-              <a:rPr sz="1600" b="1">
-                <a:solidFill>
-                  <a:srgbClr val="1C2A33"/>
-                </a:solidFill>
-                <a:latin typeface="微软雅黑"/>
-                <a:ea typeface="微软雅黑"/>
-                <a:cs typeface="微软雅黑"/>
-              </a:rPr>
-              <a:t>目标</a:t>
-            </a:r>
-          </a:p>
-        </p:txBody>
-      </p:sp>
-      <p:sp>
-        <p:nvSpPr>
-          <p:cNvPr id="19" name="TextBox 18"/>
-          <p:cNvSpPr txBox="1"/>
-          <p:nvPr/>
-        </p:nvSpPr>
-        <p:spPr>
-          <a:xfrm>
-            <a:off x="1371600" y="4251960"/>
-            <a:ext cx="4434840" cy="1417320"/>
-          </a:xfrm>
-          <a:prstGeom prst="rect">
-            <a:avLst/>
-          </a:prstGeom>
-          <a:noFill/>
-        </p:spPr>
-        <p:txBody>
-          <a:bodyPr wrap="square" anchor="t" lIns="0" rIns="0" tIns="0" bIns="0">
-            <a:spAutoFit/>
-          </a:bodyPr>
-          <a:lstStyle/>
-          <a:p>
-            <a:pPr algn="l">
-              <a:lnSpc>
-                <a:spcPct val="128000"/>
-              </a:lnSpc>
-            </a:pPr>
-            <a:r>
-              <a:rPr sz="1400" b="0">
-                <a:solidFill>
-                  <a:srgbClr val="1C2A33"/>
-                </a:solidFill>
-                <a:latin typeface="楷体"/>
-                <a:ea typeface="楷体"/>
-                <a:cs typeface="楷体"/>
-              </a:rPr>
-              <a:t>思维品质：通过填写单元学习反思单，梳理8课时的学习路径，培养元认知能力。</a:t>
-            </a:r>
-          </a:p>
-        </p:txBody>
-      </p:sp>
-      <p:sp>
-        <p:nvSpPr>
-          <p:cNvPr id="20" name="Rounded Rectangle 19"/>
-          <p:cNvSpPr/>
-          <p:nvPr/>
-        </p:nvSpPr>
-        <p:spPr>
-          <a:xfrm>
-            <a:off x="6263640" y="3703320"/>
-            <a:ext cx="5349240" cy="2057400"/>
-          </a:xfrm>
-          <a:prstGeom prst="roundRect">
-            <a:avLst/>
-          </a:prstGeom>
-          <a:solidFill>
-            <a:srgbClr val="FFFFFF"/>
-          </a:solidFill>
-          <a:ln w="22860">
-            <a:solidFill>
-              <a:srgbClr val="B23A2A"/>
-            </a:solidFill>
-          </a:ln>
-          <a:effectLst/>
-        </p:spPr>
-        <p:style>
-          <a:lnRef idx="1">
-            <a:schemeClr val="accent1"/>
-          </a:lnRef>
-          <a:fillRef idx="3">
-            <a:schemeClr val="accent1"/>
-          </a:fillRef>
-          <a:effectRef idx="2">
-            <a:schemeClr val="accent1"/>
-          </a:effectRef>
-          <a:fontRef idx="minor">
-            <a:schemeClr val="lt1"/>
-          </a:fontRef>
-        </p:style>
-        <p:txBody>
-          <a:bodyPr rtlCol="0" anchor="ctr"/>
-          <a:lstStyle/>
-          <a:p>
-            <a:pPr algn="ctr"/>
-          </a:p>
-        </p:txBody>
-      </p:sp>
-      <p:sp>
-        <p:nvSpPr>
-          <p:cNvPr id="21" name="Oval 20"/>
-          <p:cNvSpPr/>
-          <p:nvPr/>
-        </p:nvSpPr>
-        <p:spPr>
-          <a:xfrm>
-            <a:off x="6428232" y="3867912"/>
-            <a:ext cx="457200" cy="457200"/>
-          </a:xfrm>
-          <a:prstGeom prst="ellipse">
-            <a:avLst/>
-          </a:prstGeom>
-          <a:solidFill>
-            <a:srgbClr val="B23A2A"/>
-          </a:solidFill>
-          <a:ln>
-            <a:noFill/>
-          </a:ln>
-          <a:effectLst/>
-        </p:spPr>
-        <p:style>
-          <a:lnRef idx="1">
-            <a:schemeClr val="accent1"/>
-          </a:lnRef>
-          <a:fillRef idx="3">
-            <a:schemeClr val="accent1"/>
-          </a:fillRef>
-          <a:effectRef idx="2">
-            <a:schemeClr val="accent1"/>
-          </a:effectRef>
-          <a:fontRef idx="minor">
-            <a:schemeClr val="lt1"/>
-          </a:fontRef>
-        </p:style>
-        <p:txBody>
-          <a:bodyPr rtlCol="0" anchor="ctr"/>
-          <a:lstStyle/>
-          <a:p>
-            <a:pPr algn="ctr"/>
-          </a:p>
-        </p:txBody>
-      </p:sp>
-      <p:sp>
-        <p:nvSpPr>
-          <p:cNvPr id="22" name="TextBox 21"/>
-          <p:cNvSpPr txBox="1"/>
-          <p:nvPr/>
-        </p:nvSpPr>
-        <p:spPr>
-          <a:xfrm>
-            <a:off x="6428232" y="3922776"/>
-            <a:ext cx="457200" cy="384048"/>
-          </a:xfrm>
-          <a:prstGeom prst="rect">
-            <a:avLst/>
-          </a:prstGeom>
-          <a:noFill/>
-        </p:spPr>
-        <p:txBody>
-          <a:bodyPr wrap="square" anchor="t" lIns="0" rIns="0" tIns="0" bIns="0">
-            <a:spAutoFit/>
-          </a:bodyPr>
-          <a:lstStyle/>
-          <a:p>
-            <a:pPr algn="ctr"/>
-            <a:r>
-              <a:rPr sz="1600" b="1">
-                <a:solidFill>
-                  <a:srgbClr val="FFFFFF"/>
-                </a:solidFill>
-                <a:latin typeface="微软雅黑"/>
-                <a:ea typeface="微软雅黑"/>
-                <a:cs typeface="微软雅黑"/>
-              </a:rPr>
-              <a:t>4</a:t>
-            </a:r>
-          </a:p>
-        </p:txBody>
-      </p:sp>
-      <p:sp>
-        <p:nvSpPr>
-          <p:cNvPr id="23" name="TextBox 22"/>
-          <p:cNvSpPr txBox="1"/>
-          <p:nvPr/>
-        </p:nvSpPr>
-        <p:spPr>
-          <a:xfrm>
-            <a:off x="6995160" y="3813048"/>
-            <a:ext cx="4434840" cy="457200"/>
-          </a:xfrm>
-          <a:prstGeom prst="rect">
-            <a:avLst/>
-          </a:prstGeom>
-          <a:noFill/>
-        </p:spPr>
-        <p:txBody>
-          <a:bodyPr wrap="square" anchor="t" lIns="0" rIns="0" tIns="0" bIns="0">
-            <a:spAutoFit/>
-          </a:bodyPr>
-          <a:lstStyle/>
-          <a:p>
-            <a:pPr algn="l">
-              <a:lnSpc>
-                <a:spcPct val="110000"/>
-              </a:lnSpc>
-            </a:pPr>
-            <a:r>
-              <a:rPr sz="1600" b="1">
-                <a:solidFill>
-                  <a:srgbClr val="1C2A33"/>
-                </a:solidFill>
-                <a:latin typeface="微软雅黑"/>
-                <a:ea typeface="微软雅黑"/>
-                <a:cs typeface="微软雅黑"/>
-              </a:rPr>
-              <a:t>目标</a:t>
-            </a:r>
-          </a:p>
-        </p:txBody>
-      </p:sp>
-      <p:sp>
-        <p:nvSpPr>
-          <p:cNvPr id="24" name="TextBox 23"/>
-          <p:cNvSpPr txBox="1"/>
-          <p:nvPr/>
-        </p:nvSpPr>
-        <p:spPr>
-          <a:xfrm>
-            <a:off x="6995160" y="4251960"/>
-            <a:ext cx="4434840" cy="1417320"/>
-          </a:xfrm>
-          <a:prstGeom prst="rect">
-            <a:avLst/>
-          </a:prstGeom>
-          <a:noFill/>
-        </p:spPr>
-        <p:txBody>
-          <a:bodyPr wrap="square" anchor="t" lIns="0" rIns="0" tIns="0" bIns="0">
-            <a:spAutoFit/>
-          </a:bodyPr>
-          <a:lstStyle/>
-          <a:p>
-            <a:pPr algn="l">
-              <a:lnSpc>
-                <a:spcPct val="128000"/>
-              </a:lnSpc>
-            </a:pPr>
-            <a:r>
-              <a:rPr sz="1400" b="0">
-                <a:solidFill>
-                  <a:srgbClr val="1C2A33"/>
-                </a:solidFill>
-                <a:latin typeface="楷体"/>
-                <a:ea typeface="楷体"/>
-                <a:cs typeface="楷体"/>
-              </a:rPr>
-              <a:t>学习能力：能将阅读所得（意象品析）与写作所得（新诗创作）整合为单元学习成果。</a:t>
-            </a:r>
-          </a:p>
-        </p:txBody>
-      </p:sp>
-      <p:sp>
-        <p:nvSpPr>
-          <p:cNvPr id="25" name="TextBox 24"/>
           <p:cNvSpPr txBox="1"/>
           <p:nvPr/>
         </p:nvSpPr>
@@ -4533,13 +4473,13 @@
             <a:r>
               <a:rPr sz="1300" b="1">
                 <a:solidFill>
-                  <a:srgbClr val="2E7D6B"/>
+                  <a:srgbClr val="B23A2A"/>
                 </a:solidFill>
                 <a:latin typeface="微软雅黑"/>
                 <a:ea typeface="微软雅黑"/>
                 <a:cs typeface="微软雅黑"/>
               </a:rPr>
-              <a:t>课文背景</a:t>
+              <a:t>背景 · 权威调研</a:t>
             </a:r>
           </a:p>
         </p:txBody>
@@ -4559,7 +4499,7 @@
             <a:avLst/>
           </a:prstGeom>
           <a:solidFill>
-            <a:srgbClr val="2E7D6B"/>
+            <a:srgbClr val="B23A2A"/>
           </a:solidFill>
           <a:ln>
             <a:noFill/>
@@ -4596,8 +4536,52 @@
         </p:nvSpPr>
         <p:spPr>
           <a:xfrm>
-            <a:off x="640080" y="1508760"/>
-            <a:ext cx="6766560" cy="4572000"/>
+            <a:off x="640080" y="1325880"/>
+            <a:ext cx="10911535" cy="548640"/>
+          </a:xfrm>
+          <a:prstGeom prst="rect">
+            <a:avLst/>
+          </a:prstGeom>
+          <a:noFill/>
+        </p:spPr>
+        <p:txBody>
+          <a:bodyPr wrap="square" anchor="t" lIns="0" rIns="0" tIns="0" bIns="0">
+            <a:spAutoFit/>
+          </a:bodyPr>
+          <a:lstStyle/>
+          <a:p>
+            <a:pPr algn="l">
+              <a:lnSpc>
+                <a:spcPct val="145000"/>
+              </a:lnSpc>
+              <a:spcAft>
+                <a:spcPts val="400"/>
+              </a:spcAft>
+            </a:pPr>
+            <a:r>
+              <a:rPr sz="2600" b="1">
+                <a:solidFill>
+                  <a:srgbClr val="1C2A33"/>
+                </a:solidFill>
+                <a:latin typeface="楷体"/>
+                <a:ea typeface="楷体"/>
+                <a:cs typeface="楷体"/>
+              </a:rPr>
+              <a:t>课文定位与资料来源</a:t>
+            </a:r>
+          </a:p>
+        </p:txBody>
+      </p:sp>
+      <p:sp>
+        <p:nvSpPr>
+          <p:cNvPr id="6" name="TextBox 5"/>
+          <p:cNvSpPr txBox="1"/>
+          <p:nvPr/>
+        </p:nvSpPr>
+        <p:spPr>
+          <a:xfrm>
+            <a:off x="640080" y="2011680"/>
+            <a:ext cx="5227167" cy="4480560"/>
           </a:xfrm>
           <a:prstGeom prst="rect">
             <a:avLst/>
@@ -4615,11 +4599,11 @@
                 <a:spcPct val="150000"/>
               </a:lnSpc>
               <a:spcAft>
-                <a:spcPts val="600"/>
+                <a:spcPts val="800"/>
               </a:spcAft>
             </a:pPr>
             <a:r>
-              <a:rPr sz="1600" b="0">
+              <a:rPr sz="1300" b="0">
                 <a:solidFill>
                   <a:srgbClr val="1C2A33"/>
                 </a:solidFill>
@@ -4627,46 +4611,104 @@
                 <a:ea typeface="楷体"/>
                 <a:cs typeface="楷体"/>
               </a:rPr>
-              <a:t>本课为第一单元收官课时，执行教材「单元学习任务」要求：以「青春诗会」为载体，整合本单元阅读与写作成果。活动包含三个环节：①青春诗朗诵会（朗诵自己创作的或单元课文中的诗）；②青春意象展（用一句话+一个意象概括单元学习感悟）；③单元学习总结（填写学习反思单）。本课不是知识新，而是综合展示与元认知反思课。</a:t>
-            </a:r>
-          </a:p>
-        </p:txBody>
-      </p:sp>
-      <p:pic>
-        <p:nvPicPr>
-          <p:cNvPr id="6" name="Picture 5" descr="typewriter.jpg"/>
-          <p:cNvPicPr>
-            <a:picLocks noChangeAspect="1"/>
-          </p:cNvPicPr>
-          <p:nvPr/>
-        </p:nvPicPr>
-        <p:blipFill>
-          <a:blip r:embed="rId2"/>
-          <a:srcRect l="5860" r="5860"/>
-          <a:stretch>
-            <a:fillRect/>
-          </a:stretch>
-        </p:blipFill>
-        <p:spPr>
-          <a:xfrm>
-            <a:off x="8046720" y="1508760"/>
-            <a:ext cx="4114800" cy="3108960"/>
-          </a:xfrm>
-          <a:prstGeom prst="rect">
-            <a:avLst/>
-          </a:prstGeom>
-        </p:spPr>
-      </p:pic>
-      <p:sp>
-        <p:nvSpPr>
-          <p:cNvPr id="7" name="TextBox 6"/>
+              <a:t>本课为第一单元收官课时，执行教材「单元学习任务」要求：以「青春诗会」为载体，整合本单元阅读与写作成果。</a:t>
+            </a:r>
+          </a:p>
+          <a:p>
+            <a:pPr algn="l">
+              <a:lnSpc>
+                <a:spcPct val="150000"/>
+              </a:lnSpc>
+              <a:spcAft>
+                <a:spcPts val="800"/>
+              </a:spcAft>
+            </a:pPr>
+            <a:r>
+              <a:rPr sz="1300" b="0">
+                <a:solidFill>
+                  <a:srgbClr val="1C2A33"/>
+                </a:solidFill>
+                <a:latin typeface="楷体"/>
+                <a:ea typeface="楷体"/>
+                <a:cs typeface="楷体"/>
+              </a:rPr>
+              <a:t>活动包含三个环节：①青春诗朗诵会（朗诵自己创作的或单元课文中的诗）；②青春意象展（用一句话+一个意象概括单元学习感悟）；③单元学习总结（填写学习反思单）。</a:t>
+            </a:r>
+          </a:p>
+          <a:p>
+            <a:pPr algn="l">
+              <a:lnSpc>
+                <a:spcPct val="150000"/>
+              </a:lnSpc>
+              <a:spcAft>
+                <a:spcPts val="800"/>
+              </a:spcAft>
+            </a:pPr>
+            <a:r>
+              <a:rPr sz="1300" b="0">
+                <a:solidFill>
+                  <a:srgbClr val="1C2A33"/>
+                </a:solidFill>
+                <a:latin typeface="楷体"/>
+                <a:ea typeface="楷体"/>
+                <a:cs typeface="楷体"/>
+              </a:rPr>
+              <a:t>本课不是知识新，而是综合展示与元认知反思课。</a:t>
+            </a:r>
+          </a:p>
+        </p:txBody>
+      </p:sp>
+      <p:sp>
+        <p:nvSpPr>
+          <p:cNvPr id="7" name="Rounded Rectangle 6"/>
+          <p:cNvSpPr/>
+          <p:nvPr/>
+        </p:nvSpPr>
+        <p:spPr>
+          <a:xfrm>
+            <a:off x="6324447" y="2011680"/>
+            <a:ext cx="5227167" cy="4480560"/>
+          </a:xfrm>
+          <a:prstGeom prst="roundRect">
+            <a:avLst/>
+          </a:prstGeom>
+          <a:solidFill>
+            <a:srgbClr val="1C2A33"/>
+          </a:solidFill>
+          <a:effectLst/>
+        </p:spPr>
+        <p:style>
+          <a:lnRef idx="1">
+            <a:schemeClr val="accent1"/>
+          </a:lnRef>
+          <a:fillRef idx="3">
+            <a:schemeClr val="accent1"/>
+          </a:fillRef>
+          <a:effectRef idx="2">
+            <a:schemeClr val="accent1"/>
+          </a:effectRef>
+          <a:fontRef idx="minor">
+            <a:schemeClr val="lt1"/>
+          </a:fontRef>
+        </p:style>
+        <p:txBody>
+          <a:bodyPr rtlCol="0" anchor="ctr"/>
+          <a:lstStyle/>
+          <a:p>
+            <a:pPr algn="ctr"/>
+          </a:p>
+        </p:txBody>
+      </p:sp>
+      <p:sp>
+        <p:nvSpPr>
+          <p:cNvPr id="8" name="TextBox 7"/>
           <p:cNvSpPr txBox="1"/>
           <p:nvPr/>
         </p:nvSpPr>
         <p:spPr>
           <a:xfrm>
-            <a:off x="8046720" y="4663440"/>
-            <a:ext cx="4114800" cy="365760"/>
+            <a:off x="6598767" y="2194560"/>
+            <a:ext cx="4678527" cy="457200"/>
           </a:xfrm>
           <a:prstGeom prst="rect">
             <a:avLst/>
@@ -4679,24 +4721,140 @@
           </a:bodyPr>
           <a:lstStyle/>
           <a:p>
-            <a:pPr algn="ctr"/>
-            <a:r>
-              <a:rPr sz="1100" b="0">
-                <a:solidFill>
-                  <a:srgbClr val="6B6258"/>
+            <a:pPr algn="l">
+              <a:lnSpc>
+                <a:spcPct val="145000"/>
+              </a:lnSpc>
+              <a:spcAft>
+                <a:spcPts val="400"/>
+              </a:spcAft>
+            </a:pPr>
+            <a:r>
+              <a:rPr sz="1500" b="1">
+                <a:solidFill>
+                  <a:srgbClr val="C8A86B"/>
+                </a:solidFill>
+                <a:latin typeface="楷体"/>
+                <a:ea typeface="楷体"/>
+                <a:cs typeface="楷体"/>
+              </a:rPr>
+              <a:t>资料来源（WebSearch 核实）</a:t>
+            </a:r>
+          </a:p>
+        </p:txBody>
+      </p:sp>
+      <p:sp>
+        <p:nvSpPr>
+          <p:cNvPr id="9" name="TextBox 8"/>
+          <p:cNvSpPr txBox="1"/>
+          <p:nvPr/>
+        </p:nvSpPr>
+        <p:spPr>
+          <a:xfrm>
+            <a:off x="6598767" y="2697480"/>
+            <a:ext cx="4678527" cy="2743200"/>
+          </a:xfrm>
+          <a:prstGeom prst="rect">
+            <a:avLst/>
+          </a:prstGeom>
+          <a:noFill/>
+        </p:spPr>
+        <p:txBody>
+          <a:bodyPr wrap="square" anchor="t" lIns="0" rIns="0" tIns="0" bIns="0">
+            <a:spAutoFit/>
+          </a:bodyPr>
+          <a:lstStyle/>
+          <a:p>
+            <a:pPr algn="l">
+              <a:lnSpc>
+                <a:spcPct val="140000"/>
+              </a:lnSpc>
+              <a:spcAft>
+                <a:spcPts val="900"/>
+              </a:spcAft>
+            </a:pPr>
+            <a:r>
+              <a:rPr sz="1250" b="0">
+                <a:solidFill>
+                  <a:srgbClr val="FFFFFF"/>
+                </a:solidFill>
+                <a:latin typeface="楷体"/>
+                <a:ea typeface="楷体"/>
+                <a:cs typeface="楷体"/>
+              </a:rPr>
+              <a:t>· 21世纪教育网《第一单元大单元教学设计(任务式)》（zy.21cnjy.com/24287741）</a:t>
+            </a:r>
+          </a:p>
+          <a:p>
+            <a:pPr algn="l">
+              <a:lnSpc>
+                <a:spcPct val="140000"/>
+              </a:lnSpc>
+              <a:spcAft>
+                <a:spcPts val="900"/>
+              </a:spcAft>
+            </a:pPr>
+            <a:r>
+              <a:rPr sz="1250" b="0">
+                <a:solidFill>
+                  <a:srgbClr val="FFFFFF"/>
+                </a:solidFill>
+                <a:latin typeface="楷体"/>
+                <a:ea typeface="楷体"/>
+                <a:cs typeface="楷体"/>
+              </a:rPr>
+              <a:t>· 无锡市堰桥高中 诗歌阅读与写作活动展（yqzzx.net）</a:t>
+            </a:r>
+          </a:p>
+        </p:txBody>
+      </p:sp>
+      <p:sp>
+        <p:nvSpPr>
+          <p:cNvPr id="10" name="TextBox 9"/>
+          <p:cNvSpPr txBox="1"/>
+          <p:nvPr/>
+        </p:nvSpPr>
+        <p:spPr>
+          <a:xfrm>
+            <a:off x="6598767" y="5715000"/>
+            <a:ext cx="4678527" cy="640080"/>
+          </a:xfrm>
+          <a:prstGeom prst="rect">
+            <a:avLst/>
+          </a:prstGeom>
+          <a:noFill/>
+        </p:spPr>
+        <p:txBody>
+          <a:bodyPr wrap="square" anchor="t" lIns="0" rIns="0" tIns="0" bIns="0">
+            <a:spAutoFit/>
+          </a:bodyPr>
+          <a:lstStyle/>
+          <a:p>
+            <a:pPr algn="l">
+              <a:lnSpc>
+                <a:spcPct val="145000"/>
+              </a:lnSpc>
+              <a:spcAft>
+                <a:spcPts val="400"/>
+              </a:spcAft>
+            </a:pPr>
+            <a:r>
+              <a:rPr sz="1200" b="0">
+                <a:solidFill>
+                  <a:srgbClr val="E7DFD2"/>
                 </a:solidFill>
                 <a:latin typeface="微软雅黑"/>
                 <a:ea typeface="微软雅黑"/>
                 <a:cs typeface="微软雅黑"/>
               </a:rPr>
-              <a:t>资料图（自由授权，复用 typewriter.jpg）</a:t>
-            </a:r>
-          </a:p>
-        </p:txBody>
-      </p:sp>
-      <p:sp>
-        <p:nvSpPr>
-          <p:cNvPr id="8" name="TextBox 7"/>
+              <a:t>本课件未使用无关配图 · 学科色块兜底</a:t>
+            </a:r>
+          </a:p>
+        </p:txBody>
+      </p:sp>
+      <p:sp>
+        <p:nvSpPr>
+          <p:cNvPr id="11" name="TextBox 10"/>
           <p:cNvSpPr txBox="1"/>
           <p:nvPr/>
         </p:nvSpPr>
@@ -4829,7 +4987,7 @@
                 <a:ea typeface="微软雅黑"/>
                 <a:cs typeface="微软雅黑"/>
               </a:rPr>
-              <a:t>学习重点</a:t>
+              <a:t>重点</a:t>
             </a:r>
           </a:p>
         </p:txBody>
@@ -4880,14 +5038,58 @@
       </p:sp>
       <p:sp>
         <p:nvSpPr>
-          <p:cNvPr id="5" name="Rounded Rectangle 4"/>
+          <p:cNvPr id="5" name="TextBox 4"/>
+          <p:cNvSpPr txBox="1"/>
+          <p:nvPr/>
+        </p:nvSpPr>
+        <p:spPr>
+          <a:xfrm>
+            <a:off x="640080" y="1325880"/>
+            <a:ext cx="10911535" cy="548640"/>
+          </a:xfrm>
+          <a:prstGeom prst="rect">
+            <a:avLst/>
+          </a:prstGeom>
+          <a:noFill/>
+        </p:spPr>
+        <p:txBody>
+          <a:bodyPr wrap="square" anchor="t" lIns="0" rIns="0" tIns="0" bIns="0">
+            <a:spAutoFit/>
+          </a:bodyPr>
+          <a:lstStyle/>
+          <a:p>
+            <a:pPr algn="l">
+              <a:lnSpc>
+                <a:spcPct val="145000"/>
+              </a:lnSpc>
+              <a:spcAft>
+                <a:spcPts val="400"/>
+              </a:spcAft>
+            </a:pPr>
+            <a:r>
+              <a:rPr sz="2600" b="1">
+                <a:solidFill>
+                  <a:srgbClr val="1C2A33"/>
+                </a:solidFill>
+                <a:latin typeface="楷体"/>
+                <a:ea typeface="楷体"/>
+                <a:cs typeface="楷体"/>
+              </a:rPr>
+              <a:t>本课重点</a:t>
+            </a:r>
+          </a:p>
+        </p:txBody>
+      </p:sp>
+      <p:sp>
+        <p:nvSpPr>
+          <p:cNvPr id="6" name="Rounded Rectangle 5"/>
           <p:cNvSpPr/>
           <p:nvPr/>
         </p:nvSpPr>
         <p:spPr>
           <a:xfrm>
-            <a:off x="640080" y="1371600"/>
-            <a:ext cx="10911535" cy="1597152"/>
+            <a:off x="640080" y="2194560"/>
+            <a:ext cx="3393338" cy="3931920"/>
           </a:xfrm>
           <a:prstGeom prst="roundRect">
             <a:avLst/>
@@ -4895,7 +5097,451 @@
           <a:solidFill>
             <a:srgbClr val="FFFFFF"/>
           </a:solidFill>
-          <a:ln w="22860">
+          <a:ln w="20320">
+            <a:solidFill>
+              <a:srgbClr val="B23A2A"/>
+            </a:solidFill>
+          </a:ln>
+          <a:effectLst/>
+        </p:spPr>
+        <p:style>
+          <a:lnRef idx="1">
+            <a:schemeClr val="accent1"/>
+          </a:lnRef>
+          <a:fillRef idx="3">
+            <a:schemeClr val="accent1"/>
+          </a:fillRef>
+          <a:effectRef idx="2">
+            <a:schemeClr val="accent1"/>
+          </a:effectRef>
+          <a:fontRef idx="minor">
+            <a:schemeClr val="lt1"/>
+          </a:fontRef>
+        </p:style>
+        <p:txBody>
+          <a:bodyPr rtlCol="0" anchor="ctr"/>
+          <a:lstStyle/>
+          <a:p>
+            <a:pPr algn="ctr"/>
+          </a:p>
+        </p:txBody>
+      </p:sp>
+      <p:sp>
+        <p:nvSpPr>
+          <p:cNvPr id="7" name="Oval 6"/>
+          <p:cNvSpPr/>
+          <p:nvPr/>
+        </p:nvSpPr>
+        <p:spPr>
+          <a:xfrm>
+            <a:off x="822960" y="2377440"/>
+            <a:ext cx="502920" cy="502920"/>
+          </a:xfrm>
+          <a:prstGeom prst="ellipse">
+            <a:avLst/>
+          </a:prstGeom>
+          <a:solidFill>
+            <a:srgbClr val="B23A2A"/>
+          </a:solidFill>
+          <a:ln>
+            <a:noFill/>
+          </a:ln>
+          <a:effectLst/>
+        </p:spPr>
+        <p:style>
+          <a:lnRef idx="1">
+            <a:schemeClr val="accent1"/>
+          </a:lnRef>
+          <a:fillRef idx="3">
+            <a:schemeClr val="accent1"/>
+          </a:fillRef>
+          <a:effectRef idx="2">
+            <a:schemeClr val="accent1"/>
+          </a:effectRef>
+          <a:fontRef idx="minor">
+            <a:schemeClr val="lt1"/>
+          </a:fontRef>
+        </p:style>
+        <p:txBody>
+          <a:bodyPr rtlCol="0" anchor="ctr"/>
+          <a:lstStyle/>
+          <a:p>
+            <a:pPr algn="ctr"/>
+          </a:p>
+        </p:txBody>
+      </p:sp>
+      <p:sp>
+        <p:nvSpPr>
+          <p:cNvPr id="8" name="TextBox 7"/>
+          <p:cNvSpPr txBox="1"/>
+          <p:nvPr/>
+        </p:nvSpPr>
+        <p:spPr>
+          <a:xfrm>
+            <a:off x="822960" y="2450592"/>
+            <a:ext cx="502920" cy="384048"/>
+          </a:xfrm>
+          <a:prstGeom prst="rect">
+            <a:avLst/>
+          </a:prstGeom>
+          <a:noFill/>
+        </p:spPr>
+        <p:txBody>
+          <a:bodyPr wrap="square" anchor="t" lIns="0" rIns="0" tIns="0" bIns="0">
+            <a:spAutoFit/>
+          </a:bodyPr>
+          <a:lstStyle/>
+          <a:p>
+            <a:pPr algn="ctr">
+              <a:lnSpc>
+                <a:spcPct val="145000"/>
+              </a:lnSpc>
+              <a:spcAft>
+                <a:spcPts val="400"/>
+              </a:spcAft>
+            </a:pPr>
+            <a:r>
+              <a:rPr sz="1800" b="1">
+                <a:solidFill>
+                  <a:srgbClr val="FFFFFF"/>
+                </a:solidFill>
+                <a:latin typeface="微软雅黑"/>
+                <a:ea typeface="微软雅黑"/>
+                <a:cs typeface="微软雅黑"/>
+              </a:rPr>
+              <a:t>①</a:t>
+            </a:r>
+          </a:p>
+        </p:txBody>
+      </p:sp>
+      <p:sp>
+        <p:nvSpPr>
+          <p:cNvPr id="9" name="TextBox 8"/>
+          <p:cNvSpPr txBox="1"/>
+          <p:nvPr/>
+        </p:nvSpPr>
+        <p:spPr>
+          <a:xfrm>
+            <a:off x="1508760" y="2395728"/>
+            <a:ext cx="2296058" cy="822960"/>
+          </a:xfrm>
+          <a:prstGeom prst="rect">
+            <a:avLst/>
+          </a:prstGeom>
+          <a:noFill/>
+        </p:spPr>
+        <p:txBody>
+          <a:bodyPr wrap="square" anchor="t" lIns="0" rIns="0" tIns="0" bIns="0">
+            <a:spAutoFit/>
+          </a:bodyPr>
+          <a:lstStyle/>
+          <a:p>
+            <a:pPr algn="l">
+              <a:lnSpc>
+                <a:spcPct val="130000"/>
+              </a:lnSpc>
+              <a:spcAft>
+                <a:spcPts val="400"/>
+              </a:spcAft>
+            </a:pPr>
+            <a:r>
+              <a:rPr sz="1600" b="1">
+                <a:solidFill>
+                  <a:srgbClr val="B23A2A"/>
+                </a:solidFill>
+                <a:latin typeface="微软雅黑"/>
+                <a:ea typeface="微软雅黑"/>
+                <a:cs typeface="微软雅黑"/>
+              </a:rPr>
+              <a:t>青春诗朗诵会</a:t>
+            </a:r>
+          </a:p>
+        </p:txBody>
+      </p:sp>
+      <p:sp>
+        <p:nvSpPr>
+          <p:cNvPr id="10" name="TextBox 9"/>
+          <p:cNvSpPr txBox="1"/>
+          <p:nvPr/>
+        </p:nvSpPr>
+        <p:spPr>
+          <a:xfrm>
+            <a:off x="868680" y="3154680"/>
+            <a:ext cx="2936138" cy="2788920"/>
+          </a:xfrm>
+          <a:prstGeom prst="rect">
+            <a:avLst/>
+          </a:prstGeom>
+          <a:noFill/>
+        </p:spPr>
+        <p:txBody>
+          <a:bodyPr wrap="square" anchor="t" lIns="0" rIns="0" tIns="0" bIns="0">
+            <a:spAutoFit/>
+          </a:bodyPr>
+          <a:lstStyle/>
+          <a:p>
+            <a:pPr algn="l">
+              <a:lnSpc>
+                <a:spcPct val="145000"/>
+              </a:lnSpc>
+              <a:spcAft>
+                <a:spcPts val="400"/>
+              </a:spcAft>
+            </a:pPr>
+            <a:r>
+              <a:rPr sz="1350" b="0">
+                <a:solidFill>
+                  <a:srgbClr val="1C2A33"/>
+                </a:solidFill>
+                <a:latin typeface="楷体"/>
+                <a:ea typeface="楷体"/>
+                <a:cs typeface="楷体"/>
+              </a:rPr>
+              <a:t>每人/小组朗诵一首诗（自创或课文），限时2分钟。</a:t>
+            </a:r>
+          </a:p>
+        </p:txBody>
+      </p:sp>
+      <p:sp>
+        <p:nvSpPr>
+          <p:cNvPr id="11" name="Rounded Rectangle 10"/>
+          <p:cNvSpPr/>
+          <p:nvPr/>
+        </p:nvSpPr>
+        <p:spPr>
+          <a:xfrm>
+            <a:off x="4399178" y="2194560"/>
+            <a:ext cx="3393338" cy="3931920"/>
+          </a:xfrm>
+          <a:prstGeom prst="roundRect">
+            <a:avLst/>
+          </a:prstGeom>
+          <a:solidFill>
+            <a:srgbClr val="FFFFFF"/>
+          </a:solidFill>
+          <a:ln w="20320">
+            <a:solidFill>
+              <a:srgbClr val="2E7D6B"/>
+            </a:solidFill>
+          </a:ln>
+          <a:effectLst/>
+        </p:spPr>
+        <p:style>
+          <a:lnRef idx="1">
+            <a:schemeClr val="accent1"/>
+          </a:lnRef>
+          <a:fillRef idx="3">
+            <a:schemeClr val="accent1"/>
+          </a:fillRef>
+          <a:effectRef idx="2">
+            <a:schemeClr val="accent1"/>
+          </a:effectRef>
+          <a:fontRef idx="minor">
+            <a:schemeClr val="lt1"/>
+          </a:fontRef>
+        </p:style>
+        <p:txBody>
+          <a:bodyPr rtlCol="0" anchor="ctr"/>
+          <a:lstStyle/>
+          <a:p>
+            <a:pPr algn="ctr"/>
+          </a:p>
+        </p:txBody>
+      </p:sp>
+      <p:sp>
+        <p:nvSpPr>
+          <p:cNvPr id="12" name="Oval 11"/>
+          <p:cNvSpPr/>
+          <p:nvPr/>
+        </p:nvSpPr>
+        <p:spPr>
+          <a:xfrm>
+            <a:off x="4582058" y="2377440"/>
+            <a:ext cx="502920" cy="502920"/>
+          </a:xfrm>
+          <a:prstGeom prst="ellipse">
+            <a:avLst/>
+          </a:prstGeom>
+          <a:solidFill>
+            <a:srgbClr val="2E7D6B"/>
+          </a:solidFill>
+          <a:ln>
+            <a:noFill/>
+          </a:ln>
+          <a:effectLst/>
+        </p:spPr>
+        <p:style>
+          <a:lnRef idx="1">
+            <a:schemeClr val="accent1"/>
+          </a:lnRef>
+          <a:fillRef idx="3">
+            <a:schemeClr val="accent1"/>
+          </a:fillRef>
+          <a:effectRef idx="2">
+            <a:schemeClr val="accent1"/>
+          </a:effectRef>
+          <a:fontRef idx="minor">
+            <a:schemeClr val="lt1"/>
+          </a:fontRef>
+        </p:style>
+        <p:txBody>
+          <a:bodyPr rtlCol="0" anchor="ctr"/>
+          <a:lstStyle/>
+          <a:p>
+            <a:pPr algn="ctr"/>
+          </a:p>
+        </p:txBody>
+      </p:sp>
+      <p:sp>
+        <p:nvSpPr>
+          <p:cNvPr id="13" name="TextBox 12"/>
+          <p:cNvSpPr txBox="1"/>
+          <p:nvPr/>
+        </p:nvSpPr>
+        <p:spPr>
+          <a:xfrm>
+            <a:off x="4582058" y="2450592"/>
+            <a:ext cx="502920" cy="384048"/>
+          </a:xfrm>
+          <a:prstGeom prst="rect">
+            <a:avLst/>
+          </a:prstGeom>
+          <a:noFill/>
+        </p:spPr>
+        <p:txBody>
+          <a:bodyPr wrap="square" anchor="t" lIns="0" rIns="0" tIns="0" bIns="0">
+            <a:spAutoFit/>
+          </a:bodyPr>
+          <a:lstStyle/>
+          <a:p>
+            <a:pPr algn="ctr">
+              <a:lnSpc>
+                <a:spcPct val="145000"/>
+              </a:lnSpc>
+              <a:spcAft>
+                <a:spcPts val="400"/>
+              </a:spcAft>
+            </a:pPr>
+            <a:r>
+              <a:rPr sz="1800" b="1">
+                <a:solidFill>
+                  <a:srgbClr val="FFFFFF"/>
+                </a:solidFill>
+                <a:latin typeface="微软雅黑"/>
+                <a:ea typeface="微软雅黑"/>
+                <a:cs typeface="微软雅黑"/>
+              </a:rPr>
+              <a:t>②</a:t>
+            </a:r>
+          </a:p>
+        </p:txBody>
+      </p:sp>
+      <p:sp>
+        <p:nvSpPr>
+          <p:cNvPr id="14" name="TextBox 13"/>
+          <p:cNvSpPr txBox="1"/>
+          <p:nvPr/>
+        </p:nvSpPr>
+        <p:spPr>
+          <a:xfrm>
+            <a:off x="5267858" y="2395728"/>
+            <a:ext cx="2296058" cy="822960"/>
+          </a:xfrm>
+          <a:prstGeom prst="rect">
+            <a:avLst/>
+          </a:prstGeom>
+          <a:noFill/>
+        </p:spPr>
+        <p:txBody>
+          <a:bodyPr wrap="square" anchor="t" lIns="0" rIns="0" tIns="0" bIns="0">
+            <a:spAutoFit/>
+          </a:bodyPr>
+          <a:lstStyle/>
+          <a:p>
+            <a:pPr algn="l">
+              <a:lnSpc>
+                <a:spcPct val="130000"/>
+              </a:lnSpc>
+              <a:spcAft>
+                <a:spcPts val="400"/>
+              </a:spcAft>
+            </a:pPr>
+            <a:r>
+              <a:rPr sz="1600" b="1">
+                <a:solidFill>
+                  <a:srgbClr val="2E7D6B"/>
+                </a:solidFill>
+                <a:latin typeface="微软雅黑"/>
+                <a:ea typeface="微软雅黑"/>
+                <a:cs typeface="微软雅黑"/>
+              </a:rPr>
+              <a:t>青春意象展</a:t>
+            </a:r>
+          </a:p>
+        </p:txBody>
+      </p:sp>
+      <p:sp>
+        <p:nvSpPr>
+          <p:cNvPr id="15" name="TextBox 14"/>
+          <p:cNvSpPr txBox="1"/>
+          <p:nvPr/>
+        </p:nvSpPr>
+        <p:spPr>
+          <a:xfrm>
+            <a:off x="4627778" y="3154680"/>
+            <a:ext cx="2936138" cy="2788920"/>
+          </a:xfrm>
+          <a:prstGeom prst="rect">
+            <a:avLst/>
+          </a:prstGeom>
+          <a:noFill/>
+        </p:spPr>
+        <p:txBody>
+          <a:bodyPr wrap="square" anchor="t" lIns="0" rIns="0" tIns="0" bIns="0">
+            <a:spAutoFit/>
+          </a:bodyPr>
+          <a:lstStyle/>
+          <a:p>
+            <a:pPr algn="l">
+              <a:lnSpc>
+                <a:spcPct val="145000"/>
+              </a:lnSpc>
+              <a:spcAft>
+                <a:spcPts val="400"/>
+              </a:spcAft>
+            </a:pPr>
+            <a:r>
+              <a:rPr sz="1350" b="0">
+                <a:solidFill>
+                  <a:srgbClr val="1C2A33"/>
+                </a:solidFill>
+                <a:latin typeface="楷体"/>
+                <a:ea typeface="楷体"/>
+                <a:cs typeface="楷体"/>
+              </a:rPr>
+              <a:t>每人用「一个意象+一句话」概括单元学习感悟。</a:t>
+            </a:r>
+          </a:p>
+        </p:txBody>
+      </p:sp>
+      <p:sp>
+        <p:nvSpPr>
+          <p:cNvPr id="16" name="Rounded Rectangle 15"/>
+          <p:cNvSpPr/>
+          <p:nvPr/>
+        </p:nvSpPr>
+        <p:spPr>
+          <a:xfrm>
+            <a:off x="8158276" y="2194560"/>
+            <a:ext cx="3393338" cy="3931920"/>
+          </a:xfrm>
+          <a:prstGeom prst="roundRect">
+            <a:avLst/>
+          </a:prstGeom>
+          <a:solidFill>
+            <a:srgbClr val="FFFFFF"/>
+          </a:solidFill>
+          <a:ln w="20320">
             <a:solidFill>
               <a:srgbClr val="C8A86B"/>
             </a:solidFill>
@@ -4926,107 +5572,23 @@
       </p:sp>
       <p:sp>
         <p:nvSpPr>
-          <p:cNvPr id="6" name="TextBox 5"/>
-          <p:cNvSpPr txBox="1"/>
-          <p:nvPr/>
-        </p:nvSpPr>
-        <p:spPr>
-          <a:xfrm>
-            <a:off x="1371600" y="1481328"/>
-            <a:ext cx="9997135" cy="457200"/>
-          </a:xfrm>
-          <a:prstGeom prst="rect">
-            <a:avLst/>
-          </a:prstGeom>
-          <a:noFill/>
-        </p:spPr>
-        <p:txBody>
-          <a:bodyPr wrap="square" anchor="t" lIns="0" rIns="0" tIns="0" bIns="0">
-            <a:spAutoFit/>
-          </a:bodyPr>
-          <a:lstStyle/>
-          <a:p>
-            <a:pPr algn="l">
-              <a:lnSpc>
-                <a:spcPct val="110000"/>
-              </a:lnSpc>
-            </a:pPr>
-            <a:r>
-              <a:rPr sz="1600" b="1">
-                <a:solidFill>
-                  <a:srgbClr val="1C2A33"/>
-                </a:solidFill>
-                <a:latin typeface="微软雅黑"/>
-                <a:ea typeface="微软雅黑"/>
-                <a:cs typeface="微软雅黑"/>
-              </a:rPr>
-              <a:t/>
-            </a:r>
-          </a:p>
-        </p:txBody>
-      </p:sp>
-      <p:sp>
-        <p:nvSpPr>
-          <p:cNvPr id="7" name="TextBox 6"/>
-          <p:cNvSpPr txBox="1"/>
-          <p:nvPr/>
-        </p:nvSpPr>
-        <p:spPr>
-          <a:xfrm>
-            <a:off x="1371600" y="1920240"/>
-            <a:ext cx="9997135" cy="957072"/>
-          </a:xfrm>
-          <a:prstGeom prst="rect">
-            <a:avLst/>
-          </a:prstGeom>
-          <a:noFill/>
-        </p:spPr>
-        <p:txBody>
-          <a:bodyPr wrap="square" anchor="t" lIns="0" rIns="0" tIns="0" bIns="0">
-            <a:spAutoFit/>
-          </a:bodyPr>
-          <a:lstStyle/>
-          <a:p>
-            <a:pPr algn="l">
-              <a:lnSpc>
-                <a:spcPct val="128000"/>
-              </a:lnSpc>
-            </a:pPr>
-            <a:r>
-              <a:rPr sz="1300" b="0">
-                <a:solidFill>
-                  <a:srgbClr val="1C2A33"/>
-                </a:solidFill>
-                <a:latin typeface="楷体"/>
-                <a:ea typeface="楷体"/>
-                <a:cs typeface="楷体"/>
-              </a:rPr>
-              <a:t>① 青春诗朗诵会：每人/小组朗诵一首诗（自创或课文），限时2分钟。</a:t>
-            </a:r>
-          </a:p>
-        </p:txBody>
-      </p:sp>
-      <p:sp>
-        <p:nvSpPr>
-          <p:cNvPr id="8" name="Rounded Rectangle 7"/>
+          <p:cNvPr id="17" name="Oval 16"/>
           <p:cNvSpPr/>
           <p:nvPr/>
         </p:nvSpPr>
         <p:spPr>
           <a:xfrm>
-            <a:off x="640080" y="3078480"/>
-            <a:ext cx="10911535" cy="1597152"/>
-          </a:xfrm>
-          <a:prstGeom prst="roundRect">
+            <a:off x="8341156" y="2377440"/>
+            <a:ext cx="502920" cy="502920"/>
+          </a:xfrm>
+          <a:prstGeom prst="ellipse">
             <a:avLst/>
           </a:prstGeom>
           <a:solidFill>
-            <a:srgbClr val="FFFFFF"/>
+            <a:srgbClr val="C8A86B"/>
           </a:solidFill>
-          <a:ln w="22860">
-            <a:solidFill>
-              <a:srgbClr val="C8A86B"/>
-            </a:solidFill>
+          <a:ln>
+            <a:noFill/>
           </a:ln>
           <a:effectLst/>
         </p:spPr>
@@ -5054,14 +5616,14 @@
       </p:sp>
       <p:sp>
         <p:nvSpPr>
-          <p:cNvPr id="9" name="TextBox 8"/>
+          <p:cNvPr id="18" name="TextBox 17"/>
           <p:cNvSpPr txBox="1"/>
           <p:nvPr/>
         </p:nvSpPr>
         <p:spPr>
           <a:xfrm>
-            <a:off x="1371600" y="3188208"/>
-            <a:ext cx="9997135" cy="457200"/>
+            <a:off x="8341156" y="2450592"/>
+            <a:ext cx="502920" cy="384048"/>
           </a:xfrm>
           <a:prstGeom prst="rect">
             <a:avLst/>
@@ -5074,35 +5636,38 @@
           </a:bodyPr>
           <a:lstStyle/>
           <a:p>
-            <a:pPr algn="l">
+            <a:pPr algn="ctr">
               <a:lnSpc>
-                <a:spcPct val="110000"/>
+                <a:spcPct val="145000"/>
               </a:lnSpc>
+              <a:spcAft>
+                <a:spcPts val="400"/>
+              </a:spcAft>
             </a:pPr>
             <a:r>
-              <a:rPr sz="1600" b="1">
-                <a:solidFill>
-                  <a:srgbClr val="1C2A33"/>
+              <a:rPr sz="1800" b="1">
+                <a:solidFill>
+                  <a:srgbClr val="FFFFFF"/>
                 </a:solidFill>
                 <a:latin typeface="微软雅黑"/>
                 <a:ea typeface="微软雅黑"/>
                 <a:cs typeface="微软雅黑"/>
               </a:rPr>
-              <a:t/>
-            </a:r>
-          </a:p>
-        </p:txBody>
-      </p:sp>
-      <p:sp>
-        <p:nvSpPr>
-          <p:cNvPr id="10" name="TextBox 9"/>
+              <a:t>③</a:t>
+            </a:r>
+          </a:p>
+        </p:txBody>
+      </p:sp>
+      <p:sp>
+        <p:nvSpPr>
+          <p:cNvPr id="19" name="TextBox 18"/>
           <p:cNvSpPr txBox="1"/>
           <p:nvPr/>
         </p:nvSpPr>
         <p:spPr>
           <a:xfrm>
-            <a:off x="1371600" y="3627120"/>
-            <a:ext cx="9997135" cy="957072"/>
+            <a:off x="9026956" y="2395728"/>
+            <a:ext cx="2296058" cy="822960"/>
           </a:xfrm>
           <a:prstGeom prst="rect">
             <a:avLst/>
@@ -5117,11 +5682,58 @@
           <a:p>
             <a:pPr algn="l">
               <a:lnSpc>
-                <a:spcPct val="128000"/>
+                <a:spcPct val="130000"/>
               </a:lnSpc>
+              <a:spcAft>
+                <a:spcPts val="400"/>
+              </a:spcAft>
             </a:pPr>
             <a:r>
-              <a:rPr sz="1300" b="0">
+              <a:rPr sz="1600" b="1">
+                <a:solidFill>
+                  <a:srgbClr val="C8A86B"/>
+                </a:solidFill>
+                <a:latin typeface="微软雅黑"/>
+                <a:ea typeface="微软雅黑"/>
+                <a:cs typeface="微软雅黑"/>
+              </a:rPr>
+              <a:t>单元学习反思单</a:t>
+            </a:r>
+          </a:p>
+        </p:txBody>
+      </p:sp>
+      <p:sp>
+        <p:nvSpPr>
+          <p:cNvPr id="20" name="TextBox 19"/>
+          <p:cNvSpPr txBox="1"/>
+          <p:nvPr/>
+        </p:nvSpPr>
+        <p:spPr>
+          <a:xfrm>
+            <a:off x="8386876" y="3154680"/>
+            <a:ext cx="2936138" cy="2788920"/>
+          </a:xfrm>
+          <a:prstGeom prst="rect">
+            <a:avLst/>
+          </a:prstGeom>
+          <a:noFill/>
+        </p:spPr>
+        <p:txBody>
+          <a:bodyPr wrap="square" anchor="t" lIns="0" rIns="0" tIns="0" bIns="0">
+            <a:spAutoFit/>
+          </a:bodyPr>
+          <a:lstStyle/>
+          <a:p>
+            <a:pPr algn="l">
+              <a:lnSpc>
+                <a:spcPct val="145000"/>
+              </a:lnSpc>
+              <a:spcAft>
+                <a:spcPts val="400"/>
+              </a:spcAft>
+            </a:pPr>
+            <a:r>
+              <a:rPr sz="1350" b="0">
                 <a:solidFill>
                   <a:srgbClr val="1C2A33"/>
                 </a:solidFill>
@@ -5129,142 +5741,14 @@
                 <a:ea typeface="楷体"/>
                 <a:cs typeface="楷体"/>
               </a:rPr>
-              <a:t>② 青春意象展：每人用「一个意象+一句话」概括单元学习感悟。</a:t>
-            </a:r>
-          </a:p>
-        </p:txBody>
-      </p:sp>
-      <p:sp>
-        <p:nvSpPr>
-          <p:cNvPr id="11" name="Rounded Rectangle 10"/>
-          <p:cNvSpPr/>
-          <p:nvPr/>
-        </p:nvSpPr>
-        <p:spPr>
-          <a:xfrm>
-            <a:off x="640080" y="4785360"/>
-            <a:ext cx="10911535" cy="1597152"/>
-          </a:xfrm>
-          <a:prstGeom prst="roundRect">
-            <a:avLst/>
-          </a:prstGeom>
-          <a:solidFill>
-            <a:srgbClr val="FFFFFF"/>
-          </a:solidFill>
-          <a:ln w="22860">
-            <a:solidFill>
-              <a:srgbClr val="C8A86B"/>
-            </a:solidFill>
-          </a:ln>
-          <a:effectLst/>
-        </p:spPr>
-        <p:style>
-          <a:lnRef idx="1">
-            <a:schemeClr val="accent1"/>
-          </a:lnRef>
-          <a:fillRef idx="3">
-            <a:schemeClr val="accent1"/>
-          </a:fillRef>
-          <a:effectRef idx="2">
-            <a:schemeClr val="accent1"/>
-          </a:effectRef>
-          <a:fontRef idx="minor">
-            <a:schemeClr val="lt1"/>
-          </a:fontRef>
-        </p:style>
-        <p:txBody>
-          <a:bodyPr rtlCol="0" anchor="ctr"/>
-          <a:lstStyle/>
-          <a:p>
-            <a:pPr algn="ctr"/>
-          </a:p>
-        </p:txBody>
-      </p:sp>
-      <p:sp>
-        <p:nvSpPr>
-          <p:cNvPr id="12" name="TextBox 11"/>
-          <p:cNvSpPr txBox="1"/>
-          <p:nvPr/>
-        </p:nvSpPr>
-        <p:spPr>
-          <a:xfrm>
-            <a:off x="1371600" y="4895088"/>
-            <a:ext cx="9997135" cy="457200"/>
-          </a:xfrm>
-          <a:prstGeom prst="rect">
-            <a:avLst/>
-          </a:prstGeom>
-          <a:noFill/>
-        </p:spPr>
-        <p:txBody>
-          <a:bodyPr wrap="square" anchor="t" lIns="0" rIns="0" tIns="0" bIns="0">
-            <a:spAutoFit/>
-          </a:bodyPr>
-          <a:lstStyle/>
-          <a:p>
-            <a:pPr algn="l">
-              <a:lnSpc>
-                <a:spcPct val="110000"/>
-              </a:lnSpc>
-            </a:pPr>
-            <a:r>
-              <a:rPr sz="1600" b="1">
-                <a:solidFill>
-                  <a:srgbClr val="1C2A33"/>
-                </a:solidFill>
-                <a:latin typeface="微软雅黑"/>
-                <a:ea typeface="微软雅黑"/>
-                <a:cs typeface="微软雅黑"/>
-              </a:rPr>
-              <a:t/>
-            </a:r>
-          </a:p>
-        </p:txBody>
-      </p:sp>
-      <p:sp>
-        <p:nvSpPr>
-          <p:cNvPr id="13" name="TextBox 12"/>
-          <p:cNvSpPr txBox="1"/>
-          <p:nvPr/>
-        </p:nvSpPr>
-        <p:spPr>
-          <a:xfrm>
-            <a:off x="1371600" y="5334000"/>
-            <a:ext cx="9997135" cy="957072"/>
-          </a:xfrm>
-          <a:prstGeom prst="rect">
-            <a:avLst/>
-          </a:prstGeom>
-          <a:noFill/>
-        </p:spPr>
-        <p:txBody>
-          <a:bodyPr wrap="square" anchor="t" lIns="0" rIns="0" tIns="0" bIns="0">
-            <a:spAutoFit/>
-          </a:bodyPr>
-          <a:lstStyle/>
-          <a:p>
-            <a:pPr algn="l">
-              <a:lnSpc>
-                <a:spcPct val="128000"/>
-              </a:lnSpc>
-            </a:pPr>
-            <a:r>
-              <a:rPr sz="1200" b="0">
-                <a:solidFill>
-                  <a:srgbClr val="1C2A33"/>
-                </a:solidFill>
-                <a:latin typeface="楷体"/>
-                <a:ea typeface="楷体"/>
-                <a:cs typeface="楷体"/>
-              </a:rPr>
-              <a:t>③ 单元学习反思单：回顾8课时学习路径，填写「我学会了/我还需要提升/我的疑问」。</a:t>
-            </a:r>
-          </a:p>
-        </p:txBody>
-      </p:sp>
-      <p:sp>
-        <p:nvSpPr>
-          <p:cNvPr id="14" name="TextBox 13"/>
+              <a:t>回顾8课时学习路径，填写「我学会了/我还需要提升/我的疑问」。</a:t>
+            </a:r>
+          </a:p>
+        </p:txBody>
+      </p:sp>
+      <p:sp>
+        <p:nvSpPr>
+          <p:cNvPr id="21" name="TextBox 20"/>
           <p:cNvSpPr txBox="1"/>
           <p:nvPr/>
         </p:nvSpPr>
@@ -5391,13 +5875,13 @@
             <a:r>
               <a:rPr sz="1300" b="1">
                 <a:solidFill>
-                  <a:srgbClr val="2E7D6B"/>
+                  <a:srgbClr val="B23A2A"/>
                 </a:solidFill>
                 <a:latin typeface="微软雅黑"/>
                 <a:ea typeface="微软雅黑"/>
                 <a:cs typeface="微软雅黑"/>
               </a:rPr>
-              <a:t>学习路径</a:t>
+              <a:t>方法</a:t>
             </a:r>
           </a:p>
         </p:txBody>
@@ -5414,6 +5898,362 @@
             <a:ext cx="822960" cy="30480"/>
           </a:xfrm>
           <a:prstGeom prst="rect">
+            <a:avLst/>
+          </a:prstGeom>
+          <a:solidFill>
+            <a:srgbClr val="B23A2A"/>
+          </a:solidFill>
+          <a:ln>
+            <a:noFill/>
+          </a:ln>
+          <a:effectLst/>
+        </p:spPr>
+        <p:style>
+          <a:lnRef idx="1">
+            <a:schemeClr val="accent1"/>
+          </a:lnRef>
+          <a:fillRef idx="3">
+            <a:schemeClr val="accent1"/>
+          </a:fillRef>
+          <a:effectRef idx="2">
+            <a:schemeClr val="accent1"/>
+          </a:effectRef>
+          <a:fontRef idx="minor">
+            <a:schemeClr val="lt1"/>
+          </a:fontRef>
+        </p:style>
+        <p:txBody>
+          <a:bodyPr rtlCol="0" anchor="ctr"/>
+          <a:lstStyle/>
+          <a:p>
+            <a:pPr algn="ctr"/>
+          </a:p>
+        </p:txBody>
+      </p:sp>
+      <p:sp>
+        <p:nvSpPr>
+          <p:cNvPr id="5" name="TextBox 4"/>
+          <p:cNvSpPr txBox="1"/>
+          <p:nvPr/>
+        </p:nvSpPr>
+        <p:spPr>
+          <a:xfrm>
+            <a:off x="640080" y="1325880"/>
+            <a:ext cx="10911535" cy="548640"/>
+          </a:xfrm>
+          <a:prstGeom prst="rect">
+            <a:avLst/>
+          </a:prstGeom>
+          <a:noFill/>
+        </p:spPr>
+        <p:txBody>
+          <a:bodyPr wrap="square" anchor="t" lIns="0" rIns="0" tIns="0" bIns="0">
+            <a:spAutoFit/>
+          </a:bodyPr>
+          <a:lstStyle/>
+          <a:p>
+            <a:pPr algn="l">
+              <a:lnSpc>
+                <a:spcPct val="145000"/>
+              </a:lnSpc>
+              <a:spcAft>
+                <a:spcPts val="400"/>
+              </a:spcAft>
+            </a:pPr>
+            <a:r>
+              <a:rPr sz="2600" b="1">
+                <a:solidFill>
+                  <a:srgbClr val="1C2A33"/>
+                </a:solidFill>
+                <a:latin typeface="楷体"/>
+                <a:ea typeface="楷体"/>
+                <a:cs typeface="楷体"/>
+              </a:rPr>
+              <a:t>学习路径 · 方法</a:t>
+            </a:r>
+          </a:p>
+        </p:txBody>
+      </p:sp>
+      <p:sp>
+        <p:nvSpPr>
+          <p:cNvPr id="6" name="Rounded Rectangle 5"/>
+          <p:cNvSpPr/>
+          <p:nvPr/>
+        </p:nvSpPr>
+        <p:spPr>
+          <a:xfrm>
+            <a:off x="640080" y="2194560"/>
+            <a:ext cx="2453563" cy="3931920"/>
+          </a:xfrm>
+          <a:prstGeom prst="roundRect">
+            <a:avLst/>
+          </a:prstGeom>
+          <a:solidFill>
+            <a:srgbClr val="FFFFFF"/>
+          </a:solidFill>
+          <a:ln w="20320">
+            <a:solidFill>
+              <a:srgbClr val="B23A2A"/>
+            </a:solidFill>
+          </a:ln>
+          <a:effectLst/>
+        </p:spPr>
+        <p:style>
+          <a:lnRef idx="1">
+            <a:schemeClr val="accent1"/>
+          </a:lnRef>
+          <a:fillRef idx="3">
+            <a:schemeClr val="accent1"/>
+          </a:fillRef>
+          <a:effectRef idx="2">
+            <a:schemeClr val="accent1"/>
+          </a:effectRef>
+          <a:fontRef idx="minor">
+            <a:schemeClr val="lt1"/>
+          </a:fontRef>
+        </p:style>
+        <p:txBody>
+          <a:bodyPr rtlCol="0" anchor="ctr"/>
+          <a:lstStyle/>
+          <a:p>
+            <a:pPr algn="ctr"/>
+          </a:p>
+        </p:txBody>
+      </p:sp>
+      <p:sp>
+        <p:nvSpPr>
+          <p:cNvPr id="7" name="Oval 6"/>
+          <p:cNvSpPr/>
+          <p:nvPr/>
+        </p:nvSpPr>
+        <p:spPr>
+          <a:xfrm>
+            <a:off x="822960" y="2377440"/>
+            <a:ext cx="502920" cy="502920"/>
+          </a:xfrm>
+          <a:prstGeom prst="ellipse">
+            <a:avLst/>
+          </a:prstGeom>
+          <a:solidFill>
+            <a:srgbClr val="B23A2A"/>
+          </a:solidFill>
+          <a:ln>
+            <a:noFill/>
+          </a:ln>
+          <a:effectLst/>
+        </p:spPr>
+        <p:style>
+          <a:lnRef idx="1">
+            <a:schemeClr val="accent1"/>
+          </a:lnRef>
+          <a:fillRef idx="3">
+            <a:schemeClr val="accent1"/>
+          </a:fillRef>
+          <a:effectRef idx="2">
+            <a:schemeClr val="accent1"/>
+          </a:effectRef>
+          <a:fontRef idx="minor">
+            <a:schemeClr val="lt1"/>
+          </a:fontRef>
+        </p:style>
+        <p:txBody>
+          <a:bodyPr rtlCol="0" anchor="ctr"/>
+          <a:lstStyle/>
+          <a:p>
+            <a:pPr algn="ctr"/>
+          </a:p>
+        </p:txBody>
+      </p:sp>
+      <p:sp>
+        <p:nvSpPr>
+          <p:cNvPr id="8" name="TextBox 7"/>
+          <p:cNvSpPr txBox="1"/>
+          <p:nvPr/>
+        </p:nvSpPr>
+        <p:spPr>
+          <a:xfrm>
+            <a:off x="822960" y="2450592"/>
+            <a:ext cx="502920" cy="384048"/>
+          </a:xfrm>
+          <a:prstGeom prst="rect">
+            <a:avLst/>
+          </a:prstGeom>
+          <a:noFill/>
+        </p:spPr>
+        <p:txBody>
+          <a:bodyPr wrap="square" anchor="t" lIns="0" rIns="0" tIns="0" bIns="0">
+            <a:spAutoFit/>
+          </a:bodyPr>
+          <a:lstStyle/>
+          <a:p>
+            <a:pPr algn="ctr">
+              <a:lnSpc>
+                <a:spcPct val="145000"/>
+              </a:lnSpc>
+              <a:spcAft>
+                <a:spcPts val="400"/>
+              </a:spcAft>
+            </a:pPr>
+            <a:r>
+              <a:rPr sz="1800" b="1">
+                <a:solidFill>
+                  <a:srgbClr val="FFFFFF"/>
+                </a:solidFill>
+                <a:latin typeface="微软雅黑"/>
+                <a:ea typeface="微软雅黑"/>
+                <a:cs typeface="微软雅黑"/>
+              </a:rPr>
+              <a:t>①</a:t>
+            </a:r>
+          </a:p>
+        </p:txBody>
+      </p:sp>
+      <p:sp>
+        <p:nvSpPr>
+          <p:cNvPr id="9" name="TextBox 8"/>
+          <p:cNvSpPr txBox="1"/>
+          <p:nvPr/>
+        </p:nvSpPr>
+        <p:spPr>
+          <a:xfrm>
+            <a:off x="1508760" y="2395728"/>
+            <a:ext cx="1356283" cy="822960"/>
+          </a:xfrm>
+          <a:prstGeom prst="rect">
+            <a:avLst/>
+          </a:prstGeom>
+          <a:noFill/>
+        </p:spPr>
+        <p:txBody>
+          <a:bodyPr wrap="square" anchor="t" lIns="0" rIns="0" tIns="0" bIns="0">
+            <a:spAutoFit/>
+          </a:bodyPr>
+          <a:lstStyle/>
+          <a:p>
+            <a:pPr algn="l">
+              <a:lnSpc>
+                <a:spcPct val="130000"/>
+              </a:lnSpc>
+              <a:spcAft>
+                <a:spcPts val="400"/>
+              </a:spcAft>
+            </a:pPr>
+            <a:r>
+              <a:rPr sz="1500" b="1">
+                <a:solidFill>
+                  <a:srgbClr val="B23A2A"/>
+                </a:solidFill>
+                <a:latin typeface="微软雅黑"/>
+                <a:ea typeface="微软雅黑"/>
+                <a:cs typeface="微软雅黑"/>
+              </a:rPr>
+              <a:t>诗会式展示法</a:t>
+            </a:r>
+          </a:p>
+        </p:txBody>
+      </p:sp>
+      <p:sp>
+        <p:nvSpPr>
+          <p:cNvPr id="10" name="TextBox 9"/>
+          <p:cNvSpPr txBox="1"/>
+          <p:nvPr/>
+        </p:nvSpPr>
+        <p:spPr>
+          <a:xfrm>
+            <a:off x="868680" y="3154680"/>
+            <a:ext cx="1996363" cy="2788920"/>
+          </a:xfrm>
+          <a:prstGeom prst="rect">
+            <a:avLst/>
+          </a:prstGeom>
+          <a:noFill/>
+        </p:spPr>
+        <p:txBody>
+          <a:bodyPr wrap="square" anchor="t" lIns="0" rIns="0" tIns="0" bIns="0">
+            <a:spAutoFit/>
+          </a:bodyPr>
+          <a:lstStyle/>
+          <a:p>
+            <a:pPr algn="l">
+              <a:lnSpc>
+                <a:spcPct val="145000"/>
+              </a:lnSpc>
+              <a:spcAft>
+                <a:spcPts val="400"/>
+              </a:spcAft>
+            </a:pPr>
+            <a:r>
+              <a:rPr sz="1300" b="0">
+                <a:solidFill>
+                  <a:srgbClr val="1C2A33"/>
+                </a:solidFill>
+                <a:latin typeface="楷体"/>
+                <a:ea typeface="楷体"/>
+                <a:cs typeface="楷体"/>
+              </a:rPr>
+              <a:t>营造「青春诗会」氛围，学生轮流上台朗诵。</a:t>
+            </a:r>
+          </a:p>
+        </p:txBody>
+      </p:sp>
+      <p:sp>
+        <p:nvSpPr>
+          <p:cNvPr id="11" name="Rounded Rectangle 10"/>
+          <p:cNvSpPr/>
+          <p:nvPr/>
+        </p:nvSpPr>
+        <p:spPr>
+          <a:xfrm>
+            <a:off x="3459403" y="2194560"/>
+            <a:ext cx="2453563" cy="3931920"/>
+          </a:xfrm>
+          <a:prstGeom prst="roundRect">
+            <a:avLst/>
+          </a:prstGeom>
+          <a:solidFill>
+            <a:srgbClr val="FFFFFF"/>
+          </a:solidFill>
+          <a:ln w="20320">
+            <a:solidFill>
+              <a:srgbClr val="2E7D6B"/>
+            </a:solidFill>
+          </a:ln>
+          <a:effectLst/>
+        </p:spPr>
+        <p:style>
+          <a:lnRef idx="1">
+            <a:schemeClr val="accent1"/>
+          </a:lnRef>
+          <a:fillRef idx="3">
+            <a:schemeClr val="accent1"/>
+          </a:fillRef>
+          <a:effectRef idx="2">
+            <a:schemeClr val="accent1"/>
+          </a:effectRef>
+          <a:fontRef idx="minor">
+            <a:schemeClr val="lt1"/>
+          </a:fontRef>
+        </p:style>
+        <p:txBody>
+          <a:bodyPr rtlCol="0" anchor="ctr"/>
+          <a:lstStyle/>
+          <a:p>
+            <a:pPr algn="ctr"/>
+          </a:p>
+        </p:txBody>
+      </p:sp>
+      <p:sp>
+        <p:nvSpPr>
+          <p:cNvPr id="12" name="Oval 11"/>
+          <p:cNvSpPr/>
+          <p:nvPr/>
+        </p:nvSpPr>
+        <p:spPr>
+          <a:xfrm>
+            <a:off x="3642283" y="2377440"/>
+            <a:ext cx="502920" cy="502920"/>
+          </a:xfrm>
+          <a:prstGeom prst="ellipse">
             <a:avLst/>
           </a:prstGeom>
           <a:solidFill>
@@ -5448,14 +6288,146 @@
       </p:sp>
       <p:sp>
         <p:nvSpPr>
-          <p:cNvPr id="5" name="Rounded Rectangle 4"/>
+          <p:cNvPr id="13" name="TextBox 12"/>
+          <p:cNvSpPr txBox="1"/>
+          <p:nvPr/>
+        </p:nvSpPr>
+        <p:spPr>
+          <a:xfrm>
+            <a:off x="3642283" y="2450592"/>
+            <a:ext cx="502920" cy="384048"/>
+          </a:xfrm>
+          <a:prstGeom prst="rect">
+            <a:avLst/>
+          </a:prstGeom>
+          <a:noFill/>
+        </p:spPr>
+        <p:txBody>
+          <a:bodyPr wrap="square" anchor="t" lIns="0" rIns="0" tIns="0" bIns="0">
+            <a:spAutoFit/>
+          </a:bodyPr>
+          <a:lstStyle/>
+          <a:p>
+            <a:pPr algn="ctr">
+              <a:lnSpc>
+                <a:spcPct val="145000"/>
+              </a:lnSpc>
+              <a:spcAft>
+                <a:spcPts val="400"/>
+              </a:spcAft>
+            </a:pPr>
+            <a:r>
+              <a:rPr sz="1800" b="1">
+                <a:solidFill>
+                  <a:srgbClr val="FFFFFF"/>
+                </a:solidFill>
+                <a:latin typeface="微软雅黑"/>
+                <a:ea typeface="微软雅黑"/>
+                <a:cs typeface="微软雅黑"/>
+              </a:rPr>
+              <a:t>②</a:t>
+            </a:r>
+          </a:p>
+        </p:txBody>
+      </p:sp>
+      <p:sp>
+        <p:nvSpPr>
+          <p:cNvPr id="14" name="TextBox 13"/>
+          <p:cNvSpPr txBox="1"/>
+          <p:nvPr/>
+        </p:nvSpPr>
+        <p:spPr>
+          <a:xfrm>
+            <a:off x="4328083" y="2395728"/>
+            <a:ext cx="1356283" cy="822960"/>
+          </a:xfrm>
+          <a:prstGeom prst="rect">
+            <a:avLst/>
+          </a:prstGeom>
+          <a:noFill/>
+        </p:spPr>
+        <p:txBody>
+          <a:bodyPr wrap="square" anchor="t" lIns="0" rIns="0" tIns="0" bIns="0">
+            <a:spAutoFit/>
+          </a:bodyPr>
+          <a:lstStyle/>
+          <a:p>
+            <a:pPr algn="l">
+              <a:lnSpc>
+                <a:spcPct val="130000"/>
+              </a:lnSpc>
+              <a:spcAft>
+                <a:spcPts val="400"/>
+              </a:spcAft>
+            </a:pPr>
+            <a:r>
+              <a:rPr sz="1500" b="1">
+                <a:solidFill>
+                  <a:srgbClr val="2E7D6B"/>
+                </a:solidFill>
+                <a:latin typeface="微软雅黑"/>
+                <a:ea typeface="微软雅黑"/>
+                <a:cs typeface="微软雅黑"/>
+              </a:rPr>
+              <a:t>意象展览法</a:t>
+            </a:r>
+          </a:p>
+        </p:txBody>
+      </p:sp>
+      <p:sp>
+        <p:nvSpPr>
+          <p:cNvPr id="15" name="TextBox 14"/>
+          <p:cNvSpPr txBox="1"/>
+          <p:nvPr/>
+        </p:nvSpPr>
+        <p:spPr>
+          <a:xfrm>
+            <a:off x="3688003" y="3154680"/>
+            <a:ext cx="1996363" cy="2788920"/>
+          </a:xfrm>
+          <a:prstGeom prst="rect">
+            <a:avLst/>
+          </a:prstGeom>
+          <a:noFill/>
+        </p:spPr>
+        <p:txBody>
+          <a:bodyPr wrap="square" anchor="t" lIns="0" rIns="0" tIns="0" bIns="0">
+            <a:spAutoFit/>
+          </a:bodyPr>
+          <a:lstStyle/>
+          <a:p>
+            <a:pPr algn="l">
+              <a:lnSpc>
+                <a:spcPct val="145000"/>
+              </a:lnSpc>
+              <a:spcAft>
+                <a:spcPts val="400"/>
+              </a:spcAft>
+            </a:pPr>
+            <a:r>
+              <a:rPr sz="1300" b="0">
+                <a:solidFill>
+                  <a:srgbClr val="1C2A33"/>
+                </a:solidFill>
+                <a:latin typeface="楷体"/>
+                <a:ea typeface="楷体"/>
+                <a:cs typeface="楷体"/>
+              </a:rPr>
+              <a:t>把每个人的「意象+感悟」写在便签纸上贴成「青春意象墙」。</a:t>
+            </a:r>
+          </a:p>
+        </p:txBody>
+      </p:sp>
+      <p:sp>
+        <p:nvSpPr>
+          <p:cNvPr id="16" name="Rounded Rectangle 15"/>
           <p:cNvSpPr/>
           <p:nvPr/>
         </p:nvSpPr>
         <p:spPr>
           <a:xfrm>
-            <a:off x="640080" y="1371600"/>
-            <a:ext cx="10911535" cy="685800"/>
+            <a:off x="6278727" y="2194560"/>
+            <a:ext cx="2453563" cy="3931920"/>
           </a:xfrm>
           <a:prstGeom prst="roundRect">
             <a:avLst/>
@@ -5463,9 +6435,9 @@
           <a:solidFill>
             <a:srgbClr val="FFFFFF"/>
           </a:solidFill>
-          <a:ln w="22860">
+          <a:ln w="20320">
             <a:solidFill>
-              <a:srgbClr val="2E7D6B"/>
+              <a:srgbClr val="C8A86B"/>
             </a:solidFill>
           </a:ln>
           <a:effectLst/>
@@ -5494,20 +6466,20 @@
       </p:sp>
       <p:sp>
         <p:nvSpPr>
-          <p:cNvPr id="6" name="Oval 5"/>
+          <p:cNvPr id="17" name="Oval 16"/>
           <p:cNvSpPr/>
           <p:nvPr/>
         </p:nvSpPr>
         <p:spPr>
           <a:xfrm>
-            <a:off x="804672" y="1536192"/>
-            <a:ext cx="457200" cy="457200"/>
+            <a:off x="6461607" y="2377440"/>
+            <a:ext cx="502920" cy="502920"/>
           </a:xfrm>
           <a:prstGeom prst="ellipse">
             <a:avLst/>
           </a:prstGeom>
           <a:solidFill>
-            <a:srgbClr val="2E7D6B"/>
+            <a:srgbClr val="C8A86B"/>
           </a:solidFill>
           <a:ln>
             <a:noFill/>
@@ -5538,14 +6510,14 @@
       </p:sp>
       <p:sp>
         <p:nvSpPr>
-          <p:cNvPr id="7" name="TextBox 6"/>
+          <p:cNvPr id="18" name="TextBox 17"/>
           <p:cNvSpPr txBox="1"/>
           <p:nvPr/>
         </p:nvSpPr>
         <p:spPr>
           <a:xfrm>
-            <a:off x="804672" y="1591056"/>
-            <a:ext cx="457200" cy="384048"/>
+            <a:off x="6461607" y="2450592"/>
+            <a:ext cx="502920" cy="384048"/>
           </a:xfrm>
           <a:prstGeom prst="rect">
             <a:avLst/>
@@ -5558,9 +6530,16 @@
           </a:bodyPr>
           <a:lstStyle/>
           <a:p>
-            <a:pPr algn="ctr"/>
-            <a:r>
-              <a:rPr sz="1600" b="1">
+            <a:pPr algn="ctr">
+              <a:lnSpc>
+                <a:spcPct val="145000"/>
+              </a:lnSpc>
+              <a:spcAft>
+                <a:spcPts val="400"/>
+              </a:spcAft>
+            </a:pPr>
+            <a:r>
+              <a:rPr sz="1800" b="1">
                 <a:solidFill>
                   <a:srgbClr val="FFFFFF"/>
                 </a:solidFill>
@@ -5568,21 +6547,21 @@
                 <a:ea typeface="微软雅黑"/>
                 <a:cs typeface="微软雅黑"/>
               </a:rPr>
-              <a:t>1</a:t>
-            </a:r>
-          </a:p>
-        </p:txBody>
-      </p:sp>
-      <p:sp>
-        <p:nvSpPr>
-          <p:cNvPr id="8" name="TextBox 7"/>
+              <a:t>③</a:t>
+            </a:r>
+          </a:p>
+        </p:txBody>
+      </p:sp>
+      <p:sp>
+        <p:nvSpPr>
+          <p:cNvPr id="19" name="TextBox 18"/>
           <p:cNvSpPr txBox="1"/>
           <p:nvPr/>
         </p:nvSpPr>
         <p:spPr>
           <a:xfrm>
-            <a:off x="1371600" y="1481328"/>
-            <a:ext cx="9997135" cy="484632"/>
+            <a:off x="7147407" y="2395728"/>
+            <a:ext cx="1356283" cy="822960"/>
           </a:xfrm>
           <a:prstGeom prst="rect">
             <a:avLst/>
@@ -5597,33 +6576,80 @@
           <a:p>
             <a:pPr algn="l">
               <a:lnSpc>
-                <a:spcPct val="110000"/>
+                <a:spcPct val="130000"/>
               </a:lnSpc>
+              <a:spcAft>
+                <a:spcPts val="400"/>
+              </a:spcAft>
             </a:pPr>
             <a:r>
-              <a:rPr sz="1600" b="1">
-                <a:solidFill>
-                  <a:srgbClr val="1C2A33"/>
+              <a:rPr sz="1500" b="1">
+                <a:solidFill>
+                  <a:srgbClr val="C8A86B"/>
                 </a:solidFill>
                 <a:latin typeface="微软雅黑"/>
                 <a:ea typeface="微软雅黑"/>
                 <a:cs typeface="微软雅黑"/>
               </a:rPr>
-              <a:t>Step 1 单元回顾</a:t>
-            </a:r>
-          </a:p>
-        </p:txBody>
-      </p:sp>
-      <p:sp>
-        <p:nvSpPr>
-          <p:cNvPr id="9" name="Rounded Rectangle 8"/>
+              <a:t>反思单法</a:t>
+            </a:r>
+          </a:p>
+        </p:txBody>
+      </p:sp>
+      <p:sp>
+        <p:nvSpPr>
+          <p:cNvPr id="20" name="TextBox 19"/>
+          <p:cNvSpPr txBox="1"/>
+          <p:nvPr/>
+        </p:nvSpPr>
+        <p:spPr>
+          <a:xfrm>
+            <a:off x="6507327" y="3154680"/>
+            <a:ext cx="1996363" cy="2788920"/>
+          </a:xfrm>
+          <a:prstGeom prst="rect">
+            <a:avLst/>
+          </a:prstGeom>
+          <a:noFill/>
+        </p:spPr>
+        <p:txBody>
+          <a:bodyPr wrap="square" anchor="t" lIns="0" rIns="0" tIns="0" bIns="0">
+            <a:spAutoFit/>
+          </a:bodyPr>
+          <a:lstStyle/>
+          <a:p>
+            <a:pPr algn="l">
+              <a:lnSpc>
+                <a:spcPct val="145000"/>
+              </a:lnSpc>
+              <a:spcAft>
+                <a:spcPts val="400"/>
+              </a:spcAft>
+            </a:pPr>
+            <a:r>
+              <a:rPr sz="1300" b="0">
+                <a:solidFill>
+                  <a:srgbClr val="1C2A33"/>
+                </a:solidFill>
+                <a:latin typeface="楷体"/>
+                <a:ea typeface="楷体"/>
+                <a:cs typeface="楷体"/>
+              </a:rPr>
+              <a:t>结构化反思工具，引导元认知。</a:t>
+            </a:r>
+          </a:p>
+        </p:txBody>
+      </p:sp>
+      <p:sp>
+        <p:nvSpPr>
+          <p:cNvPr id="21" name="Rounded Rectangle 20"/>
           <p:cNvSpPr/>
           <p:nvPr/>
         </p:nvSpPr>
         <p:spPr>
           <a:xfrm>
-            <a:off x="640080" y="2194560"/>
-            <a:ext cx="10911535" cy="685800"/>
+            <a:off x="9098051" y="2194560"/>
+            <a:ext cx="2453563" cy="3931920"/>
           </a:xfrm>
           <a:prstGeom prst="roundRect">
             <a:avLst/>
@@ -5631,9 +6657,9 @@
           <a:solidFill>
             <a:srgbClr val="FFFFFF"/>
           </a:solidFill>
-          <a:ln w="22860">
+          <a:ln w="20320">
             <a:solidFill>
-              <a:srgbClr val="2E7D6B"/>
+              <a:srgbClr val="6B6258"/>
             </a:solidFill>
           </a:ln>
           <a:effectLst/>
@@ -5662,20 +6688,20 @@
       </p:sp>
       <p:sp>
         <p:nvSpPr>
-          <p:cNvPr id="10" name="Oval 9"/>
+          <p:cNvPr id="22" name="Oval 21"/>
           <p:cNvSpPr/>
           <p:nvPr/>
         </p:nvSpPr>
         <p:spPr>
           <a:xfrm>
-            <a:off x="804672" y="2359152"/>
-            <a:ext cx="457200" cy="457200"/>
+            <a:off x="9280931" y="2377440"/>
+            <a:ext cx="502920" cy="502920"/>
           </a:xfrm>
           <a:prstGeom prst="ellipse">
             <a:avLst/>
           </a:prstGeom>
           <a:solidFill>
-            <a:srgbClr val="2E7D6B"/>
+            <a:srgbClr val="6B6258"/>
           </a:solidFill>
           <a:ln>
             <a:noFill/>
@@ -5706,14 +6732,14 @@
       </p:sp>
       <p:sp>
         <p:nvSpPr>
-          <p:cNvPr id="11" name="TextBox 10"/>
+          <p:cNvPr id="23" name="TextBox 22"/>
           <p:cNvSpPr txBox="1"/>
           <p:nvPr/>
         </p:nvSpPr>
         <p:spPr>
           <a:xfrm>
-            <a:off x="804672" y="2414016"/>
-            <a:ext cx="457200" cy="384048"/>
+            <a:off x="9280931" y="2450592"/>
+            <a:ext cx="502920" cy="384048"/>
           </a:xfrm>
           <a:prstGeom prst="rect">
             <a:avLst/>
@@ -5726,9 +6752,16 @@
           </a:bodyPr>
           <a:lstStyle/>
           <a:p>
-            <a:pPr algn="ctr"/>
-            <a:r>
-              <a:rPr sz="1600" b="1">
+            <a:pPr algn="ctr">
+              <a:lnSpc>
+                <a:spcPct val="145000"/>
+              </a:lnSpc>
+              <a:spcAft>
+                <a:spcPts val="400"/>
+              </a:spcAft>
+            </a:pPr>
+            <a:r>
+              <a:rPr sz="1800" b="1">
                 <a:solidFill>
                   <a:srgbClr val="FFFFFF"/>
                 </a:solidFill>
@@ -5736,21 +6769,21 @@
                 <a:ea typeface="微软雅黑"/>
                 <a:cs typeface="微软雅黑"/>
               </a:rPr>
-              <a:t>2</a:t>
-            </a:r>
-          </a:p>
-        </p:txBody>
-      </p:sp>
-      <p:sp>
-        <p:nvSpPr>
-          <p:cNvPr id="12" name="TextBox 11"/>
+              <a:t>④</a:t>
+            </a:r>
+          </a:p>
+        </p:txBody>
+      </p:sp>
+      <p:sp>
+        <p:nvSpPr>
+          <p:cNvPr id="24" name="TextBox 23"/>
           <p:cNvSpPr txBox="1"/>
           <p:nvPr/>
         </p:nvSpPr>
         <p:spPr>
           <a:xfrm>
-            <a:off x="1371600" y="2304288"/>
-            <a:ext cx="9997135" cy="484632"/>
+            <a:off x="9966731" y="2395728"/>
+            <a:ext cx="1356283" cy="822960"/>
           </a:xfrm>
           <a:prstGeom prst="rect">
             <a:avLst/>
@@ -5765,123 +6798,36 @@
           <a:p>
             <a:pPr algn="l">
               <a:lnSpc>
-                <a:spcPct val="110000"/>
+                <a:spcPct val="130000"/>
               </a:lnSpc>
+              <a:spcAft>
+                <a:spcPts val="400"/>
+              </a:spcAft>
             </a:pPr>
             <a:r>
-              <a:rPr sz="1400" b="1">
-                <a:solidFill>
-                  <a:srgbClr val="1C2A33"/>
+              <a:rPr sz="1500" b="1">
+                <a:solidFill>
+                  <a:srgbClr val="6B6258"/>
                 </a:solidFill>
                 <a:latin typeface="微软雅黑"/>
                 <a:ea typeface="微软雅黑"/>
                 <a:cs typeface="微软雅黑"/>
               </a:rPr>
-              <a:t>Step 2 青春诗朗诵会（上）</a:t>
-            </a:r>
-          </a:p>
-        </p:txBody>
-      </p:sp>
-      <p:sp>
-        <p:nvSpPr>
-          <p:cNvPr id="13" name="Rounded Rectangle 12"/>
-          <p:cNvSpPr/>
-          <p:nvPr/>
-        </p:nvSpPr>
-        <p:spPr>
-          <a:xfrm>
-            <a:off x="640080" y="3017520"/>
-            <a:ext cx="10911535" cy="685800"/>
-          </a:xfrm>
-          <a:prstGeom prst="roundRect">
-            <a:avLst/>
-          </a:prstGeom>
-          <a:solidFill>
-            <a:srgbClr val="FFFFFF"/>
-          </a:solidFill>
-          <a:ln w="22860">
-            <a:solidFill>
-              <a:srgbClr val="2E7D6B"/>
-            </a:solidFill>
-          </a:ln>
-          <a:effectLst/>
-        </p:spPr>
-        <p:style>
-          <a:lnRef idx="1">
-            <a:schemeClr val="accent1"/>
-          </a:lnRef>
-          <a:fillRef idx="3">
-            <a:schemeClr val="accent1"/>
-          </a:fillRef>
-          <a:effectRef idx="2">
-            <a:schemeClr val="accent1"/>
-          </a:effectRef>
-          <a:fontRef idx="minor">
-            <a:schemeClr val="lt1"/>
-          </a:fontRef>
-        </p:style>
-        <p:txBody>
-          <a:bodyPr rtlCol="0" anchor="ctr"/>
-          <a:lstStyle/>
-          <a:p>
-            <a:pPr algn="ctr"/>
-          </a:p>
-        </p:txBody>
-      </p:sp>
-      <p:sp>
-        <p:nvSpPr>
-          <p:cNvPr id="14" name="Oval 13"/>
-          <p:cNvSpPr/>
-          <p:nvPr/>
-        </p:nvSpPr>
-        <p:spPr>
-          <a:xfrm>
-            <a:off x="804672" y="3182112"/>
-            <a:ext cx="457200" cy="457200"/>
-          </a:xfrm>
-          <a:prstGeom prst="ellipse">
-            <a:avLst/>
-          </a:prstGeom>
-          <a:solidFill>
-            <a:srgbClr val="2E7D6B"/>
-          </a:solidFill>
-          <a:ln>
-            <a:noFill/>
-          </a:ln>
-          <a:effectLst/>
-        </p:spPr>
-        <p:style>
-          <a:lnRef idx="1">
-            <a:schemeClr val="accent1"/>
-          </a:lnRef>
-          <a:fillRef idx="3">
-            <a:schemeClr val="accent1"/>
-          </a:fillRef>
-          <a:effectRef idx="2">
-            <a:schemeClr val="accent1"/>
-          </a:effectRef>
-          <a:fontRef idx="minor">
-            <a:schemeClr val="lt1"/>
-          </a:fontRef>
-        </p:style>
-        <p:txBody>
-          <a:bodyPr rtlCol="0" anchor="ctr"/>
-          <a:lstStyle/>
-          <a:p>
-            <a:pPr algn="ctr"/>
-          </a:p>
-        </p:txBody>
-      </p:sp>
-      <p:sp>
-        <p:nvSpPr>
-          <p:cNvPr id="15" name="TextBox 14"/>
+              <a:t>总结法</a:t>
+            </a:r>
+          </a:p>
+        </p:txBody>
+      </p:sp>
+      <p:sp>
+        <p:nvSpPr>
+          <p:cNvPr id="25" name="TextBox 24"/>
           <p:cNvSpPr txBox="1"/>
           <p:nvPr/>
         </p:nvSpPr>
         <p:spPr>
           <a:xfrm>
-            <a:off x="804672" y="3236976"/>
-            <a:ext cx="457200" cy="384048"/>
+            <a:off x="9326651" y="3154680"/>
+            <a:ext cx="1996363" cy="2788920"/>
           </a:xfrm>
           <a:prstGeom prst="rect">
             <a:avLst/>
@@ -5894,401 +6840,31 @@
           </a:bodyPr>
           <a:lstStyle/>
           <a:p>
-            <a:pPr algn="ctr"/>
-            <a:r>
-              <a:rPr sz="1600" b="1">
-                <a:solidFill>
-                  <a:srgbClr val="FFFFFF"/>
-                </a:solidFill>
-                <a:latin typeface="微软雅黑"/>
-                <a:ea typeface="微软雅黑"/>
-                <a:cs typeface="微软雅黑"/>
-              </a:rPr>
-              <a:t>3</a:t>
-            </a:r>
-          </a:p>
-        </p:txBody>
-      </p:sp>
-      <p:sp>
-        <p:nvSpPr>
-          <p:cNvPr id="16" name="TextBox 15"/>
-          <p:cNvSpPr txBox="1"/>
-          <p:nvPr/>
-        </p:nvSpPr>
-        <p:spPr>
-          <a:xfrm>
-            <a:off x="1371600" y="3127248"/>
-            <a:ext cx="9997135" cy="484632"/>
-          </a:xfrm>
-          <a:prstGeom prst="rect">
-            <a:avLst/>
-          </a:prstGeom>
-          <a:noFill/>
-        </p:spPr>
-        <p:txBody>
-          <a:bodyPr wrap="square" anchor="t" lIns="0" rIns="0" tIns="0" bIns="0">
-            <a:spAutoFit/>
-          </a:bodyPr>
-          <a:lstStyle/>
-          <a:p>
             <a:pPr algn="l">
               <a:lnSpc>
-                <a:spcPct val="110000"/>
+                <a:spcPct val="145000"/>
               </a:lnSpc>
+              <a:spcAft>
+                <a:spcPts val="400"/>
+              </a:spcAft>
             </a:pPr>
             <a:r>
-              <a:rPr sz="1600" b="1">
+              <a:rPr sz="1300" b="0">
                 <a:solidFill>
                   <a:srgbClr val="1C2A33"/>
                 </a:solidFill>
-                <a:latin typeface="微软雅黑"/>
-                <a:ea typeface="微软雅黑"/>
-                <a:cs typeface="微软雅黑"/>
-              </a:rPr>
-              <a:t>Step 3 青春意象展</a:t>
-            </a:r>
-          </a:p>
-        </p:txBody>
-      </p:sp>
-      <p:sp>
-        <p:nvSpPr>
-          <p:cNvPr id="17" name="Rounded Rectangle 16"/>
-          <p:cNvSpPr/>
-          <p:nvPr/>
-        </p:nvSpPr>
-        <p:spPr>
-          <a:xfrm>
-            <a:off x="640080" y="3840480"/>
-            <a:ext cx="10911535" cy="685800"/>
-          </a:xfrm>
-          <a:prstGeom prst="roundRect">
-            <a:avLst/>
-          </a:prstGeom>
-          <a:solidFill>
-            <a:srgbClr val="FFFFFF"/>
-          </a:solidFill>
-          <a:ln w="22860">
-            <a:solidFill>
-              <a:srgbClr val="2E7D6B"/>
-            </a:solidFill>
-          </a:ln>
-          <a:effectLst/>
-        </p:spPr>
-        <p:style>
-          <a:lnRef idx="1">
-            <a:schemeClr val="accent1"/>
-          </a:lnRef>
-          <a:fillRef idx="3">
-            <a:schemeClr val="accent1"/>
-          </a:fillRef>
-          <a:effectRef idx="2">
-            <a:schemeClr val="accent1"/>
-          </a:effectRef>
-          <a:fontRef idx="minor">
-            <a:schemeClr val="lt1"/>
-          </a:fontRef>
-        </p:style>
-        <p:txBody>
-          <a:bodyPr rtlCol="0" anchor="ctr"/>
-          <a:lstStyle/>
-          <a:p>
-            <a:pPr algn="ctr"/>
-          </a:p>
-        </p:txBody>
-      </p:sp>
-      <p:sp>
-        <p:nvSpPr>
-          <p:cNvPr id="18" name="Oval 17"/>
-          <p:cNvSpPr/>
-          <p:nvPr/>
-        </p:nvSpPr>
-        <p:spPr>
-          <a:xfrm>
-            <a:off x="804672" y="4005072"/>
-            <a:ext cx="457200" cy="457200"/>
-          </a:xfrm>
-          <a:prstGeom prst="ellipse">
-            <a:avLst/>
-          </a:prstGeom>
-          <a:solidFill>
-            <a:srgbClr val="2E7D6B"/>
-          </a:solidFill>
-          <a:ln>
-            <a:noFill/>
-          </a:ln>
-          <a:effectLst/>
-        </p:spPr>
-        <p:style>
-          <a:lnRef idx="1">
-            <a:schemeClr val="accent1"/>
-          </a:lnRef>
-          <a:fillRef idx="3">
-            <a:schemeClr val="accent1"/>
-          </a:fillRef>
-          <a:effectRef idx="2">
-            <a:schemeClr val="accent1"/>
-          </a:effectRef>
-          <a:fontRef idx="minor">
-            <a:schemeClr val="lt1"/>
-          </a:fontRef>
-        </p:style>
-        <p:txBody>
-          <a:bodyPr rtlCol="0" anchor="ctr"/>
-          <a:lstStyle/>
-          <a:p>
-            <a:pPr algn="ctr"/>
-          </a:p>
-        </p:txBody>
-      </p:sp>
-      <p:sp>
-        <p:nvSpPr>
-          <p:cNvPr id="19" name="TextBox 18"/>
-          <p:cNvSpPr txBox="1"/>
-          <p:nvPr/>
-        </p:nvSpPr>
-        <p:spPr>
-          <a:xfrm>
-            <a:off x="804672" y="4059936"/>
-            <a:ext cx="457200" cy="384048"/>
-          </a:xfrm>
-          <a:prstGeom prst="rect">
-            <a:avLst/>
-          </a:prstGeom>
-          <a:noFill/>
-        </p:spPr>
-        <p:txBody>
-          <a:bodyPr wrap="square" anchor="t" lIns="0" rIns="0" tIns="0" bIns="0">
-            <a:spAutoFit/>
-          </a:bodyPr>
-          <a:lstStyle/>
-          <a:p>
-            <a:pPr algn="ctr"/>
-            <a:r>
-              <a:rPr sz="1600" b="1">
-                <a:solidFill>
-                  <a:srgbClr val="FFFFFF"/>
-                </a:solidFill>
-                <a:latin typeface="微软雅黑"/>
-                <a:ea typeface="微软雅黑"/>
-                <a:cs typeface="微软雅黑"/>
-              </a:rPr>
-              <a:t>4</a:t>
-            </a:r>
-          </a:p>
-        </p:txBody>
-      </p:sp>
-      <p:sp>
-        <p:nvSpPr>
-          <p:cNvPr id="20" name="TextBox 19"/>
-          <p:cNvSpPr txBox="1"/>
-          <p:nvPr/>
-        </p:nvSpPr>
-        <p:spPr>
-          <a:xfrm>
-            <a:off x="1371600" y="3950208"/>
-            <a:ext cx="9997135" cy="484632"/>
-          </a:xfrm>
-          <a:prstGeom prst="rect">
-            <a:avLst/>
-          </a:prstGeom>
-          <a:noFill/>
-        </p:spPr>
-        <p:txBody>
-          <a:bodyPr wrap="square" anchor="t" lIns="0" rIns="0" tIns="0" bIns="0">
-            <a:spAutoFit/>
-          </a:bodyPr>
-          <a:lstStyle/>
-          <a:p>
-            <a:pPr algn="l">
-              <a:lnSpc>
-                <a:spcPct val="110000"/>
-              </a:lnSpc>
-            </a:pPr>
-            <a:r>
-              <a:rPr sz="1400" b="1">
-                <a:solidFill>
-                  <a:srgbClr val="1C2A33"/>
-                </a:solidFill>
-                <a:latin typeface="微软雅黑"/>
-                <a:ea typeface="微软雅黑"/>
-                <a:cs typeface="微软雅黑"/>
-              </a:rPr>
-              <a:t>Step 4 单元学习反思单</a:t>
-            </a:r>
-          </a:p>
-        </p:txBody>
-      </p:sp>
-      <p:sp>
-        <p:nvSpPr>
-          <p:cNvPr id="21" name="Rounded Rectangle 20"/>
-          <p:cNvSpPr/>
-          <p:nvPr/>
-        </p:nvSpPr>
-        <p:spPr>
-          <a:xfrm>
-            <a:off x="640080" y="4663440"/>
-            <a:ext cx="10911535" cy="685800"/>
-          </a:xfrm>
-          <a:prstGeom prst="roundRect">
-            <a:avLst/>
-          </a:prstGeom>
-          <a:solidFill>
-            <a:srgbClr val="FFFFFF"/>
-          </a:solidFill>
-          <a:ln w="22860">
-            <a:solidFill>
-              <a:srgbClr val="2E7D6B"/>
-            </a:solidFill>
-          </a:ln>
-          <a:effectLst/>
-        </p:spPr>
-        <p:style>
-          <a:lnRef idx="1">
-            <a:schemeClr val="accent1"/>
-          </a:lnRef>
-          <a:fillRef idx="3">
-            <a:schemeClr val="accent1"/>
-          </a:fillRef>
-          <a:effectRef idx="2">
-            <a:schemeClr val="accent1"/>
-          </a:effectRef>
-          <a:fontRef idx="minor">
-            <a:schemeClr val="lt1"/>
-          </a:fontRef>
-        </p:style>
-        <p:txBody>
-          <a:bodyPr rtlCol="0" anchor="ctr"/>
-          <a:lstStyle/>
-          <a:p>
-            <a:pPr algn="ctr"/>
-          </a:p>
-        </p:txBody>
-      </p:sp>
-      <p:sp>
-        <p:nvSpPr>
-          <p:cNvPr id="22" name="Oval 21"/>
-          <p:cNvSpPr/>
-          <p:nvPr/>
-        </p:nvSpPr>
-        <p:spPr>
-          <a:xfrm>
-            <a:off x="804672" y="4828032"/>
-            <a:ext cx="457200" cy="457200"/>
-          </a:xfrm>
-          <a:prstGeom prst="ellipse">
-            <a:avLst/>
-          </a:prstGeom>
-          <a:solidFill>
-            <a:srgbClr val="2E7D6B"/>
-          </a:solidFill>
-          <a:ln>
-            <a:noFill/>
-          </a:ln>
-          <a:effectLst/>
-        </p:spPr>
-        <p:style>
-          <a:lnRef idx="1">
-            <a:schemeClr val="accent1"/>
-          </a:lnRef>
-          <a:fillRef idx="3">
-            <a:schemeClr val="accent1"/>
-          </a:fillRef>
-          <a:effectRef idx="2">
-            <a:schemeClr val="accent1"/>
-          </a:effectRef>
-          <a:fontRef idx="minor">
-            <a:schemeClr val="lt1"/>
-          </a:fontRef>
-        </p:style>
-        <p:txBody>
-          <a:bodyPr rtlCol="0" anchor="ctr"/>
-          <a:lstStyle/>
-          <a:p>
-            <a:pPr algn="ctr"/>
-          </a:p>
-        </p:txBody>
-      </p:sp>
-      <p:sp>
-        <p:nvSpPr>
-          <p:cNvPr id="23" name="TextBox 22"/>
-          <p:cNvSpPr txBox="1"/>
-          <p:nvPr/>
-        </p:nvSpPr>
-        <p:spPr>
-          <a:xfrm>
-            <a:off x="804672" y="4882896"/>
-            <a:ext cx="457200" cy="384048"/>
-          </a:xfrm>
-          <a:prstGeom prst="rect">
-            <a:avLst/>
-          </a:prstGeom>
-          <a:noFill/>
-        </p:spPr>
-        <p:txBody>
-          <a:bodyPr wrap="square" anchor="t" lIns="0" rIns="0" tIns="0" bIns="0">
-            <a:spAutoFit/>
-          </a:bodyPr>
-          <a:lstStyle/>
-          <a:p>
-            <a:pPr algn="ctr"/>
-            <a:r>
-              <a:rPr sz="1600" b="1">
-                <a:solidFill>
-                  <a:srgbClr val="FFFFFF"/>
-                </a:solidFill>
-                <a:latin typeface="微软雅黑"/>
-                <a:ea typeface="微软雅黑"/>
-                <a:cs typeface="微软雅黑"/>
-              </a:rPr>
-              <a:t>5</a:t>
-            </a:r>
-          </a:p>
-        </p:txBody>
-      </p:sp>
-      <p:sp>
-        <p:nvSpPr>
-          <p:cNvPr id="24" name="TextBox 23"/>
-          <p:cNvSpPr txBox="1"/>
-          <p:nvPr/>
-        </p:nvSpPr>
-        <p:spPr>
-          <a:xfrm>
-            <a:off x="1371600" y="4773168"/>
-            <a:ext cx="9997135" cy="484632"/>
-          </a:xfrm>
-          <a:prstGeom prst="rect">
-            <a:avLst/>
-          </a:prstGeom>
-          <a:noFill/>
-        </p:spPr>
-        <p:txBody>
-          <a:bodyPr wrap="square" anchor="t" lIns="0" rIns="0" tIns="0" bIns="0">
-            <a:spAutoFit/>
-          </a:bodyPr>
-          <a:lstStyle/>
-          <a:p>
-            <a:pPr algn="l">
-              <a:lnSpc>
-                <a:spcPct val="110000"/>
-              </a:lnSpc>
-            </a:pPr>
-            <a:r>
-              <a:rPr sz="1400" b="1">
-                <a:solidFill>
-                  <a:srgbClr val="1C2A33"/>
-                </a:solidFill>
-                <a:latin typeface="微软雅黑"/>
-                <a:ea typeface="微软雅黑"/>
-                <a:cs typeface="微软雅黑"/>
-              </a:rPr>
-              <a:t>Step 5 分享反思+总结</a:t>
-            </a:r>
-          </a:p>
-        </p:txBody>
-      </p:sp>
-      <p:sp>
-        <p:nvSpPr>
-          <p:cNvPr id="25" name="TextBox 24"/>
+                <a:latin typeface="楷体"/>
+                <a:ea typeface="楷体"/>
+                <a:cs typeface="楷体"/>
+              </a:rPr>
+              <a:t>回顾8课时学习路径，点明单元核心方法可迁移之处。</a:t>
+            </a:r>
+          </a:p>
+        </p:txBody>
+      </p:sp>
+      <p:sp>
+        <p:nvSpPr>
+          <p:cNvPr id="26" name="TextBox 25"/>
           <p:cNvSpPr txBox="1"/>
           <p:nvPr/>
         </p:nvSpPr>
@@ -6421,7 +6997,7 @@
                 <a:ea typeface="微软雅黑"/>
                 <a:cs typeface="微软雅黑"/>
               </a:rPr>
-              <a:t>易混易错</a:t>
+              <a:t>难点</a:t>
             </a:r>
           </a:p>
         </p:txBody>
@@ -6472,14 +7048,58 @@
       </p:sp>
       <p:sp>
         <p:nvSpPr>
-          <p:cNvPr id="5" name="Rounded Rectangle 4"/>
+          <p:cNvPr id="5" name="TextBox 4"/>
+          <p:cNvSpPr txBox="1"/>
+          <p:nvPr/>
+        </p:nvSpPr>
+        <p:spPr>
+          <a:xfrm>
+            <a:off x="640080" y="1325880"/>
+            <a:ext cx="10911535" cy="548640"/>
+          </a:xfrm>
+          <a:prstGeom prst="rect">
+            <a:avLst/>
+          </a:prstGeom>
+          <a:noFill/>
+        </p:spPr>
+        <p:txBody>
+          <a:bodyPr wrap="square" anchor="t" lIns="0" rIns="0" tIns="0" bIns="0">
+            <a:spAutoFit/>
+          </a:bodyPr>
+          <a:lstStyle/>
+          <a:p>
+            <a:pPr algn="l">
+              <a:lnSpc>
+                <a:spcPct val="145000"/>
+              </a:lnSpc>
+              <a:spcAft>
+                <a:spcPts val="400"/>
+              </a:spcAft>
+            </a:pPr>
+            <a:r>
+              <a:rPr sz="2600" b="1">
+                <a:solidFill>
+                  <a:srgbClr val="1C2A33"/>
+                </a:solidFill>
+                <a:latin typeface="楷体"/>
+                <a:ea typeface="楷体"/>
+                <a:cs typeface="楷体"/>
+              </a:rPr>
+              <a:t>本课难点 · 怎么破</a:t>
+            </a:r>
+          </a:p>
+        </p:txBody>
+      </p:sp>
+      <p:sp>
+        <p:nvSpPr>
+          <p:cNvPr id="6" name="Rounded Rectangle 5"/>
           <p:cNvSpPr/>
           <p:nvPr/>
         </p:nvSpPr>
         <p:spPr>
           <a:xfrm>
-            <a:off x="640080" y="1417320"/>
-            <a:ext cx="5349240" cy="2057400"/>
+            <a:off x="640080" y="2194560"/>
+            <a:ext cx="3393338" cy="3931920"/>
           </a:xfrm>
           <a:prstGeom prst="roundRect">
             <a:avLst/>
@@ -6487,7 +7107,7 @@
           <a:solidFill>
             <a:srgbClr val="FFFFFF"/>
           </a:solidFill>
-          <a:ln w="22860">
+          <a:ln w="20320">
             <a:solidFill>
               <a:srgbClr val="B23A2A"/>
             </a:solidFill>
@@ -6518,14 +7138,14 @@
       </p:sp>
       <p:sp>
         <p:nvSpPr>
-          <p:cNvPr id="6" name="Oval 5"/>
+          <p:cNvPr id="7" name="Oval 6"/>
           <p:cNvSpPr/>
           <p:nvPr/>
         </p:nvSpPr>
         <p:spPr>
           <a:xfrm>
-            <a:off x="804672" y="1581912"/>
-            <a:ext cx="457200" cy="457200"/>
+            <a:off x="822960" y="2377440"/>
+            <a:ext cx="502920" cy="502920"/>
           </a:xfrm>
           <a:prstGeom prst="ellipse">
             <a:avLst/>
@@ -6562,14 +7182,14 @@
       </p:sp>
       <p:sp>
         <p:nvSpPr>
-          <p:cNvPr id="7" name="TextBox 6"/>
+          <p:cNvPr id="8" name="TextBox 7"/>
           <p:cNvSpPr txBox="1"/>
           <p:nvPr/>
         </p:nvSpPr>
         <p:spPr>
           <a:xfrm>
-            <a:off x="804672" y="1636776"/>
-            <a:ext cx="457200" cy="384048"/>
+            <a:off x="822960" y="2450592"/>
+            <a:ext cx="502920" cy="384048"/>
           </a:xfrm>
           <a:prstGeom prst="rect">
             <a:avLst/>
@@ -6582,9 +7202,16 @@
           </a:bodyPr>
           <a:lstStyle/>
           <a:p>
-            <a:pPr algn="ctr"/>
-            <a:r>
-              <a:rPr sz="1600" b="1">
+            <a:pPr algn="ctr">
+              <a:lnSpc>
+                <a:spcPct val="145000"/>
+              </a:lnSpc>
+              <a:spcAft>
+                <a:spcPts val="400"/>
+              </a:spcAft>
+            </a:pPr>
+            <a:r>
+              <a:rPr sz="1800" b="1">
                 <a:solidFill>
                   <a:srgbClr val="FFFFFF"/>
                 </a:solidFill>
@@ -6592,21 +7219,21 @@
                 <a:ea typeface="微软雅黑"/>
                 <a:cs typeface="微软雅黑"/>
               </a:rPr>
-              <a:t>!</a:t>
-            </a:r>
-          </a:p>
-        </p:txBody>
-      </p:sp>
-      <p:sp>
-        <p:nvSpPr>
-          <p:cNvPr id="8" name="TextBox 7"/>
+              <a:t>①</a:t>
+            </a:r>
+          </a:p>
+        </p:txBody>
+      </p:sp>
+      <p:sp>
+        <p:nvSpPr>
+          <p:cNvPr id="9" name="TextBox 8"/>
           <p:cNvSpPr txBox="1"/>
           <p:nvPr/>
         </p:nvSpPr>
         <p:spPr>
           <a:xfrm>
-            <a:off x="1371600" y="1527048"/>
-            <a:ext cx="4434840" cy="457200"/>
+            <a:off x="1508760" y="2395728"/>
+            <a:ext cx="2296058" cy="822960"/>
           </a:xfrm>
           <a:prstGeom prst="rect">
             <a:avLst/>
@@ -6621,33 +7248,36 @@
           <a:p>
             <a:pPr algn="l">
               <a:lnSpc>
-                <a:spcPct val="110000"/>
+                <a:spcPct val="130000"/>
               </a:lnSpc>
+              <a:spcAft>
+                <a:spcPts val="400"/>
+              </a:spcAft>
             </a:pPr>
             <a:r>
               <a:rPr sz="1600" b="1">
                 <a:solidFill>
-                  <a:srgbClr val="1C2A33"/>
+                  <a:srgbClr val="B23A2A"/>
                 </a:solidFill>
                 <a:latin typeface="微软雅黑"/>
                 <a:ea typeface="微软雅黑"/>
                 <a:cs typeface="微软雅黑"/>
               </a:rPr>
-              <a:t/>
-            </a:r>
-          </a:p>
-        </p:txBody>
-      </p:sp>
-      <p:sp>
-        <p:nvSpPr>
-          <p:cNvPr id="9" name="TextBox 8"/>
+              <a:t>朗诵的情感表达。原因</a:t>
+            </a:r>
+          </a:p>
+        </p:txBody>
+      </p:sp>
+      <p:sp>
+        <p:nvSpPr>
+          <p:cNvPr id="10" name="TextBox 9"/>
           <p:cNvSpPr txBox="1"/>
           <p:nvPr/>
         </p:nvSpPr>
         <p:spPr>
           <a:xfrm>
-            <a:off x="1371600" y="1965960"/>
-            <a:ext cx="4434840" cy="1417320"/>
+            <a:off x="868680" y="3154680"/>
+            <a:ext cx="2936138" cy="2788920"/>
           </a:xfrm>
           <a:prstGeom prst="rect">
             <a:avLst/>
@@ -6662,11 +7292,14 @@
           <a:p>
             <a:pPr algn="l">
               <a:lnSpc>
-                <a:spcPct val="128000"/>
+                <a:spcPct val="145000"/>
               </a:lnSpc>
+              <a:spcAft>
+                <a:spcPts val="400"/>
+              </a:spcAft>
             </a:pPr>
             <a:r>
-              <a:rPr sz="1400" b="0">
+              <a:rPr sz="1350" b="0">
                 <a:solidFill>
                   <a:srgbClr val="1C2A33"/>
                 </a:solidFill>
@@ -6674,21 +7307,21 @@
                 <a:ea typeface="楷体"/>
                 <a:cs typeface="楷体"/>
               </a:rPr>
-              <a:t>① 朗诵的情感表达。原因：部分学生朗读平淡或过度煽情，需提前给朗诵建议卡。</a:t>
-            </a:r>
-          </a:p>
-        </p:txBody>
-      </p:sp>
-      <p:sp>
-        <p:nvSpPr>
-          <p:cNvPr id="10" name="Rounded Rectangle 9"/>
+              <a:t>部分学生朗读平淡或过度煽情，需提前给朗诵建议卡。</a:t>
+            </a:r>
+          </a:p>
+        </p:txBody>
+      </p:sp>
+      <p:sp>
+        <p:nvSpPr>
+          <p:cNvPr id="11" name="Rounded Rectangle 10"/>
           <p:cNvSpPr/>
           <p:nvPr/>
         </p:nvSpPr>
         <p:spPr>
           <a:xfrm>
-            <a:off x="6263640" y="1417320"/>
-            <a:ext cx="5349240" cy="2057400"/>
+            <a:off x="4399178" y="2194560"/>
+            <a:ext cx="3393338" cy="3931920"/>
           </a:xfrm>
           <a:prstGeom prst="roundRect">
             <a:avLst/>
@@ -6696,9 +7329,9 @@
           <a:solidFill>
             <a:srgbClr val="FFFFFF"/>
           </a:solidFill>
-          <a:ln w="22860">
+          <a:ln w="20320">
             <a:solidFill>
-              <a:srgbClr val="B23A2A"/>
+              <a:srgbClr val="2E7D6B"/>
             </a:solidFill>
           </a:ln>
           <a:effectLst/>
@@ -6727,20 +7360,20 @@
       </p:sp>
       <p:sp>
         <p:nvSpPr>
-          <p:cNvPr id="11" name="Oval 10"/>
+          <p:cNvPr id="12" name="Oval 11"/>
           <p:cNvSpPr/>
           <p:nvPr/>
         </p:nvSpPr>
         <p:spPr>
           <a:xfrm>
-            <a:off x="6428232" y="1581912"/>
-            <a:ext cx="457200" cy="457200"/>
+            <a:off x="4582058" y="2377440"/>
+            <a:ext cx="502920" cy="502920"/>
           </a:xfrm>
           <a:prstGeom prst="ellipse">
             <a:avLst/>
           </a:prstGeom>
           <a:solidFill>
-            <a:srgbClr val="B23A2A"/>
+            <a:srgbClr val="2E7D6B"/>
           </a:solidFill>
           <a:ln>
             <a:noFill/>
@@ -6771,14 +7404,14 @@
       </p:sp>
       <p:sp>
         <p:nvSpPr>
-          <p:cNvPr id="12" name="TextBox 11"/>
+          <p:cNvPr id="13" name="TextBox 12"/>
           <p:cNvSpPr txBox="1"/>
           <p:nvPr/>
         </p:nvSpPr>
         <p:spPr>
           <a:xfrm>
-            <a:off x="6428232" y="1636776"/>
-            <a:ext cx="457200" cy="384048"/>
+            <a:off x="4582058" y="2450592"/>
+            <a:ext cx="502920" cy="384048"/>
           </a:xfrm>
           <a:prstGeom prst="rect">
             <a:avLst/>
@@ -6791,9 +7424,16 @@
           </a:bodyPr>
           <a:lstStyle/>
           <a:p>
-            <a:pPr algn="ctr"/>
-            <a:r>
-              <a:rPr sz="1600" b="1">
+            <a:pPr algn="ctr">
+              <a:lnSpc>
+                <a:spcPct val="145000"/>
+              </a:lnSpc>
+              <a:spcAft>
+                <a:spcPts val="400"/>
+              </a:spcAft>
+            </a:pPr>
+            <a:r>
+              <a:rPr sz="1800" b="1">
                 <a:solidFill>
                   <a:srgbClr val="FFFFFF"/>
                 </a:solidFill>
@@ -6801,21 +7441,21 @@
                 <a:ea typeface="微软雅黑"/>
                 <a:cs typeface="微软雅黑"/>
               </a:rPr>
-              <a:t>!</a:t>
-            </a:r>
-          </a:p>
-        </p:txBody>
-      </p:sp>
-      <p:sp>
-        <p:nvSpPr>
-          <p:cNvPr id="13" name="TextBox 12"/>
+              <a:t>②</a:t>
+            </a:r>
+          </a:p>
+        </p:txBody>
+      </p:sp>
+      <p:sp>
+        <p:nvSpPr>
+          <p:cNvPr id="14" name="TextBox 13"/>
           <p:cNvSpPr txBox="1"/>
           <p:nvPr/>
         </p:nvSpPr>
         <p:spPr>
           <a:xfrm>
-            <a:off x="6995160" y="1527048"/>
-            <a:ext cx="4434840" cy="457200"/>
+            <a:off x="5267858" y="2395728"/>
+            <a:ext cx="2296058" cy="822960"/>
           </a:xfrm>
           <a:prstGeom prst="rect">
             <a:avLst/>
@@ -6830,33 +7470,36 @@
           <a:p>
             <a:pPr algn="l">
               <a:lnSpc>
-                <a:spcPct val="110000"/>
+                <a:spcPct val="130000"/>
               </a:lnSpc>
+              <a:spcAft>
+                <a:spcPts val="400"/>
+              </a:spcAft>
             </a:pPr>
             <a:r>
               <a:rPr sz="1600" b="1">
                 <a:solidFill>
-                  <a:srgbClr val="1C2A33"/>
+                  <a:srgbClr val="2E7D6B"/>
                 </a:solidFill>
                 <a:latin typeface="微软雅黑"/>
                 <a:ea typeface="微软雅黑"/>
                 <a:cs typeface="微软雅黑"/>
               </a:rPr>
-              <a:t/>
-            </a:r>
-          </a:p>
-        </p:txBody>
-      </p:sp>
-      <p:sp>
-        <p:nvSpPr>
-          <p:cNvPr id="14" name="TextBox 13"/>
+              <a:t>反思的深度。原因</a:t>
+            </a:r>
+          </a:p>
+        </p:txBody>
+      </p:sp>
+      <p:sp>
+        <p:nvSpPr>
+          <p:cNvPr id="15" name="TextBox 14"/>
           <p:cNvSpPr txBox="1"/>
           <p:nvPr/>
         </p:nvSpPr>
         <p:spPr>
           <a:xfrm>
-            <a:off x="6995160" y="1965960"/>
-            <a:ext cx="4434840" cy="1417320"/>
+            <a:off x="4627778" y="3154680"/>
+            <a:ext cx="2936138" cy="2788920"/>
           </a:xfrm>
           <a:prstGeom prst="rect">
             <a:avLst/>
@@ -6871,11 +7514,14 @@
           <a:p>
             <a:pPr algn="l">
               <a:lnSpc>
-                <a:spcPct val="128000"/>
+                <a:spcPct val="145000"/>
               </a:lnSpc>
+              <a:spcAft>
+                <a:spcPts val="400"/>
+              </a:spcAft>
             </a:pPr>
             <a:r>
-              <a:rPr sz="1200" b="0">
+              <a:rPr sz="1350" b="0">
                 <a:solidFill>
                   <a:srgbClr val="1C2A33"/>
                 </a:solidFill>
@@ -6883,21 +7529,21 @@
                 <a:ea typeface="楷体"/>
                 <a:cs typeface="楷体"/>
               </a:rPr>
-              <a:t>② 反思的深度。原因：学生习惯写「学到了很多」，需用具体提示引导（「我学会的最重要的一个方法是……」）。</a:t>
-            </a:r>
-          </a:p>
-        </p:txBody>
-      </p:sp>
-      <p:sp>
-        <p:nvSpPr>
-          <p:cNvPr id="15" name="Rounded Rectangle 14"/>
+              <a:t>学生习惯写「学到了很多」，需用具体提示引导（「我学会的最重要的一个方法是……」）。</a:t>
+            </a:r>
+          </a:p>
+        </p:txBody>
+      </p:sp>
+      <p:sp>
+        <p:nvSpPr>
+          <p:cNvPr id="16" name="Rounded Rectangle 15"/>
           <p:cNvSpPr/>
           <p:nvPr/>
         </p:nvSpPr>
         <p:spPr>
           <a:xfrm>
-            <a:off x="640080" y="3703320"/>
-            <a:ext cx="5349240" cy="2057400"/>
+            <a:off x="8158276" y="2194560"/>
+            <a:ext cx="3393338" cy="3931920"/>
           </a:xfrm>
           <a:prstGeom prst="roundRect">
             <a:avLst/>
@@ -6905,9 +7551,9 @@
           <a:solidFill>
             <a:srgbClr val="FFFFFF"/>
           </a:solidFill>
-          <a:ln w="22860">
+          <a:ln w="20320">
             <a:solidFill>
-              <a:srgbClr val="B23A2A"/>
+              <a:srgbClr val="C8A86B"/>
             </a:solidFill>
           </a:ln>
           <a:effectLst/>
@@ -6936,20 +7582,20 @@
       </p:sp>
       <p:sp>
         <p:nvSpPr>
-          <p:cNvPr id="16" name="Oval 15"/>
+          <p:cNvPr id="17" name="Oval 16"/>
           <p:cNvSpPr/>
           <p:nvPr/>
         </p:nvSpPr>
         <p:spPr>
           <a:xfrm>
-            <a:off x="804672" y="3867912"/>
-            <a:ext cx="457200" cy="457200"/>
+            <a:off x="8341156" y="2377440"/>
+            <a:ext cx="502920" cy="502920"/>
           </a:xfrm>
           <a:prstGeom prst="ellipse">
             <a:avLst/>
           </a:prstGeom>
           <a:solidFill>
-            <a:srgbClr val="B23A2A"/>
+            <a:srgbClr val="C8A86B"/>
           </a:solidFill>
           <a:ln>
             <a:noFill/>
@@ -6980,14 +7626,14 @@
       </p:sp>
       <p:sp>
         <p:nvSpPr>
-          <p:cNvPr id="17" name="TextBox 16"/>
+          <p:cNvPr id="18" name="TextBox 17"/>
           <p:cNvSpPr txBox="1"/>
           <p:nvPr/>
         </p:nvSpPr>
         <p:spPr>
           <a:xfrm>
-            <a:off x="804672" y="3922776"/>
-            <a:ext cx="457200" cy="384048"/>
+            <a:off x="8341156" y="2450592"/>
+            <a:ext cx="502920" cy="384048"/>
           </a:xfrm>
           <a:prstGeom prst="rect">
             <a:avLst/>
@@ -7000,9 +7646,16 @@
           </a:bodyPr>
           <a:lstStyle/>
           <a:p>
-            <a:pPr algn="ctr"/>
-            <a:r>
-              <a:rPr sz="1600" b="1">
+            <a:pPr algn="ctr">
+              <a:lnSpc>
+                <a:spcPct val="145000"/>
+              </a:lnSpc>
+              <a:spcAft>
+                <a:spcPts val="400"/>
+              </a:spcAft>
+            </a:pPr>
+            <a:r>
+              <a:rPr sz="1800" b="1">
                 <a:solidFill>
                   <a:srgbClr val="FFFFFF"/>
                 </a:solidFill>
@@ -7010,21 +7663,21 @@
                 <a:ea typeface="微软雅黑"/>
                 <a:cs typeface="微软雅黑"/>
               </a:rPr>
-              <a:t>!</a:t>
-            </a:r>
-          </a:p>
-        </p:txBody>
-      </p:sp>
-      <p:sp>
-        <p:nvSpPr>
-          <p:cNvPr id="18" name="TextBox 17"/>
+              <a:t>③</a:t>
+            </a:r>
+          </a:p>
+        </p:txBody>
+      </p:sp>
+      <p:sp>
+        <p:nvSpPr>
+          <p:cNvPr id="19" name="TextBox 18"/>
           <p:cNvSpPr txBox="1"/>
           <p:nvPr/>
         </p:nvSpPr>
         <p:spPr>
           <a:xfrm>
-            <a:off x="1371600" y="3813048"/>
-            <a:ext cx="4434840" cy="457200"/>
+            <a:off x="9026956" y="2395728"/>
+            <a:ext cx="2296058" cy="822960"/>
           </a:xfrm>
           <a:prstGeom prst="rect">
             <a:avLst/>
@@ -7039,33 +7692,36 @@
           <a:p>
             <a:pPr algn="l">
               <a:lnSpc>
-                <a:spcPct val="110000"/>
+                <a:spcPct val="130000"/>
               </a:lnSpc>
+              <a:spcAft>
+                <a:spcPts val="400"/>
+              </a:spcAft>
             </a:pPr>
             <a:r>
               <a:rPr sz="1600" b="1">
                 <a:solidFill>
-                  <a:srgbClr val="1C2A33"/>
+                  <a:srgbClr val="C8A86B"/>
                 </a:solidFill>
                 <a:latin typeface="微软雅黑"/>
                 <a:ea typeface="微软雅黑"/>
                 <a:cs typeface="微软雅黑"/>
               </a:rPr>
-              <a:t/>
-            </a:r>
-          </a:p>
-        </p:txBody>
-      </p:sp>
-      <p:sp>
-        <p:nvSpPr>
-          <p:cNvPr id="19" name="TextBox 18"/>
+              <a:t>活动节奏控制。原因</a:t>
+            </a:r>
+          </a:p>
+        </p:txBody>
+      </p:sp>
+      <p:sp>
+        <p:nvSpPr>
+          <p:cNvPr id="20" name="TextBox 19"/>
           <p:cNvSpPr txBox="1"/>
           <p:nvPr/>
         </p:nvSpPr>
         <p:spPr>
           <a:xfrm>
-            <a:off x="1371600" y="4251960"/>
-            <a:ext cx="4434840" cy="1417320"/>
+            <a:off x="8386876" y="3154680"/>
+            <a:ext cx="2936138" cy="2788920"/>
           </a:xfrm>
           <a:prstGeom prst="rect">
             <a:avLst/>
@@ -7080,11 +7736,14 @@
           <a:p>
             <a:pPr algn="l">
               <a:lnSpc>
-                <a:spcPct val="128000"/>
+                <a:spcPct val="145000"/>
               </a:lnSpc>
+              <a:spcAft>
+                <a:spcPts val="400"/>
+              </a:spcAft>
             </a:pPr>
             <a:r>
-              <a:rPr sz="1400" b="0">
+              <a:rPr sz="1350" b="0">
                 <a:solidFill>
                   <a:srgbClr val="1C2A33"/>
                 </a:solidFill>
@@ -7092,14 +7751,14 @@
                 <a:ea typeface="楷体"/>
                 <a:cs typeface="楷体"/>
               </a:rPr>
-              <a:t>③ 活动节奏控制。原因：朗诵环节容易超时，需严格计时+灵活裁剪。</a:t>
-            </a:r>
-          </a:p>
-        </p:txBody>
-      </p:sp>
-      <p:sp>
-        <p:nvSpPr>
-          <p:cNvPr id="20" name="TextBox 19"/>
+              <a:t>朗诵环节容易超时，需严格计时+灵活裁剪。</a:t>
+            </a:r>
+          </a:p>
+        </p:txBody>
+      </p:sp>
+      <p:sp>
+        <p:nvSpPr>
+          <p:cNvPr id="21" name="TextBox 20"/>
           <p:cNvSpPr txBox="1"/>
           <p:nvPr/>
         </p:nvSpPr>
@@ -7226,13 +7885,13 @@
             <a:r>
               <a:rPr sz="1300" b="1">
                 <a:solidFill>
-                  <a:srgbClr val="C8A86B"/>
+                  <a:srgbClr val="B23A2A"/>
                 </a:solidFill>
                 <a:latin typeface="微软雅黑"/>
                 <a:ea typeface="微软雅黑"/>
                 <a:cs typeface="微软雅黑"/>
               </a:rPr>
-              <a:t>要点板书</a:t>
+              <a:t>板书精华</a:t>
             </a:r>
           </a:p>
         </p:txBody>
@@ -7252,7 +7911,7 @@
             <a:avLst/>
           </a:prstGeom>
           <a:solidFill>
-            <a:srgbClr val="C8A86B"/>
+            <a:srgbClr val="B23A2A"/>
           </a:solidFill>
           <a:ln>
             <a:noFill/>
@@ -7283,24 +7942,68 @@
       </p:sp>
       <p:sp>
         <p:nvSpPr>
-          <p:cNvPr id="5" name="Rounded Rectangle 4"/>
+          <p:cNvPr id="5" name="TextBox 4"/>
+          <p:cNvSpPr txBox="1"/>
+          <p:nvPr/>
+        </p:nvSpPr>
+        <p:spPr>
+          <a:xfrm>
+            <a:off x="640080" y="1325880"/>
+            <a:ext cx="10911535" cy="548640"/>
+          </a:xfrm>
+          <a:prstGeom prst="rect">
+            <a:avLst/>
+          </a:prstGeom>
+          <a:noFill/>
+        </p:spPr>
+        <p:txBody>
+          <a:bodyPr wrap="square" anchor="t" lIns="0" rIns="0" tIns="0" bIns="0">
+            <a:spAutoFit/>
+          </a:bodyPr>
+          <a:lstStyle/>
+          <a:p>
+            <a:pPr algn="l">
+              <a:lnSpc>
+                <a:spcPct val="145000"/>
+              </a:lnSpc>
+              <a:spcAft>
+                <a:spcPts val="400"/>
+              </a:spcAft>
+            </a:pPr>
+            <a:r>
+              <a:rPr sz="2600" b="1">
+                <a:solidFill>
+                  <a:srgbClr val="1C2A33"/>
+                </a:solidFill>
+                <a:latin typeface="楷体"/>
+                <a:ea typeface="楷体"/>
+                <a:cs typeface="楷体"/>
+              </a:rPr>
+              <a:t>本课结构精华</a:t>
+            </a:r>
+          </a:p>
+        </p:txBody>
+      </p:sp>
+      <p:sp>
+        <p:nvSpPr>
+          <p:cNvPr id="6" name="Rounded Rectangle 5"/>
           <p:cNvSpPr/>
           <p:nvPr/>
         </p:nvSpPr>
         <p:spPr>
           <a:xfrm>
-            <a:off x="640080" y="1417320"/>
-            <a:ext cx="10911535" cy="5394960"/>
+            <a:off x="640080" y="2011680"/>
+            <a:ext cx="10911535" cy="4480560"/>
           </a:xfrm>
           <a:prstGeom prst="roundRect">
             <a:avLst/>
           </a:prstGeom>
           <a:solidFill>
-            <a:srgbClr val="FFFFFF"/>
+            <a:srgbClr val="E7DFD2"/>
           </a:solidFill>
-          <a:ln w="25400">
+          <a:ln w="12700">
             <a:solidFill>
-              <a:srgbClr val="C8A86B"/>
+              <a:srgbClr val="6B6258"/>
             </a:solidFill>
           </a:ln>
           <a:effectLst/>
@@ -7329,14 +8032,14 @@
       </p:sp>
       <p:sp>
         <p:nvSpPr>
-          <p:cNvPr id="6" name="TextBox 5"/>
+          <p:cNvPr id="7" name="TextBox 6"/>
           <p:cNvSpPr txBox="1"/>
           <p:nvPr/>
         </p:nvSpPr>
         <p:spPr>
           <a:xfrm>
-            <a:off x="914400" y="1554480"/>
-            <a:ext cx="10362895" cy="5120640"/>
+            <a:off x="914400" y="2148840"/>
+            <a:ext cx="4907127" cy="4206240"/>
           </a:xfrm>
           <a:prstGeom prst="rect">
             <a:avLst/>
@@ -7351,50 +8054,388 @@
           <a:p>
             <a:pPr algn="l">
               <a:lnSpc>
-                <a:spcPct val="110000"/>
+                <a:spcPct val="135000"/>
               </a:lnSpc>
               <a:spcAft>
-                <a:spcPts val="100"/>
+                <a:spcPts val="300"/>
               </a:spcAft>
             </a:pPr>
             <a:r>
-              <a:rPr sz="1300" b="0">
+              <a:rPr sz="1250" b="0">
                 <a:solidFill>
                   <a:srgbClr val="1C2A33"/>
                 </a:solidFill>
-                <a:latin typeface="微软雅黑"/>
-                <a:ea typeface="微软雅黑"/>
-                <a:cs typeface="微软雅黑"/>
-              </a:rPr>
-              <a:t>┌── 青春诗会·单元收官 ──┐
-│ │
-│ 【8课时路径】 │
-│ ①长沙(上)→②长沙(下)→ │
-│ ③放号红烛→④百合花→ │
-│ ⑤香雪比较→⑥写诗→ │
-│ ⑦讲评→⑧诗会 │
-│ 终点:意象 读→写 │
-│ │
-│ 【青春意象墙】 │
-│ 种子/从读到写,意象发芽 │
-│ 破洞/细节越读越深 │
-│ 铅笔盒/不只是物,是渴望 │
-│ ……(便签贴满) │
-│ │
-│ 【反思三问】 │
-│ ①我学会了__ │
-│ ②我需提升__ │
-│ ③我的疑问__ │
-│ │
-│ 读→写→用:意象可迁移 │
-└────────────────────────┘</a:t>
-            </a:r>
-          </a:p>
-        </p:txBody>
-      </p:sp>
-      <p:sp>
-        <p:nvSpPr>
-          <p:cNvPr id="7" name="TextBox 6"/>
+                <a:latin typeface="楷体"/>
+                <a:ea typeface="楷体"/>
+                <a:cs typeface="楷体"/>
+              </a:rPr>
+              <a:t>青春诗会·单元收官</a:t>
+            </a:r>
+          </a:p>
+          <a:p>
+            <a:pPr algn="l">
+              <a:lnSpc>
+                <a:spcPct val="135000"/>
+              </a:lnSpc>
+              <a:spcAft>
+                <a:spcPts val="300"/>
+              </a:spcAft>
+            </a:pPr>
+            <a:r>
+              <a:rPr sz="1250" b="0">
+                <a:solidFill>
+                  <a:srgbClr val="1C2A33"/>
+                </a:solidFill>
+                <a:latin typeface="楷体"/>
+                <a:ea typeface="楷体"/>
+                <a:cs typeface="楷体"/>
+              </a:rPr>
+              <a:t>【8课时路径】</a:t>
+            </a:r>
+          </a:p>
+          <a:p>
+            <a:pPr algn="l">
+              <a:lnSpc>
+                <a:spcPct val="135000"/>
+              </a:lnSpc>
+              <a:spcAft>
+                <a:spcPts val="300"/>
+              </a:spcAft>
+            </a:pPr>
+            <a:r>
+              <a:rPr sz="1250" b="0">
+                <a:solidFill>
+                  <a:srgbClr val="1C2A33"/>
+                </a:solidFill>
+                <a:latin typeface="楷体"/>
+                <a:ea typeface="楷体"/>
+                <a:cs typeface="楷体"/>
+              </a:rPr>
+              <a:t>①长沙(上)→②长沙(下)→</a:t>
+            </a:r>
+          </a:p>
+          <a:p>
+            <a:pPr algn="l">
+              <a:lnSpc>
+                <a:spcPct val="135000"/>
+              </a:lnSpc>
+              <a:spcAft>
+                <a:spcPts val="300"/>
+              </a:spcAft>
+            </a:pPr>
+            <a:r>
+              <a:rPr sz="1250" b="0">
+                <a:solidFill>
+                  <a:srgbClr val="1C2A33"/>
+                </a:solidFill>
+                <a:latin typeface="楷体"/>
+                <a:ea typeface="楷体"/>
+                <a:cs typeface="楷体"/>
+              </a:rPr>
+              <a:t>③放号红烛→④百合花→</a:t>
+            </a:r>
+          </a:p>
+          <a:p>
+            <a:pPr algn="l">
+              <a:lnSpc>
+                <a:spcPct val="135000"/>
+              </a:lnSpc>
+              <a:spcAft>
+                <a:spcPts val="300"/>
+              </a:spcAft>
+            </a:pPr>
+            <a:r>
+              <a:rPr sz="1250" b="0">
+                <a:solidFill>
+                  <a:srgbClr val="1C2A33"/>
+                </a:solidFill>
+                <a:latin typeface="楷体"/>
+                <a:ea typeface="楷体"/>
+                <a:cs typeface="楷体"/>
+              </a:rPr>
+              <a:t>⑤香雪比较→⑥写诗→</a:t>
+            </a:r>
+          </a:p>
+          <a:p>
+            <a:pPr algn="l">
+              <a:lnSpc>
+                <a:spcPct val="135000"/>
+              </a:lnSpc>
+              <a:spcAft>
+                <a:spcPts val="300"/>
+              </a:spcAft>
+            </a:pPr>
+            <a:r>
+              <a:rPr sz="1250" b="0">
+                <a:solidFill>
+                  <a:srgbClr val="1C2A33"/>
+                </a:solidFill>
+                <a:latin typeface="楷体"/>
+                <a:ea typeface="楷体"/>
+                <a:cs typeface="楷体"/>
+              </a:rPr>
+              <a:t>⑦讲评→⑧诗会</a:t>
+            </a:r>
+          </a:p>
+          <a:p>
+            <a:pPr algn="l">
+              <a:lnSpc>
+                <a:spcPct val="135000"/>
+              </a:lnSpc>
+              <a:spcAft>
+                <a:spcPts val="300"/>
+              </a:spcAft>
+            </a:pPr>
+            <a:r>
+              <a:rPr sz="1250" b="0">
+                <a:solidFill>
+                  <a:srgbClr val="1C2A33"/>
+                </a:solidFill>
+                <a:latin typeface="楷体"/>
+                <a:ea typeface="楷体"/>
+                <a:cs typeface="楷体"/>
+              </a:rPr>
+              <a:t>终点:意象 读→写</a:t>
+            </a:r>
+          </a:p>
+          <a:p>
+            <a:pPr algn="l">
+              <a:lnSpc>
+                <a:spcPct val="135000"/>
+              </a:lnSpc>
+              <a:spcAft>
+                <a:spcPts val="300"/>
+              </a:spcAft>
+            </a:pPr>
+            <a:r>
+              <a:rPr sz="1250" b="0">
+                <a:solidFill>
+                  <a:srgbClr val="1C2A33"/>
+                </a:solidFill>
+                <a:latin typeface="楷体"/>
+                <a:ea typeface="楷体"/>
+                <a:cs typeface="楷体"/>
+              </a:rPr>
+              <a:t>【青春意象墙】</a:t>
+            </a:r>
+          </a:p>
+          <a:p>
+            <a:pPr algn="l">
+              <a:lnSpc>
+                <a:spcPct val="135000"/>
+              </a:lnSpc>
+              <a:spcAft>
+                <a:spcPts val="300"/>
+              </a:spcAft>
+            </a:pPr>
+            <a:r>
+              <a:rPr sz="1250" b="0">
+                <a:solidFill>
+                  <a:srgbClr val="1C2A33"/>
+                </a:solidFill>
+                <a:latin typeface="楷体"/>
+                <a:ea typeface="楷体"/>
+                <a:cs typeface="楷体"/>
+              </a:rPr>
+              <a:t>种子/从读到写,意象发芽</a:t>
+            </a:r>
+          </a:p>
+        </p:txBody>
+      </p:sp>
+      <p:sp>
+        <p:nvSpPr>
+          <p:cNvPr id="8" name="TextBox 7"/>
+          <p:cNvSpPr txBox="1"/>
+          <p:nvPr/>
+        </p:nvSpPr>
+        <p:spPr>
+          <a:xfrm>
+            <a:off x="6095847" y="2148840"/>
+            <a:ext cx="4907127" cy="4206240"/>
+          </a:xfrm>
+          <a:prstGeom prst="rect">
+            <a:avLst/>
+          </a:prstGeom>
+          <a:noFill/>
+        </p:spPr>
+        <p:txBody>
+          <a:bodyPr wrap="square" anchor="t" lIns="0" rIns="0" tIns="0" bIns="0">
+            <a:spAutoFit/>
+          </a:bodyPr>
+          <a:lstStyle/>
+          <a:p>
+            <a:pPr algn="l">
+              <a:lnSpc>
+                <a:spcPct val="135000"/>
+              </a:lnSpc>
+              <a:spcAft>
+                <a:spcPts val="300"/>
+              </a:spcAft>
+            </a:pPr>
+            <a:r>
+              <a:rPr sz="1250" b="0">
+                <a:solidFill>
+                  <a:srgbClr val="1C2A33"/>
+                </a:solidFill>
+                <a:latin typeface="楷体"/>
+                <a:ea typeface="楷体"/>
+                <a:cs typeface="楷体"/>
+              </a:rPr>
+              <a:t>破洞/细节越读越深</a:t>
+            </a:r>
+          </a:p>
+          <a:p>
+            <a:pPr algn="l">
+              <a:lnSpc>
+                <a:spcPct val="135000"/>
+              </a:lnSpc>
+              <a:spcAft>
+                <a:spcPts val="300"/>
+              </a:spcAft>
+            </a:pPr>
+            <a:r>
+              <a:rPr sz="1250" b="0">
+                <a:solidFill>
+                  <a:srgbClr val="1C2A33"/>
+                </a:solidFill>
+                <a:latin typeface="楷体"/>
+                <a:ea typeface="楷体"/>
+                <a:cs typeface="楷体"/>
+              </a:rPr>
+              <a:t>铅笔盒/不只是物,是渴望</a:t>
+            </a:r>
+          </a:p>
+          <a:p>
+            <a:pPr algn="l">
+              <a:lnSpc>
+                <a:spcPct val="135000"/>
+              </a:lnSpc>
+              <a:spcAft>
+                <a:spcPts val="300"/>
+              </a:spcAft>
+            </a:pPr>
+            <a:r>
+              <a:rPr sz="1250" b="0">
+                <a:solidFill>
+                  <a:srgbClr val="1C2A33"/>
+                </a:solidFill>
+                <a:latin typeface="楷体"/>
+                <a:ea typeface="楷体"/>
+                <a:cs typeface="楷体"/>
+              </a:rPr>
+              <a:t>……(便签贴满)</a:t>
+            </a:r>
+          </a:p>
+          <a:p>
+            <a:pPr algn="l">
+              <a:lnSpc>
+                <a:spcPct val="135000"/>
+              </a:lnSpc>
+              <a:spcAft>
+                <a:spcPts val="300"/>
+              </a:spcAft>
+            </a:pPr>
+            <a:r>
+              <a:rPr sz="1250" b="0">
+                <a:solidFill>
+                  <a:srgbClr val="1C2A33"/>
+                </a:solidFill>
+                <a:latin typeface="楷体"/>
+                <a:ea typeface="楷体"/>
+                <a:cs typeface="楷体"/>
+              </a:rPr>
+              <a:t>【反思三问】</a:t>
+            </a:r>
+          </a:p>
+          <a:p>
+            <a:pPr algn="l">
+              <a:lnSpc>
+                <a:spcPct val="135000"/>
+              </a:lnSpc>
+              <a:spcAft>
+                <a:spcPts val="300"/>
+              </a:spcAft>
+            </a:pPr>
+            <a:r>
+              <a:rPr sz="1250" b="0">
+                <a:solidFill>
+                  <a:srgbClr val="1C2A33"/>
+                </a:solidFill>
+                <a:latin typeface="楷体"/>
+                <a:ea typeface="楷体"/>
+                <a:cs typeface="楷体"/>
+              </a:rPr>
+              <a:t>①我学会了__</a:t>
+            </a:r>
+          </a:p>
+          <a:p>
+            <a:pPr algn="l">
+              <a:lnSpc>
+                <a:spcPct val="135000"/>
+              </a:lnSpc>
+              <a:spcAft>
+                <a:spcPts val="300"/>
+              </a:spcAft>
+            </a:pPr>
+            <a:r>
+              <a:rPr sz="1250" b="0">
+                <a:solidFill>
+                  <a:srgbClr val="1C2A33"/>
+                </a:solidFill>
+                <a:latin typeface="楷体"/>
+                <a:ea typeface="楷体"/>
+                <a:cs typeface="楷体"/>
+              </a:rPr>
+              <a:t>②我需提升__</a:t>
+            </a:r>
+          </a:p>
+          <a:p>
+            <a:pPr algn="l">
+              <a:lnSpc>
+                <a:spcPct val="135000"/>
+              </a:lnSpc>
+              <a:spcAft>
+                <a:spcPts val="300"/>
+              </a:spcAft>
+            </a:pPr>
+            <a:r>
+              <a:rPr sz="1250" b="0">
+                <a:solidFill>
+                  <a:srgbClr val="1C2A33"/>
+                </a:solidFill>
+                <a:latin typeface="楷体"/>
+                <a:ea typeface="楷体"/>
+                <a:cs typeface="楷体"/>
+              </a:rPr>
+              <a:t>③我的疑问__</a:t>
+            </a:r>
+          </a:p>
+          <a:p>
+            <a:pPr algn="l">
+              <a:lnSpc>
+                <a:spcPct val="135000"/>
+              </a:lnSpc>
+              <a:spcAft>
+                <a:spcPts val="300"/>
+              </a:spcAft>
+            </a:pPr>
+            <a:r>
+              <a:rPr sz="1250" b="0">
+                <a:solidFill>
+                  <a:srgbClr val="1C2A33"/>
+                </a:solidFill>
+                <a:latin typeface="楷体"/>
+                <a:ea typeface="楷体"/>
+                <a:cs typeface="楷体"/>
+              </a:rPr>
+              <a:t>读→写→用:意象可迁移</a:t>
+            </a:r>
+          </a:p>
+        </p:txBody>
+      </p:sp>
+      <p:sp>
+        <p:nvSpPr>
+          <p:cNvPr id="9" name="TextBox 8"/>
           <p:cNvSpPr txBox="1"/>
           <p:nvPr/>
         </p:nvSpPr>
@@ -7521,13 +8562,13 @@
             <a:r>
               <a:rPr sz="1300" b="1">
                 <a:solidFill>
-                  <a:srgbClr val="2E7D6B"/>
+                  <a:srgbClr val="B23A2A"/>
                 </a:solidFill>
                 <a:latin typeface="微软雅黑"/>
                 <a:ea typeface="微软雅黑"/>
                 <a:cs typeface="微软雅黑"/>
               </a:rPr>
-              <a:t>分层作业</a:t>
+              <a:t>作业 · 分层</a:t>
             </a:r>
           </a:p>
         </p:txBody>
@@ -7542,6 +8583,318 @@
           <a:xfrm>
             <a:off x="640080" y="1097280"/>
             <a:ext cx="822960" cy="30480"/>
+          </a:xfrm>
+          <a:prstGeom prst="rect">
+            <a:avLst/>
+          </a:prstGeom>
+          <a:solidFill>
+            <a:srgbClr val="B23A2A"/>
+          </a:solidFill>
+          <a:ln>
+            <a:noFill/>
+          </a:ln>
+          <a:effectLst/>
+        </p:spPr>
+        <p:style>
+          <a:lnRef idx="1">
+            <a:schemeClr val="accent1"/>
+          </a:lnRef>
+          <a:fillRef idx="3">
+            <a:schemeClr val="accent1"/>
+          </a:fillRef>
+          <a:effectRef idx="2">
+            <a:schemeClr val="accent1"/>
+          </a:effectRef>
+          <a:fontRef idx="minor">
+            <a:schemeClr val="lt1"/>
+          </a:fontRef>
+        </p:style>
+        <p:txBody>
+          <a:bodyPr rtlCol="0" anchor="ctr"/>
+          <a:lstStyle/>
+          <a:p>
+            <a:pPr algn="ctr"/>
+          </a:p>
+        </p:txBody>
+      </p:sp>
+      <p:sp>
+        <p:nvSpPr>
+          <p:cNvPr id="5" name="TextBox 4"/>
+          <p:cNvSpPr txBox="1"/>
+          <p:nvPr/>
+        </p:nvSpPr>
+        <p:spPr>
+          <a:xfrm>
+            <a:off x="640080" y="1325880"/>
+            <a:ext cx="10911535" cy="548640"/>
+          </a:xfrm>
+          <a:prstGeom prst="rect">
+            <a:avLst/>
+          </a:prstGeom>
+          <a:noFill/>
+        </p:spPr>
+        <p:txBody>
+          <a:bodyPr wrap="square" anchor="t" lIns="0" rIns="0" tIns="0" bIns="0">
+            <a:spAutoFit/>
+          </a:bodyPr>
+          <a:lstStyle/>
+          <a:p>
+            <a:pPr algn="l">
+              <a:lnSpc>
+                <a:spcPct val="145000"/>
+              </a:lnSpc>
+              <a:spcAft>
+                <a:spcPts val="400"/>
+              </a:spcAft>
+            </a:pPr>
+            <a:r>
+              <a:rPr sz="2600" b="1">
+                <a:solidFill>
+                  <a:srgbClr val="1C2A33"/>
+                </a:solidFill>
+                <a:latin typeface="楷体"/>
+                <a:ea typeface="楷体"/>
+                <a:cs typeface="楷体"/>
+              </a:rPr>
+              <a:t>基础 · 提升</a:t>
+            </a:r>
+          </a:p>
+        </p:txBody>
+      </p:sp>
+      <p:sp>
+        <p:nvSpPr>
+          <p:cNvPr id="6" name="Rounded Rectangle 5"/>
+          <p:cNvSpPr/>
+          <p:nvPr/>
+        </p:nvSpPr>
+        <p:spPr>
+          <a:xfrm>
+            <a:off x="640080" y="2194560"/>
+            <a:ext cx="5272887" cy="4023360"/>
+          </a:xfrm>
+          <a:prstGeom prst="roundRect">
+            <a:avLst/>
+          </a:prstGeom>
+          <a:solidFill>
+            <a:srgbClr val="FFFFFF"/>
+          </a:solidFill>
+          <a:ln w="20320">
+            <a:solidFill>
+              <a:srgbClr val="B23A2A"/>
+            </a:solidFill>
+          </a:ln>
+          <a:effectLst/>
+        </p:spPr>
+        <p:style>
+          <a:lnRef idx="1">
+            <a:schemeClr val="accent1"/>
+          </a:lnRef>
+          <a:fillRef idx="3">
+            <a:schemeClr val="accent1"/>
+          </a:fillRef>
+          <a:effectRef idx="2">
+            <a:schemeClr val="accent1"/>
+          </a:effectRef>
+          <a:fontRef idx="minor">
+            <a:schemeClr val="lt1"/>
+          </a:fontRef>
+        </p:style>
+        <p:txBody>
+          <a:bodyPr rtlCol="0" anchor="ctr"/>
+          <a:lstStyle/>
+          <a:p>
+            <a:pPr algn="ctr"/>
+          </a:p>
+        </p:txBody>
+      </p:sp>
+      <p:sp>
+        <p:nvSpPr>
+          <p:cNvPr id="7" name="Rectangle 6"/>
+          <p:cNvSpPr/>
+          <p:nvPr/>
+        </p:nvSpPr>
+        <p:spPr>
+          <a:xfrm>
+            <a:off x="640080" y="2194560"/>
+            <a:ext cx="5272887" cy="548640"/>
+          </a:xfrm>
+          <a:prstGeom prst="rect">
+            <a:avLst/>
+          </a:prstGeom>
+          <a:solidFill>
+            <a:srgbClr val="B23A2A"/>
+          </a:solidFill>
+          <a:ln>
+            <a:noFill/>
+          </a:ln>
+          <a:effectLst/>
+        </p:spPr>
+        <p:style>
+          <a:lnRef idx="1">
+            <a:schemeClr val="accent1"/>
+          </a:lnRef>
+          <a:fillRef idx="3">
+            <a:schemeClr val="accent1"/>
+          </a:fillRef>
+          <a:effectRef idx="2">
+            <a:schemeClr val="accent1"/>
+          </a:effectRef>
+          <a:fontRef idx="minor">
+            <a:schemeClr val="lt1"/>
+          </a:fontRef>
+        </p:style>
+        <p:txBody>
+          <a:bodyPr rtlCol="0" anchor="ctr"/>
+          <a:lstStyle/>
+          <a:p>
+            <a:pPr algn="ctr"/>
+          </a:p>
+        </p:txBody>
+      </p:sp>
+      <p:sp>
+        <p:nvSpPr>
+          <p:cNvPr id="8" name="TextBox 7"/>
+          <p:cNvSpPr txBox="1"/>
+          <p:nvPr/>
+        </p:nvSpPr>
+        <p:spPr>
+          <a:xfrm>
+            <a:off x="640080" y="2304288"/>
+            <a:ext cx="5272887" cy="365760"/>
+          </a:xfrm>
+          <a:prstGeom prst="rect">
+            <a:avLst/>
+          </a:prstGeom>
+          <a:noFill/>
+        </p:spPr>
+        <p:txBody>
+          <a:bodyPr wrap="square" anchor="t" lIns="0" rIns="0" tIns="0" bIns="0">
+            <a:spAutoFit/>
+          </a:bodyPr>
+          <a:lstStyle/>
+          <a:p>
+            <a:pPr algn="ctr">
+              <a:lnSpc>
+                <a:spcPct val="145000"/>
+              </a:lnSpc>
+              <a:spcAft>
+                <a:spcPts val="400"/>
+              </a:spcAft>
+            </a:pPr>
+            <a:r>
+              <a:rPr sz="1600" b="1">
+                <a:solidFill>
+                  <a:srgbClr val="FFFFFF"/>
+                </a:solidFill>
+                <a:latin typeface="微软雅黑"/>
+                <a:ea typeface="微软雅黑"/>
+                <a:cs typeface="微软雅黑"/>
+              </a:rPr>
+              <a:t>基础 · 必做</a:t>
+            </a:r>
+          </a:p>
+        </p:txBody>
+      </p:sp>
+      <p:sp>
+        <p:nvSpPr>
+          <p:cNvPr id="9" name="TextBox 8"/>
+          <p:cNvSpPr txBox="1"/>
+          <p:nvPr/>
+        </p:nvSpPr>
+        <p:spPr>
+          <a:xfrm>
+            <a:off x="914400" y="2971800"/>
+            <a:ext cx="4724247" cy="3063240"/>
+          </a:xfrm>
+          <a:prstGeom prst="rect">
+            <a:avLst/>
+          </a:prstGeom>
+          <a:noFill/>
+        </p:spPr>
+        <p:txBody>
+          <a:bodyPr wrap="square" anchor="t" lIns="0" rIns="0" tIns="0" bIns="0">
+            <a:spAutoFit/>
+          </a:bodyPr>
+          <a:lstStyle/>
+          <a:p>
+            <a:pPr algn="l">
+              <a:lnSpc>
+                <a:spcPct val="150000"/>
+              </a:lnSpc>
+              <a:spcAft>
+                <a:spcPts val="400"/>
+              </a:spcAft>
+            </a:pPr>
+            <a:r>
+              <a:rPr sz="1300" b="0">
+                <a:solidFill>
+                  <a:srgbClr val="1C2A33"/>
+                </a:solidFill>
+                <a:latin typeface="楷体"/>
+                <a:ea typeface="楷体"/>
+                <a:cs typeface="楷体"/>
+              </a:rPr>
+              <a:t>1. 提交单元学习反思单（三行完整填写）。2. 在作文本上誊抄你朗诵的诗（自创或课文）+ 一句朗诵感受。</a:t>
+            </a:r>
+          </a:p>
+        </p:txBody>
+      </p:sp>
+      <p:sp>
+        <p:nvSpPr>
+          <p:cNvPr id="10" name="Rounded Rectangle 9"/>
+          <p:cNvSpPr/>
+          <p:nvPr/>
+        </p:nvSpPr>
+        <p:spPr>
+          <a:xfrm>
+            <a:off x="6278727" y="2194560"/>
+            <a:ext cx="5272887" cy="4023360"/>
+          </a:xfrm>
+          <a:prstGeom prst="roundRect">
+            <a:avLst/>
+          </a:prstGeom>
+          <a:solidFill>
+            <a:srgbClr val="FFFFFF"/>
+          </a:solidFill>
+          <a:ln w="20320">
+            <a:solidFill>
+              <a:srgbClr val="2E7D6B"/>
+            </a:solidFill>
+          </a:ln>
+          <a:effectLst/>
+        </p:spPr>
+        <p:style>
+          <a:lnRef idx="1">
+            <a:schemeClr val="accent1"/>
+          </a:lnRef>
+          <a:fillRef idx="3">
+            <a:schemeClr val="accent1"/>
+          </a:fillRef>
+          <a:effectRef idx="2">
+            <a:schemeClr val="accent1"/>
+          </a:effectRef>
+          <a:fontRef idx="minor">
+            <a:schemeClr val="lt1"/>
+          </a:fontRef>
+        </p:style>
+        <p:txBody>
+          <a:bodyPr rtlCol="0" anchor="ctr"/>
+          <a:lstStyle/>
+          <a:p>
+            <a:pPr algn="ctr"/>
+          </a:p>
+        </p:txBody>
+      </p:sp>
+      <p:sp>
+        <p:nvSpPr>
+          <p:cNvPr id="11" name="Rectangle 10"/>
+          <p:cNvSpPr/>
+          <p:nvPr/>
+        </p:nvSpPr>
+        <p:spPr>
+          <a:xfrm>
+            <a:off x="6278727" y="2194560"/>
+            <a:ext cx="5272887" cy="548640"/>
           </a:xfrm>
           <a:prstGeom prst="rect">
             <a:avLst/>
@@ -7578,60 +8931,14 @@
       </p:sp>
       <p:sp>
         <p:nvSpPr>
-          <p:cNvPr id="5" name="Rounded Rectangle 4"/>
-          <p:cNvSpPr/>
-          <p:nvPr/>
-        </p:nvSpPr>
-        <p:spPr>
-          <a:xfrm>
-            <a:off x="640080" y="1417320"/>
-            <a:ext cx="10911535" cy="1417320"/>
-          </a:xfrm>
-          <a:prstGeom prst="roundRect">
-            <a:avLst/>
-          </a:prstGeom>
-          <a:solidFill>
-            <a:srgbClr val="FFFFFF"/>
-          </a:solidFill>
-          <a:ln w="22860">
-            <a:solidFill>
-              <a:srgbClr val="2E7D6B"/>
-            </a:solidFill>
-          </a:ln>
-          <a:effectLst/>
-        </p:spPr>
-        <p:style>
-          <a:lnRef idx="1">
-            <a:schemeClr val="accent1"/>
-          </a:lnRef>
-          <a:fillRef idx="3">
-            <a:schemeClr val="accent1"/>
-          </a:fillRef>
-          <a:effectRef idx="2">
-            <a:schemeClr val="accent1"/>
-          </a:effectRef>
-          <a:fontRef idx="minor">
-            <a:schemeClr val="lt1"/>
-          </a:fontRef>
-        </p:style>
-        <p:txBody>
-          <a:bodyPr rtlCol="0" anchor="ctr"/>
-          <a:lstStyle/>
-          <a:p>
-            <a:pPr algn="ctr"/>
-          </a:p>
-        </p:txBody>
-      </p:sp>
-      <p:sp>
-        <p:nvSpPr>
-          <p:cNvPr id="6" name="TextBox 5"/>
+          <p:cNvPr id="12" name="TextBox 11"/>
           <p:cNvSpPr txBox="1"/>
           <p:nvPr/>
         </p:nvSpPr>
         <p:spPr>
           <a:xfrm>
-            <a:off x="1371600" y="1527048"/>
-            <a:ext cx="9997135" cy="457200"/>
+            <a:off x="6278727" y="2304288"/>
+            <a:ext cx="5272887" cy="365760"/>
           </a:xfrm>
           <a:prstGeom prst="rect">
             <a:avLst/>
@@ -7644,35 +8951,38 @@
           </a:bodyPr>
           <a:lstStyle/>
           <a:p>
-            <a:pPr algn="l">
+            <a:pPr algn="ctr">
               <a:lnSpc>
-                <a:spcPct val="110000"/>
+                <a:spcPct val="145000"/>
               </a:lnSpc>
+              <a:spcAft>
+                <a:spcPts val="400"/>
+              </a:spcAft>
             </a:pPr>
             <a:r>
               <a:rPr sz="1600" b="1">
                 <a:solidFill>
-                  <a:srgbClr val="1C2A33"/>
+                  <a:srgbClr val="FFFFFF"/>
                 </a:solidFill>
                 <a:latin typeface="微软雅黑"/>
                 <a:ea typeface="微软雅黑"/>
                 <a:cs typeface="微软雅黑"/>
               </a:rPr>
-              <a:t/>
-            </a:r>
-          </a:p>
-        </p:txBody>
-      </p:sp>
-      <p:sp>
-        <p:nvSpPr>
-          <p:cNvPr id="7" name="TextBox 6"/>
+              <a:t>提升 · 选做</a:t>
+            </a:r>
+          </a:p>
+        </p:txBody>
+      </p:sp>
+      <p:sp>
+        <p:nvSpPr>
+          <p:cNvPr id="13" name="TextBox 12"/>
           <p:cNvSpPr txBox="1"/>
           <p:nvPr/>
         </p:nvSpPr>
         <p:spPr>
           <a:xfrm>
-            <a:off x="1371600" y="1965960"/>
-            <a:ext cx="9997135" cy="777240"/>
+            <a:off x="6553047" y="2971800"/>
+            <a:ext cx="4724247" cy="3063240"/>
           </a:xfrm>
           <a:prstGeom prst="rect">
             <a:avLst/>
@@ -7687,11 +8997,14 @@
           <a:p>
             <a:pPr algn="l">
               <a:lnSpc>
-                <a:spcPct val="128000"/>
+                <a:spcPct val="150000"/>
               </a:lnSpc>
+              <a:spcAft>
+                <a:spcPts val="400"/>
+              </a:spcAft>
             </a:pPr>
             <a:r>
-              <a:rPr sz="1200" b="0">
+              <a:rPr sz="1300" b="0">
                 <a:solidFill>
                   <a:srgbClr val="1C2A33"/>
                 </a:solidFill>
@@ -7699,142 +9012,14 @@
                 <a:ea typeface="楷体"/>
                 <a:cs typeface="楷体"/>
               </a:rPr>
-              <a:t>【基础作业】1. 提交单元学习反思单（三行完整填写）。2. 在作文本上誊抄你朗诵的诗（自创或课文）+ 一句朗诵感受。</a:t>
-            </a:r>
-          </a:p>
-        </p:txBody>
-      </p:sp>
-      <p:sp>
-        <p:nvSpPr>
-          <p:cNvPr id="8" name="Rounded Rectangle 7"/>
-          <p:cNvSpPr/>
-          <p:nvPr/>
-        </p:nvSpPr>
-        <p:spPr>
-          <a:xfrm>
-            <a:off x="640080" y="2971800"/>
-            <a:ext cx="10911535" cy="1417320"/>
-          </a:xfrm>
-          <a:prstGeom prst="roundRect">
-            <a:avLst/>
-          </a:prstGeom>
-          <a:solidFill>
-            <a:srgbClr val="FFFFFF"/>
-          </a:solidFill>
-          <a:ln w="22860">
-            <a:solidFill>
-              <a:srgbClr val="2E7D6B"/>
-            </a:solidFill>
-          </a:ln>
-          <a:effectLst/>
-        </p:spPr>
-        <p:style>
-          <a:lnRef idx="1">
-            <a:schemeClr val="accent1"/>
-          </a:lnRef>
-          <a:fillRef idx="3">
-            <a:schemeClr val="accent1"/>
-          </a:fillRef>
-          <a:effectRef idx="2">
-            <a:schemeClr val="accent1"/>
-          </a:effectRef>
-          <a:fontRef idx="minor">
-            <a:schemeClr val="lt1"/>
-          </a:fontRef>
-        </p:style>
-        <p:txBody>
-          <a:bodyPr rtlCol="0" anchor="ctr"/>
-          <a:lstStyle/>
-          <a:p>
-            <a:pPr algn="ctr"/>
-          </a:p>
-        </p:txBody>
-      </p:sp>
-      <p:sp>
-        <p:nvSpPr>
-          <p:cNvPr id="9" name="TextBox 8"/>
-          <p:cNvSpPr txBox="1"/>
-          <p:nvPr/>
-        </p:nvSpPr>
-        <p:spPr>
-          <a:xfrm>
-            <a:off x="1371600" y="3081528"/>
-            <a:ext cx="9997135" cy="457200"/>
-          </a:xfrm>
-          <a:prstGeom prst="rect">
-            <a:avLst/>
-          </a:prstGeom>
-          <a:noFill/>
-        </p:spPr>
-        <p:txBody>
-          <a:bodyPr wrap="square" anchor="t" lIns="0" rIns="0" tIns="0" bIns="0">
-            <a:spAutoFit/>
-          </a:bodyPr>
-          <a:lstStyle/>
-          <a:p>
-            <a:pPr algn="l">
-              <a:lnSpc>
-                <a:spcPct val="110000"/>
-              </a:lnSpc>
-            </a:pPr>
-            <a:r>
-              <a:rPr sz="1600" b="1">
-                <a:solidFill>
-                  <a:srgbClr val="1C2A33"/>
-                </a:solidFill>
-                <a:latin typeface="微软雅黑"/>
-                <a:ea typeface="微软雅黑"/>
-                <a:cs typeface="微软雅黑"/>
-              </a:rPr>
-              <a:t/>
-            </a:r>
-          </a:p>
-        </p:txBody>
-      </p:sp>
-      <p:sp>
-        <p:nvSpPr>
-          <p:cNvPr id="10" name="TextBox 9"/>
-          <p:cNvSpPr txBox="1"/>
-          <p:nvPr/>
-        </p:nvSpPr>
-        <p:spPr>
-          <a:xfrm>
-            <a:off x="1371600" y="3520440"/>
-            <a:ext cx="9997135" cy="777240"/>
-          </a:xfrm>
-          <a:prstGeom prst="rect">
-            <a:avLst/>
-          </a:prstGeom>
-          <a:noFill/>
-        </p:spPr>
-        <p:txBody>
-          <a:bodyPr wrap="square" anchor="t" lIns="0" rIns="0" tIns="0" bIns="0">
-            <a:spAutoFit/>
-          </a:bodyPr>
-          <a:lstStyle/>
-          <a:p>
-            <a:pPr algn="l">
-              <a:lnSpc>
-                <a:spcPct val="128000"/>
-              </a:lnSpc>
-            </a:pPr>
-            <a:r>
-              <a:rPr sz="1100" b="0">
-                <a:solidFill>
-                  <a:srgbClr val="1C2A33"/>
-                </a:solidFill>
-                <a:latin typeface="楷体"/>
-                <a:ea typeface="楷体"/>
-                <a:cs typeface="楷体"/>
-              </a:rPr>
-              <a:t>【提高作业】写一段150字「单元学习总结」，要求：①点明本单元最重要的一个方法；②举一个具体例子说明你用了这个方法；③说一个你想在下单元继续提升的方面。</a:t>
-            </a:r>
-          </a:p>
-        </p:txBody>
-      </p:sp>
-      <p:sp>
-        <p:nvSpPr>
-          <p:cNvPr id="11" name="TextBox 10"/>
+              <a:t>写一段150字「单元学习总结」，要求：①点明本单元最重要的一个方法；②举一个具体例子说明你用了这个方法；③说一个你想在下单元继续提升的方面。 【——用】反思单评价：三行填写完整+具体=合格；有方法意识+有自我诊断=良好；疑问有感悟价值（如「为什么现代诗不押韵也算诗」）=优秀。单元总结评价：有点明方法+举例=合格；有方法迁移意识=良好；有个性化学习反思=优秀。</a:t>
+            </a:r>
+          </a:p>
+        </p:txBody>
+      </p:sp>
+      <p:sp>
+        <p:nvSpPr>
+          <p:cNvPr id="14" name="TextBox 13"/>
           <p:cNvSpPr txBox="1"/>
           <p:nvPr/>
         </p:nvSpPr>
@@ -7961,13 +9146,13 @@
             <a:r>
               <a:rPr sz="1300" b="1">
                 <a:solidFill>
-                  <a:srgbClr val="C8A86B"/>
+                  <a:srgbClr val="B23A2A"/>
                 </a:solidFill>
                 <a:latin typeface="微软雅黑"/>
                 <a:ea typeface="微软雅黑"/>
                 <a:cs typeface="微软雅黑"/>
               </a:rPr>
-              <a:t>本课小结</a:t>
+              <a:t>单元小结 · 反思引导</a:t>
             </a:r>
           </a:p>
         </p:txBody>
@@ -7982,6 +9167,550 @@
           <a:xfrm>
             <a:off x="640080" y="1097280"/>
             <a:ext cx="822960" cy="30480"/>
+          </a:xfrm>
+          <a:prstGeom prst="rect">
+            <a:avLst/>
+          </a:prstGeom>
+          <a:solidFill>
+            <a:srgbClr val="B23A2A"/>
+          </a:solidFill>
+          <a:ln>
+            <a:noFill/>
+          </a:ln>
+          <a:effectLst/>
+        </p:spPr>
+        <p:style>
+          <a:lnRef idx="1">
+            <a:schemeClr val="accent1"/>
+          </a:lnRef>
+          <a:fillRef idx="3">
+            <a:schemeClr val="accent1"/>
+          </a:fillRef>
+          <a:effectRef idx="2">
+            <a:schemeClr val="accent1"/>
+          </a:effectRef>
+          <a:fontRef idx="minor">
+            <a:schemeClr val="lt1"/>
+          </a:fontRef>
+        </p:style>
+        <p:txBody>
+          <a:bodyPr rtlCol="0" anchor="ctr"/>
+          <a:lstStyle/>
+          <a:p>
+            <a:pPr algn="ctr"/>
+          </a:p>
+        </p:txBody>
+      </p:sp>
+      <p:sp>
+        <p:nvSpPr>
+          <p:cNvPr id="5" name="TextBox 4"/>
+          <p:cNvSpPr txBox="1"/>
+          <p:nvPr/>
+        </p:nvSpPr>
+        <p:spPr>
+          <a:xfrm>
+            <a:off x="640080" y="1325880"/>
+            <a:ext cx="10911535" cy="640080"/>
+          </a:xfrm>
+          <a:prstGeom prst="rect">
+            <a:avLst/>
+          </a:prstGeom>
+          <a:noFill/>
+        </p:spPr>
+        <p:txBody>
+          <a:bodyPr wrap="square" anchor="t" lIns="0" rIns="0" tIns="0" bIns="0">
+            <a:spAutoFit/>
+          </a:bodyPr>
+          <a:lstStyle/>
+          <a:p>
+            <a:pPr algn="l">
+              <a:lnSpc>
+                <a:spcPct val="145000"/>
+              </a:lnSpc>
+              <a:spcAft>
+                <a:spcPts val="400"/>
+              </a:spcAft>
+            </a:pPr>
+            <a:r>
+              <a:rPr sz="2600" b="1">
+                <a:solidFill>
+                  <a:srgbClr val="1C2A33"/>
+                </a:solidFill>
+                <a:latin typeface="楷体"/>
+                <a:ea typeface="楷体"/>
+                <a:cs typeface="楷体"/>
+              </a:rPr>
+              <a:t>回望本单元：青春的价值</a:t>
+            </a:r>
+          </a:p>
+        </p:txBody>
+      </p:sp>
+      <p:sp>
+        <p:nvSpPr>
+          <p:cNvPr id="6" name="Rounded Rectangle 5"/>
+          <p:cNvSpPr/>
+          <p:nvPr/>
+        </p:nvSpPr>
+        <p:spPr>
+          <a:xfrm>
+            <a:off x="640080" y="2057400"/>
+            <a:ext cx="5227167" cy="4206240"/>
+          </a:xfrm>
+          <a:prstGeom prst="roundRect">
+            <a:avLst/>
+          </a:prstGeom>
+          <a:solidFill>
+            <a:srgbClr val="FFFFFF"/>
+          </a:solidFill>
+          <a:ln w="20320">
+            <a:solidFill>
+              <a:srgbClr val="2E7D6B"/>
+            </a:solidFill>
+          </a:ln>
+          <a:effectLst/>
+        </p:spPr>
+        <p:style>
+          <a:lnRef idx="1">
+            <a:schemeClr val="accent1"/>
+          </a:lnRef>
+          <a:fillRef idx="3">
+            <a:schemeClr val="accent1"/>
+          </a:fillRef>
+          <a:effectRef idx="2">
+            <a:schemeClr val="accent1"/>
+          </a:effectRef>
+          <a:fontRef idx="minor">
+            <a:schemeClr val="lt1"/>
+          </a:fontRef>
+        </p:style>
+        <p:txBody>
+          <a:bodyPr rtlCol="0" anchor="ctr"/>
+          <a:lstStyle/>
+          <a:p>
+            <a:pPr algn="ctr"/>
+          </a:p>
+        </p:txBody>
+      </p:sp>
+      <p:sp>
+        <p:nvSpPr>
+          <p:cNvPr id="7" name="TextBox 6"/>
+          <p:cNvSpPr txBox="1"/>
+          <p:nvPr/>
+        </p:nvSpPr>
+        <p:spPr>
+          <a:xfrm>
+            <a:off x="914400" y="2212848"/>
+            <a:ext cx="4678527" cy="457200"/>
+          </a:xfrm>
+          <a:prstGeom prst="rect">
+            <a:avLst/>
+          </a:prstGeom>
+          <a:noFill/>
+        </p:spPr>
+        <p:txBody>
+          <a:bodyPr wrap="square" anchor="t" lIns="0" rIns="0" tIns="0" bIns="0">
+            <a:spAutoFit/>
+          </a:bodyPr>
+          <a:lstStyle/>
+          <a:p>
+            <a:pPr algn="l">
+              <a:lnSpc>
+                <a:spcPct val="145000"/>
+              </a:lnSpc>
+              <a:spcAft>
+                <a:spcPts val="400"/>
+              </a:spcAft>
+            </a:pPr>
+            <a:r>
+              <a:rPr sz="1600" b="1">
+                <a:solidFill>
+                  <a:srgbClr val="2E7D6B"/>
+                </a:solidFill>
+                <a:latin typeface="楷体"/>
+                <a:ea typeface="楷体"/>
+                <a:cs typeface="楷体"/>
+              </a:rPr>
+              <a:t>反思引导</a:t>
+            </a:r>
+          </a:p>
+        </p:txBody>
+      </p:sp>
+      <p:sp>
+        <p:nvSpPr>
+          <p:cNvPr id="8" name="TextBox 7"/>
+          <p:cNvSpPr txBox="1"/>
+          <p:nvPr/>
+        </p:nvSpPr>
+        <p:spPr>
+          <a:xfrm>
+            <a:off x="914400" y="2743200"/>
+            <a:ext cx="4678527" cy="3383280"/>
+          </a:xfrm>
+          <a:prstGeom prst="rect">
+            <a:avLst/>
+          </a:prstGeom>
+          <a:noFill/>
+        </p:spPr>
+        <p:txBody>
+          <a:bodyPr wrap="square" anchor="t" lIns="0" rIns="0" tIns="0" bIns="0">
+            <a:spAutoFit/>
+          </a:bodyPr>
+          <a:lstStyle/>
+          <a:p>
+            <a:pPr algn="l">
+              <a:lnSpc>
+                <a:spcPct val="150000"/>
+              </a:lnSpc>
+              <a:spcAft>
+                <a:spcPts val="1200"/>
+              </a:spcAft>
+            </a:pPr>
+            <a:r>
+              <a:rPr sz="1450" b="0">
+                <a:solidFill>
+                  <a:srgbClr val="1C2A33"/>
+                </a:solidFill>
+                <a:latin typeface="楷体"/>
+                <a:ea typeface="楷体"/>
+                <a:cs typeface="楷体"/>
+              </a:rPr>
+              <a:t>回望本单元，哪一首诗或哪个人物最打动你？写下理由。</a:t>
+            </a:r>
+          </a:p>
+          <a:p>
+            <a:pPr algn="l">
+              <a:lnSpc>
+                <a:spcPct val="150000"/>
+              </a:lnSpc>
+              <a:spcAft>
+                <a:spcPts val="1200"/>
+              </a:spcAft>
+            </a:pPr>
+            <a:r>
+              <a:rPr sz="1450" b="0">
+                <a:solidFill>
+                  <a:srgbClr val="1C2A33"/>
+                </a:solidFill>
+                <a:latin typeface="楷体"/>
+                <a:ea typeface="楷体"/>
+                <a:cs typeface="楷体"/>
+              </a:rPr>
+              <a:t>用「意象」的眼光重读一段文字，你看到了什么？</a:t>
+            </a:r>
+          </a:p>
+          <a:p>
+            <a:pPr algn="l">
+              <a:lnSpc>
+                <a:spcPct val="150000"/>
+              </a:lnSpc>
+              <a:spcAft>
+                <a:spcPts val="1200"/>
+              </a:spcAft>
+            </a:pPr>
+            <a:r>
+              <a:rPr sz="1450" b="0">
+                <a:solidFill>
+                  <a:srgbClr val="1C2A33"/>
+                </a:solidFill>
+                <a:latin typeface="楷体"/>
+                <a:ea typeface="楷体"/>
+                <a:cs typeface="楷体"/>
+              </a:rPr>
+              <a:t>把今天学到的读法，带进下一次自主阅读。</a:t>
+            </a:r>
+          </a:p>
+        </p:txBody>
+      </p:sp>
+      <p:sp>
+        <p:nvSpPr>
+          <p:cNvPr id="9" name="Rounded Rectangle 8"/>
+          <p:cNvSpPr/>
+          <p:nvPr/>
+        </p:nvSpPr>
+        <p:spPr>
+          <a:xfrm>
+            <a:off x="6324447" y="2057400"/>
+            <a:ext cx="5227167" cy="4206240"/>
+          </a:xfrm>
+          <a:prstGeom prst="roundRect">
+            <a:avLst/>
+          </a:prstGeom>
+          <a:solidFill>
+            <a:srgbClr val="FFFFFF"/>
+          </a:solidFill>
+          <a:ln w="20320">
+            <a:solidFill>
+              <a:srgbClr val="C8A86B"/>
+            </a:solidFill>
+          </a:ln>
+          <a:effectLst/>
+        </p:spPr>
+        <p:style>
+          <a:lnRef idx="1">
+            <a:schemeClr val="accent1"/>
+          </a:lnRef>
+          <a:fillRef idx="3">
+            <a:schemeClr val="accent1"/>
+          </a:fillRef>
+          <a:effectRef idx="2">
+            <a:schemeClr val="accent1"/>
+          </a:effectRef>
+          <a:fontRef idx="minor">
+            <a:schemeClr val="lt1"/>
+          </a:fontRef>
+        </p:style>
+        <p:txBody>
+          <a:bodyPr rtlCol="0" anchor="ctr"/>
+          <a:lstStyle/>
+          <a:p>
+            <a:pPr algn="ctr"/>
+          </a:p>
+        </p:txBody>
+      </p:sp>
+      <p:sp>
+        <p:nvSpPr>
+          <p:cNvPr id="10" name="TextBox 9"/>
+          <p:cNvSpPr txBox="1"/>
+          <p:nvPr/>
+        </p:nvSpPr>
+        <p:spPr>
+          <a:xfrm>
+            <a:off x="6598767" y="2212848"/>
+            <a:ext cx="4678527" cy="457200"/>
+          </a:xfrm>
+          <a:prstGeom prst="rect">
+            <a:avLst/>
+          </a:prstGeom>
+          <a:noFill/>
+        </p:spPr>
+        <p:txBody>
+          <a:bodyPr wrap="square" anchor="t" lIns="0" rIns="0" tIns="0" bIns="0">
+            <a:spAutoFit/>
+          </a:bodyPr>
+          <a:lstStyle/>
+          <a:p>
+            <a:pPr algn="l">
+              <a:lnSpc>
+                <a:spcPct val="145000"/>
+              </a:lnSpc>
+              <a:spcAft>
+                <a:spcPts val="400"/>
+              </a:spcAft>
+            </a:pPr>
+            <a:r>
+              <a:rPr sz="1600" b="1">
+                <a:solidFill>
+                  <a:srgbClr val="C8A86B"/>
+                </a:solidFill>
+                <a:latin typeface="楷体"/>
+                <a:ea typeface="楷体"/>
+                <a:cs typeface="楷体"/>
+              </a:rPr>
+              <a:t>本单元核心</a:t>
+            </a:r>
+          </a:p>
+        </p:txBody>
+      </p:sp>
+      <p:sp>
+        <p:nvSpPr>
+          <p:cNvPr id="11" name="TextBox 10"/>
+          <p:cNvSpPr txBox="1"/>
+          <p:nvPr/>
+        </p:nvSpPr>
+        <p:spPr>
+          <a:xfrm>
+            <a:off x="6598767" y="2743200"/>
+            <a:ext cx="4678527" cy="3383280"/>
+          </a:xfrm>
+          <a:prstGeom prst="rect">
+            <a:avLst/>
+          </a:prstGeom>
+          <a:noFill/>
+        </p:spPr>
+        <p:txBody>
+          <a:bodyPr wrap="square" anchor="t" lIns="0" rIns="0" tIns="0" bIns="0">
+            <a:spAutoFit/>
+          </a:bodyPr>
+          <a:lstStyle/>
+          <a:p>
+            <a:pPr algn="l">
+              <a:lnSpc>
+                <a:spcPct val="140000"/>
+              </a:lnSpc>
+              <a:spcAft>
+                <a:spcPts val="200"/>
+              </a:spcAft>
+            </a:pPr>
+            <a:r>
+              <a:rPr sz="1450" b="1">
+                <a:solidFill>
+                  <a:srgbClr val="B23A2A"/>
+                </a:solidFill>
+                <a:latin typeface="微软雅黑"/>
+                <a:ea typeface="微软雅黑"/>
+                <a:cs typeface="微软雅黑"/>
+              </a:rPr>
+              <a:t>① 青春诗朗诵会</a:t>
+            </a:r>
+          </a:p>
+          <a:p>
+            <a:pPr algn="l">
+              <a:lnSpc>
+                <a:spcPct val="140000"/>
+              </a:lnSpc>
+              <a:spcAft>
+                <a:spcPts val="1000"/>
+              </a:spcAft>
+            </a:pPr>
+            <a:r>
+              <a:rPr sz="1300" b="0">
+                <a:solidFill>
+                  <a:srgbClr val="1C2A33"/>
+                </a:solidFill>
+                <a:latin typeface="楷体"/>
+                <a:ea typeface="楷体"/>
+                <a:cs typeface="楷体"/>
+              </a:rPr>
+              <a:t>每人/小组朗诵一首诗（自创或课文），限时2分钟。</a:t>
+            </a:r>
+          </a:p>
+          <a:p>
+            <a:pPr algn="l">
+              <a:lnSpc>
+                <a:spcPct val="140000"/>
+              </a:lnSpc>
+              <a:spcAft>
+                <a:spcPts val="200"/>
+              </a:spcAft>
+            </a:pPr>
+            <a:r>
+              <a:rPr sz="1450" b="1">
+                <a:solidFill>
+                  <a:srgbClr val="B23A2A"/>
+                </a:solidFill>
+                <a:latin typeface="微软雅黑"/>
+                <a:ea typeface="微软雅黑"/>
+                <a:cs typeface="微软雅黑"/>
+              </a:rPr>
+              <a:t>② 青春意象展</a:t>
+            </a:r>
+          </a:p>
+          <a:p>
+            <a:pPr algn="l">
+              <a:lnSpc>
+                <a:spcPct val="140000"/>
+              </a:lnSpc>
+              <a:spcAft>
+                <a:spcPts val="1000"/>
+              </a:spcAft>
+            </a:pPr>
+            <a:r>
+              <a:rPr sz="1300" b="0">
+                <a:solidFill>
+                  <a:srgbClr val="1C2A33"/>
+                </a:solidFill>
+                <a:latin typeface="楷体"/>
+                <a:ea typeface="楷体"/>
+                <a:cs typeface="楷体"/>
+              </a:rPr>
+              <a:t>每人用「一个意象+一句话」概括单元学习感悟。</a:t>
+            </a:r>
+          </a:p>
+          <a:p>
+            <a:pPr algn="l">
+              <a:lnSpc>
+                <a:spcPct val="140000"/>
+              </a:lnSpc>
+              <a:spcAft>
+                <a:spcPts val="200"/>
+              </a:spcAft>
+            </a:pPr>
+            <a:r>
+              <a:rPr sz="1450" b="1">
+                <a:solidFill>
+                  <a:srgbClr val="B23A2A"/>
+                </a:solidFill>
+                <a:latin typeface="微软雅黑"/>
+                <a:ea typeface="微软雅黑"/>
+                <a:cs typeface="微软雅黑"/>
+              </a:rPr>
+              <a:t>③ 单元学习反思单</a:t>
+            </a:r>
+          </a:p>
+          <a:p>
+            <a:pPr algn="l">
+              <a:lnSpc>
+                <a:spcPct val="140000"/>
+              </a:lnSpc>
+              <a:spcAft>
+                <a:spcPts val="1000"/>
+              </a:spcAft>
+            </a:pPr>
+            <a:r>
+              <a:rPr sz="1300" b="0">
+                <a:solidFill>
+                  <a:srgbClr val="1C2A33"/>
+                </a:solidFill>
+                <a:latin typeface="楷体"/>
+                <a:ea typeface="楷体"/>
+                <a:cs typeface="楷体"/>
+              </a:rPr>
+              <a:t>回顾8课时学习路径，填写「我学会了/我还需要提升/我的疑问」。</a:t>
+            </a:r>
+          </a:p>
+        </p:txBody>
+      </p:sp>
+      <p:sp>
+        <p:nvSpPr>
+          <p:cNvPr id="12" name="Rounded Rectangle 11"/>
+          <p:cNvSpPr/>
+          <p:nvPr/>
+        </p:nvSpPr>
+        <p:spPr>
+          <a:xfrm>
+            <a:off x="640080" y="5806440"/>
+            <a:ext cx="10911535" cy="640080"/>
+          </a:xfrm>
+          <a:prstGeom prst="roundRect">
+            <a:avLst/>
+          </a:prstGeom>
+          <a:solidFill>
+            <a:srgbClr val="1C2A33"/>
+          </a:solidFill>
+          <a:effectLst/>
+        </p:spPr>
+        <p:style>
+          <a:lnRef idx="1">
+            <a:schemeClr val="accent1"/>
+          </a:lnRef>
+          <a:fillRef idx="3">
+            <a:schemeClr val="accent1"/>
+          </a:fillRef>
+          <a:effectRef idx="2">
+            <a:schemeClr val="accent1"/>
+          </a:effectRef>
+          <a:fontRef idx="minor">
+            <a:schemeClr val="lt1"/>
+          </a:fontRef>
+        </p:style>
+        <p:txBody>
+          <a:bodyPr rtlCol="0" anchor="ctr"/>
+          <a:lstStyle/>
+          <a:p>
+            <a:pPr algn="ctr"/>
+          </a:p>
+        </p:txBody>
+      </p:sp>
+      <p:sp>
+        <p:nvSpPr>
+          <p:cNvPr id="13" name="Rectangle 12"/>
+          <p:cNvSpPr/>
+          <p:nvPr/>
+        </p:nvSpPr>
+        <p:spPr>
+          <a:xfrm>
+            <a:off x="914400" y="6035040"/>
+            <a:ext cx="54864" cy="279400"/>
           </a:xfrm>
           <a:prstGeom prst="rect">
             <a:avLst/>
@@ -8018,58 +9747,14 @@
       </p:sp>
       <p:sp>
         <p:nvSpPr>
-          <p:cNvPr id="5" name="Rectangle 4"/>
-          <p:cNvSpPr/>
-          <p:nvPr/>
-        </p:nvSpPr>
-        <p:spPr>
-          <a:xfrm>
-            <a:off x="640080" y="1737360"/>
-            <a:ext cx="54864" cy="431800"/>
-          </a:xfrm>
-          <a:prstGeom prst="rect">
-            <a:avLst/>
-          </a:prstGeom>
-          <a:solidFill>
-            <a:srgbClr val="C8A86B"/>
-          </a:solidFill>
-          <a:ln>
-            <a:noFill/>
-          </a:ln>
-          <a:effectLst/>
-        </p:spPr>
-        <p:style>
-          <a:lnRef idx="1">
-            <a:schemeClr val="accent1"/>
-          </a:lnRef>
-          <a:fillRef idx="3">
-            <a:schemeClr val="accent1"/>
-          </a:fillRef>
-          <a:effectRef idx="2">
-            <a:schemeClr val="accent1"/>
-          </a:effectRef>
-          <a:fontRef idx="minor">
-            <a:schemeClr val="lt1"/>
-          </a:fontRef>
-        </p:style>
-        <p:txBody>
-          <a:bodyPr rtlCol="0" anchor="ctr"/>
-          <a:lstStyle/>
-          <a:p>
-            <a:pPr algn="ctr"/>
-          </a:p>
-        </p:txBody>
-      </p:sp>
-      <p:sp>
-        <p:nvSpPr>
-          <p:cNvPr id="6" name="TextBox 5"/>
+          <p:cNvPr id="14" name="TextBox 13"/>
           <p:cNvSpPr txBox="1"/>
           <p:nvPr/>
         </p:nvSpPr>
         <p:spPr>
           <a:xfrm>
-            <a:off x="868680" y="1645920"/>
-            <a:ext cx="10682935" cy="2194560"/>
+            <a:off x="1143000" y="5943600"/>
+            <a:ext cx="10180015" cy="457200"/>
           </a:xfrm>
           <a:prstGeom prst="rect">
             <a:avLst/>
@@ -8084,43 +9769,29 @@
           <a:p>
             <a:pPr algn="l">
               <a:lnSpc>
-                <a:spcPct val="150000"/>
+                <a:spcPct val="140000"/>
               </a:lnSpc>
               <a:spcAft>
-                <a:spcPts val="1000"/>
+                <a:spcPts val="400"/>
               </a:spcAft>
             </a:pPr>
             <a:r>
-              <a:rPr sz="2200" b="0">
-                <a:solidFill>
-                  <a:srgbClr val="1C2A33"/>
+              <a:rPr sz="1350" b="0">
+                <a:solidFill>
+                  <a:srgbClr val="FFFFFF"/>
                 </a:solidFill>
                 <a:latin typeface="楷体"/>
                 <a:ea typeface="楷体"/>
                 <a:cs typeface="楷体"/>
               </a:rPr>
-              <a:t>本单元主题：青春的价值。把今天学到的方法带进下一篇——自己读、自己想、自己写。</a:t>
-            </a:r>
-          </a:p>
-          <a:p>
-            <a:pPr algn="l"/>
-            <a:r>
-              <a:rPr sz="1600" b="1">
-                <a:solidFill>
-                  <a:srgbClr val="B23A2A"/>
-                </a:solidFill>
-                <a:latin typeface="微软雅黑"/>
-                <a:ea typeface="微软雅黑"/>
-                <a:cs typeface="微软雅黑"/>
-              </a:rPr>
-              <a:t>方法迁移：圈关键信息 → 理事件脉络 → 析人物精神</a:t>
-            </a:r>
-          </a:p>
-        </p:txBody>
-      </p:sp>
-      <p:sp>
-        <p:nvSpPr>
-          <p:cNvPr id="7" name="TextBox 6"/>
+              <a:t>一条线：读 → 写 → 用；本单元的意义，在你自己的表达里。</a:t>
+            </a:r>
+          </a:p>
+        </p:txBody>
+      </p:sp>
+      <p:sp>
+        <p:nvSpPr>
+          <p:cNvPr id="15" name="TextBox 14"/>
           <p:cNvSpPr txBox="1"/>
           <p:nvPr/>
         </p:nvSpPr>
